--- a/output/wordlabs-circum-prefix-3day.pptx
+++ b/output/wordlabs-circum-prefix-3day.pptx
@@ -6040,7 +6040,7 @@
                 <a:ea typeface="Calibri" pitchFamily="34" charset="-122"/>
                 <a:cs typeface="Calibri" pitchFamily="34" charset="-120"/>
               </a:rPr>
-              <a:t>The students measured the </a:t>
+              <a:t>The explorer hoped to </a:t>
             </a:r>
             <a:pPr algn="l" indent="0" marL="0">
               <a:buNone/>
@@ -6057,7 +6057,7 @@
                 <a:ea typeface="Calibri" pitchFamily="34" charset="-122"/>
                 <a:cs typeface="Calibri" pitchFamily="34" charset="-120"/>
               </a:rPr>
-              <a:t>circumference</a:t>
+              <a:t>circumnavigate</a:t>
             </a:r>
             <a:pPr algn="l" indent="0" marL="0">
               <a:buNone/>
@@ -6071,7 +6071,7 @@
                 <a:ea typeface="Calibri" pitchFamily="34" charset="-122"/>
                 <a:cs typeface="Calibri" pitchFamily="34" charset="-120"/>
               </a:rPr>
-              <a:t> of the ball before trying to </a:t>
+              <a:t> the island, but the stormy </a:t>
             </a:r>
             <a:pPr algn="l" indent="0" marL="0">
               <a:buNone/>
@@ -6088,7 +6088,7 @@
                 <a:ea typeface="Calibri" pitchFamily="34" charset="-122"/>
                 <a:cs typeface="Calibri" pitchFamily="34" charset="-120"/>
               </a:rPr>
-              <a:t>circumvent</a:t>
+              <a:t>circumstances</a:t>
             </a:r>
             <a:pPr algn="l" indent="0" marL="0">
               <a:buNone/>
@@ -6102,7 +6102,7 @@
                 <a:ea typeface="Calibri" pitchFamily="34" charset="-122"/>
                 <a:cs typeface="Calibri" pitchFamily="34" charset="-120"/>
               </a:rPr>
-              <a:t> the tricky maths problem.</a:t>
+              <a:t> made it too dangerous.</a:t>
             </a:r>
             <a:endParaRPr lang="en-US" sz="1800" dirty="0"/>
           </a:p>
@@ -6257,7 +6257,7 @@
                 <a:ea typeface="Trebuchet MS" pitchFamily="34" charset="-122"/>
                 <a:cs typeface="Trebuchet MS" pitchFamily="34" charset="-120"/>
               </a:rPr>
-              <a:t>circumference</a:t>
+              <a:t>circumnavigate</a:t>
             </a:r>
             <a:endParaRPr lang="en-US" sz="1400" dirty="0"/>
           </a:p>
@@ -6385,7 +6385,7 @@
                 <a:ea typeface="Trebuchet MS" pitchFamily="34" charset="-122"/>
                 <a:cs typeface="Trebuchet MS" pitchFamily="34" charset="-120"/>
               </a:rPr>
-              <a:t>circumvent</a:t>
+              <a:t>circumstances</a:t>
             </a:r>
             <a:endParaRPr lang="en-US" sz="1400" dirty="0"/>
           </a:p>
@@ -6855,7 +6855,7 @@
                 <a:ea typeface="Trebuchet MS" pitchFamily="34" charset="-122"/>
                 <a:cs typeface="Trebuchet MS" pitchFamily="34" charset="-120"/>
               </a:rPr>
-              <a:t>circumference</a:t>
+              <a:t>circumnavigate</a:t>
             </a:r>
             <a:endParaRPr lang="en-US" sz="2800" dirty="0"/>
           </a:p>
@@ -7682,7 +7682,7 @@
                 <a:ea typeface="Trebuchet MS" pitchFamily="34" charset="-122"/>
                 <a:cs typeface="Trebuchet MS" pitchFamily="34" charset="-120"/>
               </a:rPr>
-              <a:t>circumference</a:t>
+              <a:t>circumnavigate</a:t>
             </a:r>
             <a:endParaRPr lang="en-US" sz="2800" dirty="0"/>
           </a:p>
@@ -7933,7 +7933,7 @@
                 <a:ea typeface="Trebuchet MS" pitchFamily="34" charset="-122"/>
                 <a:cs typeface="Trebuchet MS" pitchFamily="34" charset="-120"/>
               </a:rPr>
-              <a:t>fer</a:t>
+              <a:t>navig</a:t>
             </a:r>
             <a:endParaRPr lang="en-US" sz="1300" dirty="0"/>
           </a:p>
@@ -7972,7 +7972,7 @@
                 <a:ea typeface="Calibri" pitchFamily="34" charset="-122"/>
                 <a:cs typeface="Calibri" pitchFamily="34" charset="-120"/>
               </a:rPr>
-              <a:t>carry, bear</a:t>
+              <a:t>to sail or steer</a:t>
             </a:r>
             <a:endParaRPr lang="en-US" sz="850" dirty="0"/>
           </a:p>
@@ -8045,7 +8045,7 @@
                 <a:ea typeface="Trebuchet MS" pitchFamily="34" charset="-122"/>
                 <a:cs typeface="Trebuchet MS" pitchFamily="34" charset="-120"/>
               </a:rPr>
-              <a:t>ence</a:t>
+              <a:t>ate</a:t>
             </a:r>
             <a:endParaRPr lang="en-US" sz="1300" dirty="0"/>
           </a:p>
@@ -8084,7 +8084,7 @@
                 <a:ea typeface="Calibri" pitchFamily="34" charset="-122"/>
                 <a:cs typeface="Calibri" pitchFamily="34" charset="-120"/>
               </a:rPr>
-              <a:t>state or quality of</a:t>
+              <a:t>to do or make</a:t>
             </a:r>
             <a:endParaRPr lang="en-US" sz="850" dirty="0"/>
           </a:p>
@@ -8779,7 +8779,7 @@
                 <a:ea typeface="Trebuchet MS" pitchFamily="34" charset="-122"/>
                 <a:cs typeface="Trebuchet MS" pitchFamily="34" charset="-120"/>
               </a:rPr>
-              <a:t>circumference</a:t>
+              <a:t>circumnavigate</a:t>
             </a:r>
             <a:endParaRPr lang="en-US" sz="2800" dirty="0"/>
           </a:p>
@@ -9030,7 +9030,7 @@
                 <a:ea typeface="Trebuchet MS" pitchFamily="34" charset="-122"/>
                 <a:cs typeface="Trebuchet MS" pitchFamily="34" charset="-120"/>
               </a:rPr>
-              <a:t>fer</a:t>
+              <a:t>navig</a:t>
             </a:r>
             <a:endParaRPr lang="en-US" sz="1300" dirty="0"/>
           </a:p>
@@ -9069,7 +9069,7 @@
                 <a:ea typeface="Calibri" pitchFamily="34" charset="-122"/>
                 <a:cs typeface="Calibri" pitchFamily="34" charset="-120"/>
               </a:rPr>
-              <a:t>carry, bear</a:t>
+              <a:t>to sail or steer</a:t>
             </a:r>
             <a:endParaRPr lang="en-US" sz="850" dirty="0"/>
           </a:p>
@@ -9142,7 +9142,7 @@
                 <a:ea typeface="Trebuchet MS" pitchFamily="34" charset="-122"/>
                 <a:cs typeface="Trebuchet MS" pitchFamily="34" charset="-120"/>
               </a:rPr>
-              <a:t>ence</a:t>
+              <a:t>ate</a:t>
             </a:r>
             <a:endParaRPr lang="en-US" sz="1300" dirty="0"/>
           </a:p>
@@ -9181,7 +9181,7 @@
                 <a:ea typeface="Calibri" pitchFamily="34" charset="-122"/>
                 <a:cs typeface="Calibri" pitchFamily="34" charset="-120"/>
               </a:rPr>
-              <a:t>state or quality of</a:t>
+              <a:t>to do or make</a:t>
             </a:r>
             <a:endParaRPr lang="en-US" sz="850" dirty="0"/>
           </a:p>
@@ -9288,8 +9288,8 @@
         </p:nvSpPr>
         <p:spPr>
           <a:xfrm>
-            <a:off x="1975104" y="3364992"/>
-            <a:ext cx="1554480" cy="475488"/>
+            <a:off x="1978152" y="3364992"/>
+            <a:ext cx="1225296" cy="475488"/>
           </a:xfrm>
           <a:prstGeom prst="rect">
             <a:avLst>
@@ -9315,8 +9315,8 @@
         </p:nvSpPr>
         <p:spPr>
           <a:xfrm>
-            <a:off x="1975104" y="3364992"/>
-            <a:ext cx="1554480" cy="475488"/>
+            <a:off x="1978152" y="3364992"/>
+            <a:ext cx="1225296" cy="475488"/>
           </a:xfrm>
           <a:prstGeom prst="rect">
             <a:avLst/>
@@ -9354,8 +9354,8 @@
         </p:nvSpPr>
         <p:spPr>
           <a:xfrm>
-            <a:off x="3529584" y="3364992"/>
-            <a:ext cx="73152" cy="475488"/>
+            <a:off x="3203448" y="3364992"/>
+            <a:ext cx="76200" cy="475488"/>
           </a:xfrm>
           <a:prstGeom prst="rect">
             <a:avLst/>
@@ -9393,8 +9393,8 @@
         </p:nvSpPr>
         <p:spPr>
           <a:xfrm>
-            <a:off x="3602736" y="3364992"/>
-            <a:ext cx="1554480" cy="475488"/>
+            <a:off x="3279648" y="3364992"/>
+            <a:ext cx="1225296" cy="475488"/>
           </a:xfrm>
           <a:prstGeom prst="rect">
             <a:avLst>
@@ -9420,8 +9420,8 @@
         </p:nvSpPr>
         <p:spPr>
           <a:xfrm>
-            <a:off x="3602736" y="3364992"/>
-            <a:ext cx="1554480" cy="475488"/>
+            <a:off x="3279648" y="3364992"/>
+            <a:ext cx="1225296" cy="475488"/>
           </a:xfrm>
           <a:prstGeom prst="rect">
             <a:avLst/>
@@ -9459,8 +9459,8 @@
         </p:nvSpPr>
         <p:spPr>
           <a:xfrm>
-            <a:off x="5157216" y="3364992"/>
-            <a:ext cx="73152" cy="475488"/>
+            <a:off x="4504944" y="3364992"/>
+            <a:ext cx="76200" cy="475488"/>
           </a:xfrm>
           <a:prstGeom prst="rect">
             <a:avLst/>
@@ -9498,8 +9498,8 @@
         </p:nvSpPr>
         <p:spPr>
           <a:xfrm>
-            <a:off x="5230368" y="3364992"/>
-            <a:ext cx="1554480" cy="475488"/>
+            <a:off x="4581144" y="3364992"/>
+            <a:ext cx="1225296" cy="475488"/>
           </a:xfrm>
           <a:prstGeom prst="rect">
             <a:avLst>
@@ -9525,8 +9525,8 @@
         </p:nvSpPr>
         <p:spPr>
           <a:xfrm>
-            <a:off x="5230368" y="3364992"/>
-            <a:ext cx="1554480" cy="475488"/>
+            <a:off x="4581144" y="3364992"/>
+            <a:ext cx="1225296" cy="475488"/>
           </a:xfrm>
           <a:prstGeom prst="rect">
             <a:avLst/>
@@ -9550,7 +9550,7 @@
                 <a:ea typeface="Trebuchet MS" pitchFamily="34" charset="-122"/>
                 <a:cs typeface="Trebuchet MS" pitchFamily="34" charset="-120"/>
               </a:rPr>
-              <a:t>fer</a:t>
+              <a:t>nav</a:t>
             </a:r>
             <a:endParaRPr lang="en-US" sz="1400" dirty="0"/>
           </a:p>
@@ -9564,8 +9564,8 @@
         </p:nvSpPr>
         <p:spPr>
           <a:xfrm>
-            <a:off x="6784848" y="3364992"/>
-            <a:ext cx="73152" cy="475488"/>
+            <a:off x="5806440" y="3364992"/>
+            <a:ext cx="76200" cy="475488"/>
           </a:xfrm>
           <a:prstGeom prst="rect">
             <a:avLst/>
@@ -9603,8 +9603,8 @@
         </p:nvSpPr>
         <p:spPr>
           <a:xfrm>
-            <a:off x="6858000" y="3364992"/>
-            <a:ext cx="1554480" cy="475488"/>
+            <a:off x="5882640" y="3364992"/>
+            <a:ext cx="1225296" cy="475488"/>
           </a:xfrm>
           <a:prstGeom prst="rect">
             <a:avLst>
@@ -9630,8 +9630,8 @@
         </p:nvSpPr>
         <p:spPr>
           <a:xfrm>
-            <a:off x="6858000" y="3364992"/>
-            <a:ext cx="1554480" cy="475488"/>
+            <a:off x="5882640" y="3364992"/>
+            <a:ext cx="1225296" cy="475488"/>
           </a:xfrm>
           <a:prstGeom prst="rect">
             <a:avLst/>
@@ -9655,7 +9655,7 @@
                 <a:ea typeface="Trebuchet MS" pitchFamily="34" charset="-122"/>
                 <a:cs typeface="Trebuchet MS" pitchFamily="34" charset="-120"/>
               </a:rPr>
-              <a:t>ence</a:t>
+              <a:t>i</a:t>
             </a:r>
             <a:endParaRPr lang="en-US" sz="1400" dirty="0"/>
           </a:p>
@@ -9663,7 +9663,112 @@
       </p:sp>
       <p:sp>
         <p:nvSpPr>
-          <p:cNvPr id="39" name="Shape 37"/>
+          <p:cNvPr id="39" name="Text 37"/>
+          <p:cNvSpPr/>
+          <p:nvPr/>
+        </p:nvSpPr>
+        <p:spPr>
+          <a:xfrm>
+            <a:off x="7107936" y="3364992"/>
+            <a:ext cx="76200" cy="475488"/>
+          </a:xfrm>
+          <a:prstGeom prst="rect">
+            <a:avLst/>
+          </a:prstGeom>
+          <a:noFill/>
+          <a:ln/>
+        </p:spPr>
+        <p:txBody>
+          <a:bodyPr wrap="square" lIns="0" tIns="0" rIns="0" bIns="0" rtlCol="0" anchor="ctr"/>
+          <a:lstStyle/>
+          <a:p>
+            <a:pPr algn="ctr" indent="0" marL="0">
+              <a:buNone/>
+            </a:pPr>
+            <a:r>
+              <a:rPr lang="en-US" sz="1600" b="1" dirty="0">
+                <a:solidFill>
+                  <a:srgbClr val="0D9488"/>
+                </a:solidFill>
+                <a:latin typeface="Trebuchet MS" pitchFamily="34" charset="0"/>
+                <a:ea typeface="Trebuchet MS" pitchFamily="34" charset="-122"/>
+                <a:cs typeface="Trebuchet MS" pitchFamily="34" charset="-120"/>
+              </a:rPr>
+              <a:t>·</a:t>
+            </a:r>
+            <a:endParaRPr lang="en-US" sz="1600" dirty="0"/>
+          </a:p>
+        </p:txBody>
+      </p:sp>
+      <p:sp>
+        <p:nvSpPr>
+          <p:cNvPr id="40" name="Shape 38"/>
+          <p:cNvSpPr/>
+          <p:nvPr/>
+        </p:nvSpPr>
+        <p:spPr>
+          <a:xfrm>
+            <a:off x="7184136" y="3364992"/>
+            <a:ext cx="1225296" cy="475488"/>
+          </a:xfrm>
+          <a:prstGeom prst="rect">
+            <a:avLst>
+              <a:gd name="adj" fmla="val 9615"/>
+            </a:avLst>
+          </a:prstGeom>
+          <a:solidFill>
+            <a:srgbClr val="FFFFFF"/>
+          </a:solidFill>
+          <a:ln w="12700">
+            <a:solidFill>
+              <a:srgbClr val="0D9488"/>
+            </a:solidFill>
+            <a:prstDash val="solid"/>
+          </a:ln>
+        </p:spPr>
+      </p:sp>
+      <p:sp>
+        <p:nvSpPr>
+          <p:cNvPr id="41" name="Text 39"/>
+          <p:cNvSpPr/>
+          <p:nvPr/>
+        </p:nvSpPr>
+        <p:spPr>
+          <a:xfrm>
+            <a:off x="7184136" y="3364992"/>
+            <a:ext cx="1225296" cy="475488"/>
+          </a:xfrm>
+          <a:prstGeom prst="rect">
+            <a:avLst/>
+          </a:prstGeom>
+          <a:noFill/>
+          <a:ln/>
+        </p:spPr>
+        <p:txBody>
+          <a:bodyPr wrap="square" lIns="0" tIns="0" rIns="0" bIns="0" rtlCol="0" anchor="ctr"/>
+          <a:lstStyle/>
+          <a:p>
+            <a:pPr algn="ctr" indent="0" marL="0">
+              <a:buNone/>
+            </a:pPr>
+            <a:r>
+              <a:rPr lang="en-US" sz="1400" b="1" dirty="0">
+                <a:solidFill>
+                  <a:srgbClr val="0D9488"/>
+                </a:solidFill>
+                <a:latin typeface="Trebuchet MS" pitchFamily="34" charset="0"/>
+                <a:ea typeface="Trebuchet MS" pitchFamily="34" charset="-122"/>
+                <a:cs typeface="Trebuchet MS" pitchFamily="34" charset="-120"/>
+              </a:rPr>
+              <a:t>gate</a:t>
+            </a:r>
+            <a:endParaRPr lang="en-US" sz="1400" dirty="0"/>
+          </a:p>
+        </p:txBody>
+      </p:sp>
+      <p:sp>
+        <p:nvSpPr>
+          <p:cNvPr id="42" name="Shape 40"/>
           <p:cNvSpPr/>
           <p:nvPr/>
         </p:nvSpPr>
@@ -9690,7 +9795,7 @@
       </p:sp>
       <p:sp>
         <p:nvSpPr>
-          <p:cNvPr id="40" name="Text 38"/>
+          <p:cNvPr id="43" name="Text 41"/>
           <p:cNvSpPr/>
           <p:nvPr/>
         </p:nvSpPr>
@@ -9729,7 +9834,7 @@
       </p:sp>
       <p:sp>
         <p:nvSpPr>
-          <p:cNvPr id="41" name="Shape 39"/>
+          <p:cNvPr id="44" name="Shape 42"/>
           <p:cNvSpPr/>
           <p:nvPr/>
         </p:nvSpPr>
@@ -9756,7 +9861,7 @@
       </p:sp>
       <p:sp>
         <p:nvSpPr>
-          <p:cNvPr id="42" name="Text 40"/>
+          <p:cNvPr id="45" name="Text 43"/>
           <p:cNvSpPr/>
           <p:nvPr/>
         </p:nvSpPr>
@@ -10218,7 +10323,7 @@
                 <a:ea typeface="Trebuchet MS" pitchFamily="34" charset="-122"/>
                 <a:cs typeface="Trebuchet MS" pitchFamily="34" charset="-120"/>
               </a:rPr>
-              <a:t>circumference</a:t>
+              <a:t>circumnavigate</a:t>
             </a:r>
             <a:endParaRPr lang="en-US" sz="2800" dirty="0"/>
           </a:p>
@@ -10469,7 +10574,7 @@
                 <a:ea typeface="Trebuchet MS" pitchFamily="34" charset="-122"/>
                 <a:cs typeface="Trebuchet MS" pitchFamily="34" charset="-120"/>
               </a:rPr>
-              <a:t>fer</a:t>
+              <a:t>navig</a:t>
             </a:r>
             <a:endParaRPr lang="en-US" sz="1300" dirty="0"/>
           </a:p>
@@ -10508,7 +10613,7 @@
                 <a:ea typeface="Calibri" pitchFamily="34" charset="-122"/>
                 <a:cs typeface="Calibri" pitchFamily="34" charset="-120"/>
               </a:rPr>
-              <a:t>carry, bear</a:t>
+              <a:t>to sail or steer</a:t>
             </a:r>
             <a:endParaRPr lang="en-US" sz="850" dirty="0"/>
           </a:p>
@@ -10581,7 +10686,7 @@
                 <a:ea typeface="Trebuchet MS" pitchFamily="34" charset="-122"/>
                 <a:cs typeface="Trebuchet MS" pitchFamily="34" charset="-120"/>
               </a:rPr>
-              <a:t>ence</a:t>
+              <a:t>ate</a:t>
             </a:r>
             <a:endParaRPr lang="en-US" sz="1300" dirty="0"/>
           </a:p>
@@ -10620,7 +10725,7 @@
                 <a:ea typeface="Calibri" pitchFamily="34" charset="-122"/>
                 <a:cs typeface="Calibri" pitchFamily="34" charset="-120"/>
               </a:rPr>
-              <a:t>state or quality of</a:t>
+              <a:t>to do or make</a:t>
             </a:r>
             <a:endParaRPr lang="en-US" sz="850" dirty="0"/>
           </a:p>
@@ -10727,8 +10832,8 @@
         </p:nvSpPr>
         <p:spPr>
           <a:xfrm>
-            <a:off x="1975104" y="3364992"/>
-            <a:ext cx="1554480" cy="475488"/>
+            <a:off x="1978152" y="3364992"/>
+            <a:ext cx="1225296" cy="475488"/>
           </a:xfrm>
           <a:prstGeom prst="rect">
             <a:avLst>
@@ -10754,8 +10859,8 @@
         </p:nvSpPr>
         <p:spPr>
           <a:xfrm>
-            <a:off x="1975104" y="3364992"/>
-            <a:ext cx="1554480" cy="475488"/>
+            <a:off x="1978152" y="3364992"/>
+            <a:ext cx="1225296" cy="475488"/>
           </a:xfrm>
           <a:prstGeom prst="rect">
             <a:avLst/>
@@ -10793,8 +10898,8 @@
         </p:nvSpPr>
         <p:spPr>
           <a:xfrm>
-            <a:off x="3529584" y="3364992"/>
-            <a:ext cx="73152" cy="475488"/>
+            <a:off x="3203448" y="3364992"/>
+            <a:ext cx="76200" cy="475488"/>
           </a:xfrm>
           <a:prstGeom prst="rect">
             <a:avLst/>
@@ -10832,8 +10937,8 @@
         </p:nvSpPr>
         <p:spPr>
           <a:xfrm>
-            <a:off x="3602736" y="3364992"/>
-            <a:ext cx="1554480" cy="475488"/>
+            <a:off x="3279648" y="3364992"/>
+            <a:ext cx="1225296" cy="475488"/>
           </a:xfrm>
           <a:prstGeom prst="rect">
             <a:avLst>
@@ -10859,8 +10964,8 @@
         </p:nvSpPr>
         <p:spPr>
           <a:xfrm>
-            <a:off x="3602736" y="3364992"/>
-            <a:ext cx="1554480" cy="475488"/>
+            <a:off x="3279648" y="3364992"/>
+            <a:ext cx="1225296" cy="475488"/>
           </a:xfrm>
           <a:prstGeom prst="rect">
             <a:avLst/>
@@ -10898,8 +11003,8 @@
         </p:nvSpPr>
         <p:spPr>
           <a:xfrm>
-            <a:off x="5157216" y="3364992"/>
-            <a:ext cx="73152" cy="475488"/>
+            <a:off x="4504944" y="3364992"/>
+            <a:ext cx="76200" cy="475488"/>
           </a:xfrm>
           <a:prstGeom prst="rect">
             <a:avLst/>
@@ -10937,8 +11042,8 @@
         </p:nvSpPr>
         <p:spPr>
           <a:xfrm>
-            <a:off x="5230368" y="3364992"/>
-            <a:ext cx="1554480" cy="475488"/>
+            <a:off x="4581144" y="3364992"/>
+            <a:ext cx="1225296" cy="475488"/>
           </a:xfrm>
           <a:prstGeom prst="rect">
             <a:avLst>
@@ -10964,8 +11069,8 @@
         </p:nvSpPr>
         <p:spPr>
           <a:xfrm>
-            <a:off x="5230368" y="3364992"/>
-            <a:ext cx="1554480" cy="475488"/>
+            <a:off x="4581144" y="3364992"/>
+            <a:ext cx="1225296" cy="475488"/>
           </a:xfrm>
           <a:prstGeom prst="rect">
             <a:avLst/>
@@ -10989,7 +11094,7 @@
                 <a:ea typeface="Trebuchet MS" pitchFamily="34" charset="-122"/>
                 <a:cs typeface="Trebuchet MS" pitchFamily="34" charset="-120"/>
               </a:rPr>
-              <a:t>fer</a:t>
+              <a:t>nav</a:t>
             </a:r>
             <a:endParaRPr lang="en-US" sz="1400" dirty="0"/>
           </a:p>
@@ -11003,8 +11108,8 @@
         </p:nvSpPr>
         <p:spPr>
           <a:xfrm>
-            <a:off x="6784848" y="3364992"/>
-            <a:ext cx="73152" cy="475488"/>
+            <a:off x="5806440" y="3364992"/>
+            <a:ext cx="76200" cy="475488"/>
           </a:xfrm>
           <a:prstGeom prst="rect">
             <a:avLst/>
@@ -11042,8 +11147,8 @@
         </p:nvSpPr>
         <p:spPr>
           <a:xfrm>
-            <a:off x="6858000" y="3364992"/>
-            <a:ext cx="1554480" cy="475488"/>
+            <a:off x="5882640" y="3364992"/>
+            <a:ext cx="1225296" cy="475488"/>
           </a:xfrm>
           <a:prstGeom prst="rect">
             <a:avLst>
@@ -11069,8 +11174,8 @@
         </p:nvSpPr>
         <p:spPr>
           <a:xfrm>
-            <a:off x="6858000" y="3364992"/>
-            <a:ext cx="1554480" cy="475488"/>
+            <a:off x="5882640" y="3364992"/>
+            <a:ext cx="1225296" cy="475488"/>
           </a:xfrm>
           <a:prstGeom prst="rect">
             <a:avLst/>
@@ -11094,7 +11199,7 @@
                 <a:ea typeface="Trebuchet MS" pitchFamily="34" charset="-122"/>
                 <a:cs typeface="Trebuchet MS" pitchFamily="34" charset="-120"/>
               </a:rPr>
-              <a:t>ence</a:t>
+              <a:t>i</a:t>
             </a:r>
             <a:endParaRPr lang="en-US" sz="1400" dirty="0"/>
           </a:p>
@@ -11102,7 +11207,112 @@
       </p:sp>
       <p:sp>
         <p:nvSpPr>
-          <p:cNvPr id="39" name="Shape 37"/>
+          <p:cNvPr id="39" name="Text 37"/>
+          <p:cNvSpPr/>
+          <p:nvPr/>
+        </p:nvSpPr>
+        <p:spPr>
+          <a:xfrm>
+            <a:off x="7107936" y="3364992"/>
+            <a:ext cx="76200" cy="475488"/>
+          </a:xfrm>
+          <a:prstGeom prst="rect">
+            <a:avLst/>
+          </a:prstGeom>
+          <a:noFill/>
+          <a:ln/>
+        </p:spPr>
+        <p:txBody>
+          <a:bodyPr wrap="square" lIns="0" tIns="0" rIns="0" bIns="0" rtlCol="0" anchor="ctr"/>
+          <a:lstStyle/>
+          <a:p>
+            <a:pPr algn="ctr" indent="0" marL="0">
+              <a:buNone/>
+            </a:pPr>
+            <a:r>
+              <a:rPr lang="en-US" sz="1600" b="1" dirty="0">
+                <a:solidFill>
+                  <a:srgbClr val="0D9488"/>
+                </a:solidFill>
+                <a:latin typeface="Trebuchet MS" pitchFamily="34" charset="0"/>
+                <a:ea typeface="Trebuchet MS" pitchFamily="34" charset="-122"/>
+                <a:cs typeface="Trebuchet MS" pitchFamily="34" charset="-120"/>
+              </a:rPr>
+              <a:t>·</a:t>
+            </a:r>
+            <a:endParaRPr lang="en-US" sz="1600" dirty="0"/>
+          </a:p>
+        </p:txBody>
+      </p:sp>
+      <p:sp>
+        <p:nvSpPr>
+          <p:cNvPr id="40" name="Shape 38"/>
+          <p:cNvSpPr/>
+          <p:nvPr/>
+        </p:nvSpPr>
+        <p:spPr>
+          <a:xfrm>
+            <a:off x="7184136" y="3364992"/>
+            <a:ext cx="1225296" cy="475488"/>
+          </a:xfrm>
+          <a:prstGeom prst="rect">
+            <a:avLst>
+              <a:gd name="adj" fmla="val 9615"/>
+            </a:avLst>
+          </a:prstGeom>
+          <a:solidFill>
+            <a:srgbClr val="FFFFFF"/>
+          </a:solidFill>
+          <a:ln w="12700">
+            <a:solidFill>
+              <a:srgbClr val="0D9488"/>
+            </a:solidFill>
+            <a:prstDash val="solid"/>
+          </a:ln>
+        </p:spPr>
+      </p:sp>
+      <p:sp>
+        <p:nvSpPr>
+          <p:cNvPr id="41" name="Text 39"/>
+          <p:cNvSpPr/>
+          <p:nvPr/>
+        </p:nvSpPr>
+        <p:spPr>
+          <a:xfrm>
+            <a:off x="7184136" y="3364992"/>
+            <a:ext cx="1225296" cy="475488"/>
+          </a:xfrm>
+          <a:prstGeom prst="rect">
+            <a:avLst/>
+          </a:prstGeom>
+          <a:noFill/>
+          <a:ln/>
+        </p:spPr>
+        <p:txBody>
+          <a:bodyPr wrap="square" lIns="0" tIns="0" rIns="0" bIns="0" rtlCol="0" anchor="ctr"/>
+          <a:lstStyle/>
+          <a:p>
+            <a:pPr algn="ctr" indent="0" marL="0">
+              <a:buNone/>
+            </a:pPr>
+            <a:r>
+              <a:rPr lang="en-US" sz="1400" b="1" dirty="0">
+                <a:solidFill>
+                  <a:srgbClr val="0D9488"/>
+                </a:solidFill>
+                <a:latin typeface="Trebuchet MS" pitchFamily="34" charset="0"/>
+                <a:ea typeface="Trebuchet MS" pitchFamily="34" charset="-122"/>
+                <a:cs typeface="Trebuchet MS" pitchFamily="34" charset="-120"/>
+              </a:rPr>
+              <a:t>gate</a:t>
+            </a:r>
+            <a:endParaRPr lang="en-US" sz="1400" dirty="0"/>
+          </a:p>
+        </p:txBody>
+      </p:sp>
+      <p:sp>
+        <p:nvSpPr>
+          <p:cNvPr id="42" name="Shape 40"/>
           <p:cNvSpPr/>
           <p:nvPr/>
         </p:nvSpPr>
@@ -11129,7 +11339,7 @@
       </p:sp>
       <p:sp>
         <p:nvSpPr>
-          <p:cNvPr id="40" name="Text 38"/>
+          <p:cNvPr id="43" name="Text 41"/>
           <p:cNvSpPr/>
           <p:nvPr/>
         </p:nvSpPr>
@@ -11168,7 +11378,7 @@
       </p:sp>
       <p:sp>
         <p:nvSpPr>
-          <p:cNvPr id="41" name="Shape 39"/>
+          <p:cNvPr id="44" name="Shape 42"/>
           <p:cNvSpPr/>
           <p:nvPr/>
         </p:nvSpPr>
@@ -11195,14 +11405,14 @@
       </p:sp>
       <p:sp>
         <p:nvSpPr>
-          <p:cNvPr id="42" name="Shape 40"/>
-          <p:cNvSpPr/>
-          <p:nvPr/>
-        </p:nvSpPr>
-        <p:spPr>
-          <a:xfrm>
-            <a:off x="1951828" y="4169664"/>
-            <a:ext cx="603504" cy="384048"/>
+          <p:cNvPr id="45" name="Shape 43"/>
+          <p:cNvSpPr/>
+          <p:nvPr/>
+        </p:nvSpPr>
+        <p:spPr>
+          <a:xfrm>
+            <a:off x="1951330" y="4169664"/>
+            <a:ext cx="676656" cy="384048"/>
           </a:xfrm>
           <a:prstGeom prst="rect">
             <a:avLst>
@@ -11222,14 +11432,14 @@
       </p:sp>
       <p:sp>
         <p:nvSpPr>
-          <p:cNvPr id="43" name="Text 41"/>
-          <p:cNvSpPr/>
-          <p:nvPr/>
-        </p:nvSpPr>
-        <p:spPr>
-          <a:xfrm>
-            <a:off x="1951828" y="4169664"/>
-            <a:ext cx="603504" cy="384048"/>
+          <p:cNvPr id="46" name="Text 44"/>
+          <p:cNvSpPr/>
+          <p:nvPr/>
+        </p:nvSpPr>
+        <p:spPr>
+          <a:xfrm>
+            <a:off x="1951330" y="4169664"/>
+            <a:ext cx="676656" cy="384048"/>
           </a:xfrm>
           <a:prstGeom prst="rect">
             <a:avLst/>
@@ -11261,14 +11471,14 @@
       </p:sp>
       <p:sp>
         <p:nvSpPr>
-          <p:cNvPr id="44" name="Text 42"/>
-          <p:cNvSpPr/>
-          <p:nvPr/>
-        </p:nvSpPr>
-        <p:spPr>
-          <a:xfrm>
-            <a:off x="1951828" y="4572000"/>
-            <a:ext cx="603504" cy="219456"/>
+          <p:cNvPr id="47" name="Text 45"/>
+          <p:cNvSpPr/>
+          <p:nvPr/>
+        </p:nvSpPr>
+        <p:spPr>
+          <a:xfrm>
+            <a:off x="1951330" y="4572000"/>
+            <a:ext cx="676656" cy="219456"/>
           </a:xfrm>
           <a:prstGeom prst="rect">
             <a:avLst/>
@@ -11300,14 +11510,14 @@
       </p:sp>
       <p:sp>
         <p:nvSpPr>
-          <p:cNvPr id="45" name="Shape 43"/>
-          <p:cNvSpPr/>
-          <p:nvPr/>
-        </p:nvSpPr>
-        <p:spPr>
-          <a:xfrm>
-            <a:off x="2605209" y="4169664"/>
-            <a:ext cx="603504" cy="384048"/>
+          <p:cNvPr id="48" name="Shape 46"/>
+          <p:cNvSpPr/>
+          <p:nvPr/>
+        </p:nvSpPr>
+        <p:spPr>
+          <a:xfrm>
+            <a:off x="2677363" y="4169664"/>
+            <a:ext cx="676656" cy="384048"/>
           </a:xfrm>
           <a:prstGeom prst="rect">
             <a:avLst>
@@ -11327,14 +11537,14 @@
       </p:sp>
       <p:sp>
         <p:nvSpPr>
-          <p:cNvPr id="46" name="Text 44"/>
-          <p:cNvSpPr/>
-          <p:nvPr/>
-        </p:nvSpPr>
-        <p:spPr>
-          <a:xfrm>
-            <a:off x="2605209" y="4169664"/>
-            <a:ext cx="603504" cy="384048"/>
+          <p:cNvPr id="49" name="Text 47"/>
+          <p:cNvSpPr/>
+          <p:nvPr/>
+        </p:nvSpPr>
+        <p:spPr>
+          <a:xfrm>
+            <a:off x="2677363" y="4169664"/>
+            <a:ext cx="676656" cy="384048"/>
           </a:xfrm>
           <a:prstGeom prst="rect">
             <a:avLst/>
@@ -11366,14 +11576,14 @@
       </p:sp>
       <p:sp>
         <p:nvSpPr>
-          <p:cNvPr id="47" name="Shape 45"/>
-          <p:cNvSpPr/>
-          <p:nvPr/>
-        </p:nvSpPr>
-        <p:spPr>
-          <a:xfrm>
-            <a:off x="3258589" y="4169664"/>
-            <a:ext cx="603504" cy="384048"/>
+          <p:cNvPr id="50" name="Shape 48"/>
+          <p:cNvSpPr/>
+          <p:nvPr/>
+        </p:nvSpPr>
+        <p:spPr>
+          <a:xfrm>
+            <a:off x="3403397" y="4169664"/>
+            <a:ext cx="676656" cy="384048"/>
           </a:xfrm>
           <a:prstGeom prst="rect">
             <a:avLst>
@@ -11393,14 +11603,14 @@
       </p:sp>
       <p:sp>
         <p:nvSpPr>
-          <p:cNvPr id="48" name="Text 46"/>
-          <p:cNvSpPr/>
-          <p:nvPr/>
-        </p:nvSpPr>
-        <p:spPr>
-          <a:xfrm>
-            <a:off x="3258589" y="4169664"/>
-            <a:ext cx="603504" cy="384048"/>
+          <p:cNvPr id="51" name="Text 49"/>
+          <p:cNvSpPr/>
+          <p:nvPr/>
+        </p:nvSpPr>
+        <p:spPr>
+          <a:xfrm>
+            <a:off x="3403397" y="4169664"/>
+            <a:ext cx="676656" cy="384048"/>
           </a:xfrm>
           <a:prstGeom prst="rect">
             <a:avLst/>
@@ -11432,53 +11642,14 @@
       </p:sp>
       <p:sp>
         <p:nvSpPr>
-          <p:cNvPr id="49" name="Text 47"/>
-          <p:cNvSpPr/>
-          <p:nvPr/>
-        </p:nvSpPr>
-        <p:spPr>
-          <a:xfrm>
-            <a:off x="3258589" y="4572000"/>
-            <a:ext cx="603504" cy="219456"/>
-          </a:xfrm>
-          <a:prstGeom prst="rect">
-            <a:avLst/>
-          </a:prstGeom>
-          <a:noFill/>
-          <a:ln/>
-        </p:spPr>
-        <p:txBody>
-          <a:bodyPr wrap="square" lIns="0" tIns="0" rIns="0" bIns="0" rtlCol="0" anchor="t"/>
-          <a:lstStyle/>
-          <a:p>
-            <a:pPr algn="ctr" indent="0" marL="0">
-              <a:buNone/>
-            </a:pPr>
-            <a:r>
-              <a:rPr lang="en-US" sz="750" i="1" dirty="0">
-                <a:solidFill>
-                  <a:srgbClr val="94A3B8"/>
-                </a:solidFill>
-                <a:latin typeface="Calibri" pitchFamily="34" charset="0"/>
-                <a:ea typeface="Calibri" pitchFamily="34" charset="-122"/>
-                <a:cs typeface="Calibri" pitchFamily="34" charset="-120"/>
-              </a:rPr>
-              <a:t>/k/</a:t>
-            </a:r>
-            <a:endParaRPr lang="en-US" sz="750" dirty="0"/>
-          </a:p>
-        </p:txBody>
-      </p:sp>
-      <p:sp>
-        <p:nvSpPr>
-          <p:cNvPr id="50" name="Shape 48"/>
-          <p:cNvSpPr/>
-          <p:nvPr/>
-        </p:nvSpPr>
-        <p:spPr>
-          <a:xfrm>
-            <a:off x="3911969" y="4169664"/>
-            <a:ext cx="603504" cy="384048"/>
+          <p:cNvPr id="52" name="Shape 50"/>
+          <p:cNvSpPr/>
+          <p:nvPr/>
+        </p:nvSpPr>
+        <p:spPr>
+          <a:xfrm>
+            <a:off x="4129430" y="4169664"/>
+            <a:ext cx="676656" cy="384048"/>
           </a:xfrm>
           <a:prstGeom prst="rect">
             <a:avLst>
@@ -11498,14 +11669,14 @@
       </p:sp>
       <p:sp>
         <p:nvSpPr>
-          <p:cNvPr id="51" name="Text 49"/>
-          <p:cNvSpPr/>
-          <p:nvPr/>
-        </p:nvSpPr>
-        <p:spPr>
-          <a:xfrm>
-            <a:off x="3911969" y="4169664"/>
-            <a:ext cx="603504" cy="384048"/>
+          <p:cNvPr id="53" name="Text 51"/>
+          <p:cNvSpPr/>
+          <p:nvPr/>
+        </p:nvSpPr>
+        <p:spPr>
+          <a:xfrm>
+            <a:off x="4129430" y="4169664"/>
+            <a:ext cx="676656" cy="384048"/>
           </a:xfrm>
           <a:prstGeom prst="rect">
             <a:avLst/>
@@ -11529,7 +11700,7 @@
                 <a:ea typeface="Trebuchet MS" pitchFamily="34" charset="-122"/>
                 <a:cs typeface="Trebuchet MS" pitchFamily="34" charset="-120"/>
               </a:rPr>
-              <a:t>u</a:t>
+              <a:t>um</a:t>
             </a:r>
             <a:endParaRPr lang="en-US" sz="900" dirty="0"/>
           </a:p>
@@ -11537,14 +11708,14 @@
       </p:sp>
       <p:sp>
         <p:nvSpPr>
-          <p:cNvPr id="52" name="Shape 50"/>
-          <p:cNvSpPr/>
-          <p:nvPr/>
-        </p:nvSpPr>
-        <p:spPr>
-          <a:xfrm>
-            <a:off x="4565350" y="4169664"/>
-            <a:ext cx="603504" cy="384048"/>
+          <p:cNvPr id="54" name="Shape 52"/>
+          <p:cNvSpPr/>
+          <p:nvPr/>
+        </p:nvSpPr>
+        <p:spPr>
+          <a:xfrm>
+            <a:off x="4855464" y="4169664"/>
+            <a:ext cx="676656" cy="384048"/>
           </a:xfrm>
           <a:prstGeom prst="rect">
             <a:avLst>
@@ -11564,14 +11735,14 @@
       </p:sp>
       <p:sp>
         <p:nvSpPr>
-          <p:cNvPr id="53" name="Text 51"/>
-          <p:cNvSpPr/>
-          <p:nvPr/>
-        </p:nvSpPr>
-        <p:spPr>
-          <a:xfrm>
-            <a:off x="4565350" y="4169664"/>
-            <a:ext cx="603504" cy="384048"/>
+          <p:cNvPr id="55" name="Text 53"/>
+          <p:cNvSpPr/>
+          <p:nvPr/>
+        </p:nvSpPr>
+        <p:spPr>
+          <a:xfrm>
+            <a:off x="4855464" y="4169664"/>
+            <a:ext cx="676656" cy="384048"/>
           </a:xfrm>
           <a:prstGeom prst="rect">
             <a:avLst/>
@@ -11595,7 +11766,7 @@
                 <a:ea typeface="Trebuchet MS" pitchFamily="34" charset="-122"/>
                 <a:cs typeface="Trebuchet MS" pitchFamily="34" charset="-120"/>
               </a:rPr>
-              <a:t>m</a:t>
+              <a:t>n</a:t>
             </a:r>
             <a:endParaRPr lang="en-US" sz="900" dirty="0"/>
           </a:p>
@@ -11603,14 +11774,14 @@
       </p:sp>
       <p:sp>
         <p:nvSpPr>
-          <p:cNvPr id="54" name="Shape 52"/>
-          <p:cNvSpPr/>
-          <p:nvPr/>
-        </p:nvSpPr>
-        <p:spPr>
-          <a:xfrm>
-            <a:off x="5218730" y="4169664"/>
-            <a:ext cx="603504" cy="384048"/>
+          <p:cNvPr id="56" name="Shape 54"/>
+          <p:cNvSpPr/>
+          <p:nvPr/>
+        </p:nvSpPr>
+        <p:spPr>
+          <a:xfrm>
+            <a:off x="5581498" y="4169664"/>
+            <a:ext cx="676656" cy="384048"/>
           </a:xfrm>
           <a:prstGeom prst="rect">
             <a:avLst>
@@ -11630,14 +11801,14 @@
       </p:sp>
       <p:sp>
         <p:nvSpPr>
-          <p:cNvPr id="55" name="Text 53"/>
-          <p:cNvSpPr/>
-          <p:nvPr/>
-        </p:nvSpPr>
-        <p:spPr>
-          <a:xfrm>
-            <a:off x="5218730" y="4169664"/>
-            <a:ext cx="603504" cy="384048"/>
+          <p:cNvPr id="57" name="Text 55"/>
+          <p:cNvSpPr/>
+          <p:nvPr/>
+        </p:nvSpPr>
+        <p:spPr>
+          <a:xfrm>
+            <a:off x="5581498" y="4169664"/>
+            <a:ext cx="676656" cy="384048"/>
           </a:xfrm>
           <a:prstGeom prst="rect">
             <a:avLst/>
@@ -11661,7 +11832,7 @@
                 <a:ea typeface="Trebuchet MS" pitchFamily="34" charset="-122"/>
                 <a:cs typeface="Trebuchet MS" pitchFamily="34" charset="-120"/>
               </a:rPr>
-              <a:t>f</a:t>
+              <a:t>av</a:t>
             </a:r>
             <a:endParaRPr lang="en-US" sz="900" dirty="0"/>
           </a:p>
@@ -11669,14 +11840,14 @@
       </p:sp>
       <p:sp>
         <p:nvSpPr>
-          <p:cNvPr id="56" name="Shape 54"/>
-          <p:cNvSpPr/>
-          <p:nvPr/>
-        </p:nvSpPr>
-        <p:spPr>
-          <a:xfrm>
-            <a:off x="5872111" y="4169664"/>
-            <a:ext cx="603504" cy="384048"/>
+          <p:cNvPr id="58" name="Shape 56"/>
+          <p:cNvSpPr/>
+          <p:nvPr/>
+        </p:nvSpPr>
+        <p:spPr>
+          <a:xfrm>
+            <a:off x="6307531" y="4169664"/>
+            <a:ext cx="676656" cy="384048"/>
           </a:xfrm>
           <a:prstGeom prst="rect">
             <a:avLst>
@@ -11696,14 +11867,14 @@
       </p:sp>
       <p:sp>
         <p:nvSpPr>
-          <p:cNvPr id="57" name="Text 55"/>
-          <p:cNvSpPr/>
-          <p:nvPr/>
-        </p:nvSpPr>
-        <p:spPr>
-          <a:xfrm>
-            <a:off x="5872111" y="4169664"/>
-            <a:ext cx="603504" cy="384048"/>
+          <p:cNvPr id="59" name="Text 57"/>
+          <p:cNvSpPr/>
+          <p:nvPr/>
+        </p:nvSpPr>
+        <p:spPr>
+          <a:xfrm>
+            <a:off x="6307531" y="4169664"/>
+            <a:ext cx="676656" cy="384048"/>
           </a:xfrm>
           <a:prstGeom prst="rect">
             <a:avLst/>
@@ -11727,7 +11898,7 @@
                 <a:ea typeface="Trebuchet MS" pitchFamily="34" charset="-122"/>
                 <a:cs typeface="Trebuchet MS" pitchFamily="34" charset="-120"/>
               </a:rPr>
-              <a:t>er</a:t>
+              <a:t>i</a:t>
             </a:r>
             <a:endParaRPr lang="en-US" sz="900" dirty="0"/>
           </a:p>
@@ -11735,14 +11906,14 @@
       </p:sp>
       <p:sp>
         <p:nvSpPr>
-          <p:cNvPr id="58" name="Shape 56"/>
-          <p:cNvSpPr/>
-          <p:nvPr/>
-        </p:nvSpPr>
-        <p:spPr>
-          <a:xfrm>
-            <a:off x="6525491" y="4169664"/>
-            <a:ext cx="603504" cy="384048"/>
+          <p:cNvPr id="60" name="Shape 58"/>
+          <p:cNvSpPr/>
+          <p:nvPr/>
+        </p:nvSpPr>
+        <p:spPr>
+          <a:xfrm>
+            <a:off x="7033565" y="4169664"/>
+            <a:ext cx="676656" cy="384048"/>
           </a:xfrm>
           <a:prstGeom prst="rect">
             <a:avLst>
@@ -11762,14 +11933,14 @@
       </p:sp>
       <p:sp>
         <p:nvSpPr>
-          <p:cNvPr id="59" name="Text 57"/>
-          <p:cNvSpPr/>
-          <p:nvPr/>
-        </p:nvSpPr>
-        <p:spPr>
-          <a:xfrm>
-            <a:off x="6525491" y="4169664"/>
-            <a:ext cx="603504" cy="384048"/>
+          <p:cNvPr id="61" name="Text 59"/>
+          <p:cNvSpPr/>
+          <p:nvPr/>
+        </p:nvSpPr>
+        <p:spPr>
+          <a:xfrm>
+            <a:off x="7033565" y="4169664"/>
+            <a:ext cx="676656" cy="384048"/>
           </a:xfrm>
           <a:prstGeom prst="rect">
             <a:avLst/>
@@ -11793,7 +11964,7 @@
                 <a:ea typeface="Trebuchet MS" pitchFamily="34" charset="-122"/>
                 <a:cs typeface="Trebuchet MS" pitchFamily="34" charset="-120"/>
               </a:rPr>
-              <a:t>e</a:t>
+              <a:t>g</a:t>
             </a:r>
             <a:endParaRPr lang="en-US" sz="900" dirty="0"/>
           </a:p>
@@ -11801,14 +11972,14 @@
       </p:sp>
       <p:sp>
         <p:nvSpPr>
-          <p:cNvPr id="60" name="Shape 58"/>
-          <p:cNvSpPr/>
-          <p:nvPr/>
-        </p:nvSpPr>
-        <p:spPr>
-          <a:xfrm>
-            <a:off x="7178871" y="4169664"/>
-            <a:ext cx="603504" cy="384048"/>
+          <p:cNvPr id="62" name="Shape 60"/>
+          <p:cNvSpPr/>
+          <p:nvPr/>
+        </p:nvSpPr>
+        <p:spPr>
+          <a:xfrm>
+            <a:off x="7759598" y="4169664"/>
+            <a:ext cx="676656" cy="384048"/>
           </a:xfrm>
           <a:prstGeom prst="rect">
             <a:avLst>
@@ -11828,14 +11999,14 @@
       </p:sp>
       <p:sp>
         <p:nvSpPr>
-          <p:cNvPr id="61" name="Text 59"/>
-          <p:cNvSpPr/>
-          <p:nvPr/>
-        </p:nvSpPr>
-        <p:spPr>
-          <a:xfrm>
-            <a:off x="7178871" y="4169664"/>
-            <a:ext cx="603504" cy="384048"/>
+          <p:cNvPr id="63" name="Text 61"/>
+          <p:cNvSpPr/>
+          <p:nvPr/>
+        </p:nvSpPr>
+        <p:spPr>
+          <a:xfrm>
+            <a:off x="7759598" y="4169664"/>
+            <a:ext cx="676656" cy="384048"/>
           </a:xfrm>
           <a:prstGeom prst="rect">
             <a:avLst/>
@@ -11859,114 +12030,9 @@
                 <a:ea typeface="Trebuchet MS" pitchFamily="34" charset="-122"/>
                 <a:cs typeface="Trebuchet MS" pitchFamily="34" charset="-120"/>
               </a:rPr>
-              <a:t>n</a:t>
+              <a:t>ate</a:t>
             </a:r>
             <a:endParaRPr lang="en-US" sz="900" dirty="0"/>
-          </a:p>
-        </p:txBody>
-      </p:sp>
-      <p:sp>
-        <p:nvSpPr>
-          <p:cNvPr id="62" name="Shape 60"/>
-          <p:cNvSpPr/>
-          <p:nvPr/>
-        </p:nvSpPr>
-        <p:spPr>
-          <a:xfrm>
-            <a:off x="7832252" y="4169664"/>
-            <a:ext cx="603504" cy="384048"/>
-          </a:xfrm>
-          <a:prstGeom prst="rect">
-            <a:avLst>
-              <a:gd name="adj" fmla="val 9524"/>
-            </a:avLst>
-          </a:prstGeom>
-          <a:solidFill>
-            <a:srgbClr val="FFFFFF"/>
-          </a:solidFill>
-          <a:ln w="12700">
-            <a:solidFill>
-              <a:srgbClr val="DB2777"/>
-            </a:solidFill>
-            <a:prstDash val="solid"/>
-          </a:ln>
-        </p:spPr>
-      </p:sp>
-      <p:sp>
-        <p:nvSpPr>
-          <p:cNvPr id="63" name="Text 61"/>
-          <p:cNvSpPr/>
-          <p:nvPr/>
-        </p:nvSpPr>
-        <p:spPr>
-          <a:xfrm>
-            <a:off x="7832252" y="4169664"/>
-            <a:ext cx="603504" cy="384048"/>
-          </a:xfrm>
-          <a:prstGeom prst="rect">
-            <a:avLst/>
-          </a:prstGeom>
-          <a:noFill/>
-          <a:ln/>
-        </p:spPr>
-        <p:txBody>
-          <a:bodyPr wrap="square" lIns="0" tIns="0" rIns="0" bIns="0" rtlCol="0" anchor="ctr"/>
-          <a:lstStyle/>
-          <a:p>
-            <a:pPr algn="ctr" indent="0" marL="0">
-              <a:buNone/>
-            </a:pPr>
-            <a:r>
-              <a:rPr lang="en-US" sz="900" b="1" dirty="0">
-                <a:solidFill>
-                  <a:srgbClr val="9D174D"/>
-                </a:solidFill>
-                <a:latin typeface="Trebuchet MS" pitchFamily="34" charset="0"/>
-                <a:ea typeface="Trebuchet MS" pitchFamily="34" charset="-122"/>
-                <a:cs typeface="Trebuchet MS" pitchFamily="34" charset="-120"/>
-              </a:rPr>
-              <a:t>ce</a:t>
-            </a:r>
-            <a:endParaRPr lang="en-US" sz="900" dirty="0"/>
-          </a:p>
-        </p:txBody>
-      </p:sp>
-      <p:sp>
-        <p:nvSpPr>
-          <p:cNvPr id="64" name="Text 62"/>
-          <p:cNvSpPr/>
-          <p:nvPr/>
-        </p:nvSpPr>
-        <p:spPr>
-          <a:xfrm>
-            <a:off x="7832252" y="4572000"/>
-            <a:ext cx="603504" cy="219456"/>
-          </a:xfrm>
-          <a:prstGeom prst="rect">
-            <a:avLst/>
-          </a:prstGeom>
-          <a:noFill/>
-          <a:ln/>
-        </p:spPr>
-        <p:txBody>
-          <a:bodyPr wrap="square" lIns="0" tIns="0" rIns="0" bIns="0" rtlCol="0" anchor="t"/>
-          <a:lstStyle/>
-          <a:p>
-            <a:pPr algn="ctr" indent="0" marL="0">
-              <a:buNone/>
-            </a:pPr>
-            <a:r>
-              <a:rPr lang="en-US" sz="750" i="1" dirty="0">
-                <a:solidFill>
-                  <a:srgbClr val="94A3B8"/>
-                </a:solidFill>
-                <a:latin typeface="Calibri" pitchFamily="34" charset="0"/>
-                <a:ea typeface="Calibri" pitchFamily="34" charset="-122"/>
-                <a:cs typeface="Calibri" pitchFamily="34" charset="-120"/>
-              </a:rPr>
-              <a:t>/s/</a:t>
-            </a:r>
-            <a:endParaRPr lang="en-US" sz="750" dirty="0"/>
           </a:p>
         </p:txBody>
       </p:sp>
@@ -12395,7 +12461,7 @@
                 <a:ea typeface="Trebuchet MS" pitchFamily="34" charset="-122"/>
                 <a:cs typeface="Trebuchet MS" pitchFamily="34" charset="-120"/>
               </a:rPr>
-              <a:t>circumvent</a:t>
+              <a:t>circumstances</a:t>
             </a:r>
             <a:endParaRPr lang="en-US" sz="2800" dirty="0"/>
           </a:p>
@@ -13222,7 +13288,7 @@
                 <a:ea typeface="Trebuchet MS" pitchFamily="34" charset="-122"/>
                 <a:cs typeface="Trebuchet MS" pitchFamily="34" charset="-120"/>
               </a:rPr>
-              <a:t>circumvent</a:t>
+              <a:t>circumstances</a:t>
             </a:r>
             <a:endParaRPr lang="en-US" sz="2800" dirty="0"/>
           </a:p>
@@ -13302,7 +13368,7 @@
         </p:nvSpPr>
         <p:spPr>
           <a:xfrm>
-            <a:off x="2938272" y="2258568"/>
+            <a:off x="2221992" y="2258568"/>
             <a:ext cx="1828800" cy="292608"/>
           </a:xfrm>
           <a:prstGeom prst="rect">
@@ -13336,7 +13402,7 @@
         </p:nvSpPr>
         <p:spPr>
           <a:xfrm>
-            <a:off x="2938272" y="2258568"/>
+            <a:off x="2221992" y="2258568"/>
             <a:ext cx="1828800" cy="292608"/>
           </a:xfrm>
           <a:prstGeom prst="rect">
@@ -13375,7 +13441,7 @@
         </p:nvSpPr>
         <p:spPr>
           <a:xfrm>
-            <a:off x="2938272" y="2569464"/>
+            <a:off x="2221992" y="2569464"/>
             <a:ext cx="1828800" cy="201168"/>
           </a:xfrm>
           <a:prstGeom prst="rect">
@@ -13414,7 +13480,7 @@
         </p:nvSpPr>
         <p:spPr>
           <a:xfrm>
-            <a:off x="5803392" y="2258568"/>
+            <a:off x="4370832" y="2258568"/>
             <a:ext cx="1828800" cy="292608"/>
           </a:xfrm>
           <a:prstGeom prst="rect">
@@ -13448,7 +13514,7 @@
         </p:nvSpPr>
         <p:spPr>
           <a:xfrm>
-            <a:off x="5803392" y="2258568"/>
+            <a:off x="4370832" y="2258568"/>
             <a:ext cx="1828800" cy="292608"/>
           </a:xfrm>
           <a:prstGeom prst="rect">
@@ -13473,7 +13539,7 @@
                 <a:ea typeface="Trebuchet MS" pitchFamily="34" charset="-122"/>
                 <a:cs typeface="Trebuchet MS" pitchFamily="34" charset="-120"/>
               </a:rPr>
-              <a:t>vent</a:t>
+              <a:t>stance</a:t>
             </a:r>
             <a:endParaRPr lang="en-US" sz="1300" dirty="0"/>
           </a:p>
@@ -13487,7 +13553,7 @@
         </p:nvSpPr>
         <p:spPr>
           <a:xfrm>
-            <a:off x="5803392" y="2569464"/>
+            <a:off x="4370832" y="2569464"/>
             <a:ext cx="1828800" cy="201168"/>
           </a:xfrm>
           <a:prstGeom prst="rect">
@@ -13512,7 +13578,7 @@
                 <a:ea typeface="Calibri" pitchFamily="34" charset="-122"/>
                 <a:cs typeface="Calibri" pitchFamily="34" charset="-120"/>
               </a:rPr>
-              <a:t>come, go</a:t>
+              <a:t>standing, condition</a:t>
             </a:r>
             <a:endParaRPr lang="en-US" sz="850" dirty="0"/>
           </a:p>
@@ -13521,6 +13587,118 @@
       <p:sp>
         <p:nvSpPr>
           <p:cNvPr id="22" name="Shape 20"/>
+          <p:cNvSpPr/>
+          <p:nvPr/>
+        </p:nvSpPr>
+        <p:spPr>
+          <a:xfrm>
+            <a:off x="6519672" y="2258568"/>
+            <a:ext cx="1828800" cy="292608"/>
+          </a:xfrm>
+          <a:prstGeom prst="rect">
+            <a:avLst>
+              <a:gd name="adj" fmla="val 25000"/>
+            </a:avLst>
+          </a:prstGeom>
+          <a:solidFill>
+            <a:srgbClr val="FCE7F3"/>
+          </a:solidFill>
+          <a:ln w="19050">
+            <a:solidFill>
+              <a:srgbClr val="DB2777"/>
+            </a:solidFill>
+            <a:prstDash val="solid"/>
+          </a:ln>
+          <a:effectLst>
+            <a:outerShdw sx="100000" sy="100000" kx="0" ky="0" algn="bl" rotWithShape="0" blurRad="101600" dist="38100" dir="8100000">
+              <a:srgbClr val="000000">
+                <a:alpha val="12000"/>
+              </a:srgbClr>
+            </a:outerShdw>
+          </a:effectLst>
+        </p:spPr>
+      </p:sp>
+      <p:sp>
+        <p:nvSpPr>
+          <p:cNvPr id="23" name="Text 21"/>
+          <p:cNvSpPr/>
+          <p:nvPr/>
+        </p:nvSpPr>
+        <p:spPr>
+          <a:xfrm>
+            <a:off x="6519672" y="2258568"/>
+            <a:ext cx="1828800" cy="292608"/>
+          </a:xfrm>
+          <a:prstGeom prst="rect">
+            <a:avLst/>
+          </a:prstGeom>
+          <a:noFill/>
+          <a:ln/>
+        </p:spPr>
+        <p:txBody>
+          <a:bodyPr wrap="square" lIns="0" tIns="0" rIns="0" bIns="0" rtlCol="0" anchor="ctr"/>
+          <a:lstStyle/>
+          <a:p>
+            <a:pPr algn="ctr" indent="0" marL="0">
+              <a:buNone/>
+            </a:pPr>
+            <a:r>
+              <a:rPr lang="en-US" sz="1300" b="1" dirty="0">
+                <a:solidFill>
+                  <a:srgbClr val="9D174D"/>
+                </a:solidFill>
+                <a:latin typeface="Trebuchet MS" pitchFamily="34" charset="0"/>
+                <a:ea typeface="Trebuchet MS" pitchFamily="34" charset="-122"/>
+                <a:cs typeface="Trebuchet MS" pitchFamily="34" charset="-120"/>
+              </a:rPr>
+              <a:t>s</a:t>
+            </a:r>
+            <a:endParaRPr lang="en-US" sz="1300" dirty="0"/>
+          </a:p>
+        </p:txBody>
+      </p:sp>
+      <p:sp>
+        <p:nvSpPr>
+          <p:cNvPr id="24" name="Text 22"/>
+          <p:cNvSpPr/>
+          <p:nvPr/>
+        </p:nvSpPr>
+        <p:spPr>
+          <a:xfrm>
+            <a:off x="6519672" y="2569464"/>
+            <a:ext cx="1828800" cy="201168"/>
+          </a:xfrm>
+          <a:prstGeom prst="rect">
+            <a:avLst/>
+          </a:prstGeom>
+          <a:noFill/>
+          <a:ln/>
+        </p:spPr>
+        <p:txBody>
+          <a:bodyPr wrap="square" lIns="0" tIns="0" rIns="0" bIns="0" rtlCol="0" anchor="t"/>
+          <a:lstStyle/>
+          <a:p>
+            <a:pPr algn="ctr" indent="0" marL="0">
+              <a:buNone/>
+            </a:pPr>
+            <a:r>
+              <a:rPr lang="en-US" sz="850" dirty="0">
+                <a:solidFill>
+                  <a:srgbClr val="475569"/>
+                </a:solidFill>
+                <a:latin typeface="Calibri" pitchFamily="34" charset="0"/>
+                <a:ea typeface="Calibri" pitchFamily="34" charset="-122"/>
+                <a:cs typeface="Calibri" pitchFamily="34" charset="-120"/>
+              </a:rPr>
+              <a:t>more than one</a:t>
+            </a:r>
+            <a:endParaRPr lang="en-US" sz="850" dirty="0"/>
+          </a:p>
+        </p:txBody>
+      </p:sp>
+      <p:sp>
+        <p:nvSpPr>
+          <p:cNvPr id="25" name="Shape 23"/>
           <p:cNvSpPr/>
           <p:nvPr/>
         </p:nvSpPr>
@@ -13547,7 +13725,7 @@
       </p:sp>
       <p:sp>
         <p:nvSpPr>
-          <p:cNvPr id="23" name="Text 21"/>
+          <p:cNvPr id="26" name="Text 24"/>
           <p:cNvSpPr/>
           <p:nvPr/>
         </p:nvSpPr>
@@ -13586,7 +13764,7 @@
       </p:sp>
       <p:sp>
         <p:nvSpPr>
-          <p:cNvPr id="24" name="Shape 22"/>
+          <p:cNvPr id="27" name="Shape 25"/>
           <p:cNvSpPr/>
           <p:nvPr/>
         </p:nvSpPr>
@@ -13613,7 +13791,7 @@
       </p:sp>
       <p:sp>
         <p:nvSpPr>
-          <p:cNvPr id="25" name="Text 23"/>
+          <p:cNvPr id="28" name="Text 26"/>
           <p:cNvSpPr/>
           <p:nvPr/>
         </p:nvSpPr>
@@ -13652,7 +13830,7 @@
       </p:sp>
       <p:sp>
         <p:nvSpPr>
-          <p:cNvPr id="26" name="Shape 24"/>
+          <p:cNvPr id="29" name="Shape 27"/>
           <p:cNvSpPr/>
           <p:nvPr/>
         </p:nvSpPr>
@@ -13679,7 +13857,7 @@
       </p:sp>
       <p:sp>
         <p:nvSpPr>
-          <p:cNvPr id="27" name="Text 25"/>
+          <p:cNvPr id="30" name="Text 28"/>
           <p:cNvSpPr/>
           <p:nvPr/>
         </p:nvSpPr>
@@ -13718,7 +13896,7 @@
       </p:sp>
       <p:sp>
         <p:nvSpPr>
-          <p:cNvPr id="28" name="Shape 26"/>
+          <p:cNvPr id="31" name="Shape 29"/>
           <p:cNvSpPr/>
           <p:nvPr/>
         </p:nvSpPr>
@@ -13745,7 +13923,7 @@
       </p:sp>
       <p:sp>
         <p:nvSpPr>
-          <p:cNvPr id="29" name="Text 27"/>
+          <p:cNvPr id="32" name="Text 30"/>
           <p:cNvSpPr/>
           <p:nvPr/>
         </p:nvSpPr>
@@ -14207,7 +14385,7 @@
                 <a:ea typeface="Trebuchet MS" pitchFamily="34" charset="-122"/>
                 <a:cs typeface="Trebuchet MS" pitchFamily="34" charset="-120"/>
               </a:rPr>
-              <a:t>circumvent</a:t>
+              <a:t>circumstances</a:t>
             </a:r>
             <a:endParaRPr lang="en-US" sz="2800" dirty="0"/>
           </a:p>
@@ -14287,7 +14465,7 @@
         </p:nvSpPr>
         <p:spPr>
           <a:xfrm>
-            <a:off x="2938272" y="2258568"/>
+            <a:off x="2221992" y="2258568"/>
             <a:ext cx="1828800" cy="292608"/>
           </a:xfrm>
           <a:prstGeom prst="rect">
@@ -14321,7 +14499,7 @@
         </p:nvSpPr>
         <p:spPr>
           <a:xfrm>
-            <a:off x="2938272" y="2258568"/>
+            <a:off x="2221992" y="2258568"/>
             <a:ext cx="1828800" cy="292608"/>
           </a:xfrm>
           <a:prstGeom prst="rect">
@@ -14360,7 +14538,7 @@
         </p:nvSpPr>
         <p:spPr>
           <a:xfrm>
-            <a:off x="2938272" y="2569464"/>
+            <a:off x="2221992" y="2569464"/>
             <a:ext cx="1828800" cy="201168"/>
           </a:xfrm>
           <a:prstGeom prst="rect">
@@ -14399,7 +14577,7 @@
         </p:nvSpPr>
         <p:spPr>
           <a:xfrm>
-            <a:off x="5803392" y="2258568"/>
+            <a:off x="4370832" y="2258568"/>
             <a:ext cx="1828800" cy="292608"/>
           </a:xfrm>
           <a:prstGeom prst="rect">
@@ -14433,7 +14611,7 @@
         </p:nvSpPr>
         <p:spPr>
           <a:xfrm>
-            <a:off x="5803392" y="2258568"/>
+            <a:off x="4370832" y="2258568"/>
             <a:ext cx="1828800" cy="292608"/>
           </a:xfrm>
           <a:prstGeom prst="rect">
@@ -14458,7 +14636,7 @@
                 <a:ea typeface="Trebuchet MS" pitchFamily="34" charset="-122"/>
                 <a:cs typeface="Trebuchet MS" pitchFamily="34" charset="-120"/>
               </a:rPr>
-              <a:t>vent</a:t>
+              <a:t>stance</a:t>
             </a:r>
             <a:endParaRPr lang="en-US" sz="1300" dirty="0"/>
           </a:p>
@@ -14472,7 +14650,7 @@
         </p:nvSpPr>
         <p:spPr>
           <a:xfrm>
-            <a:off x="5803392" y="2569464"/>
+            <a:off x="4370832" y="2569464"/>
             <a:ext cx="1828800" cy="201168"/>
           </a:xfrm>
           <a:prstGeom prst="rect">
@@ -14497,7 +14675,7 @@
                 <a:ea typeface="Calibri" pitchFamily="34" charset="-122"/>
                 <a:cs typeface="Calibri" pitchFamily="34" charset="-120"/>
               </a:rPr>
-              <a:t>come, go</a:t>
+              <a:t>standing, condition</a:t>
             </a:r>
             <a:endParaRPr lang="en-US" sz="850" dirty="0"/>
           </a:p>
@@ -14506,6 +14684,118 @@
       <p:sp>
         <p:nvSpPr>
           <p:cNvPr id="22" name="Shape 20"/>
+          <p:cNvSpPr/>
+          <p:nvPr/>
+        </p:nvSpPr>
+        <p:spPr>
+          <a:xfrm>
+            <a:off x="6519672" y="2258568"/>
+            <a:ext cx="1828800" cy="292608"/>
+          </a:xfrm>
+          <a:prstGeom prst="rect">
+            <a:avLst>
+              <a:gd name="adj" fmla="val 25000"/>
+            </a:avLst>
+          </a:prstGeom>
+          <a:solidFill>
+            <a:srgbClr val="FCE7F3"/>
+          </a:solidFill>
+          <a:ln w="19050">
+            <a:solidFill>
+              <a:srgbClr val="DB2777"/>
+            </a:solidFill>
+            <a:prstDash val="solid"/>
+          </a:ln>
+          <a:effectLst>
+            <a:outerShdw sx="100000" sy="100000" kx="0" ky="0" algn="bl" rotWithShape="0" blurRad="101600" dist="38100" dir="8100000">
+              <a:srgbClr val="000000">
+                <a:alpha val="12000"/>
+              </a:srgbClr>
+            </a:outerShdw>
+          </a:effectLst>
+        </p:spPr>
+      </p:sp>
+      <p:sp>
+        <p:nvSpPr>
+          <p:cNvPr id="23" name="Text 21"/>
+          <p:cNvSpPr/>
+          <p:nvPr/>
+        </p:nvSpPr>
+        <p:spPr>
+          <a:xfrm>
+            <a:off x="6519672" y="2258568"/>
+            <a:ext cx="1828800" cy="292608"/>
+          </a:xfrm>
+          <a:prstGeom prst="rect">
+            <a:avLst/>
+          </a:prstGeom>
+          <a:noFill/>
+          <a:ln/>
+        </p:spPr>
+        <p:txBody>
+          <a:bodyPr wrap="square" lIns="0" tIns="0" rIns="0" bIns="0" rtlCol="0" anchor="ctr"/>
+          <a:lstStyle/>
+          <a:p>
+            <a:pPr algn="ctr" indent="0" marL="0">
+              <a:buNone/>
+            </a:pPr>
+            <a:r>
+              <a:rPr lang="en-US" sz="1300" b="1" dirty="0">
+                <a:solidFill>
+                  <a:srgbClr val="9D174D"/>
+                </a:solidFill>
+                <a:latin typeface="Trebuchet MS" pitchFamily="34" charset="0"/>
+                <a:ea typeface="Trebuchet MS" pitchFamily="34" charset="-122"/>
+                <a:cs typeface="Trebuchet MS" pitchFamily="34" charset="-120"/>
+              </a:rPr>
+              <a:t>s</a:t>
+            </a:r>
+            <a:endParaRPr lang="en-US" sz="1300" dirty="0"/>
+          </a:p>
+        </p:txBody>
+      </p:sp>
+      <p:sp>
+        <p:nvSpPr>
+          <p:cNvPr id="24" name="Text 22"/>
+          <p:cNvSpPr/>
+          <p:nvPr/>
+        </p:nvSpPr>
+        <p:spPr>
+          <a:xfrm>
+            <a:off x="6519672" y="2569464"/>
+            <a:ext cx="1828800" cy="201168"/>
+          </a:xfrm>
+          <a:prstGeom prst="rect">
+            <a:avLst/>
+          </a:prstGeom>
+          <a:noFill/>
+          <a:ln/>
+        </p:spPr>
+        <p:txBody>
+          <a:bodyPr wrap="square" lIns="0" tIns="0" rIns="0" bIns="0" rtlCol="0" anchor="t"/>
+          <a:lstStyle/>
+          <a:p>
+            <a:pPr algn="ctr" indent="0" marL="0">
+              <a:buNone/>
+            </a:pPr>
+            <a:r>
+              <a:rPr lang="en-US" sz="850" dirty="0">
+                <a:solidFill>
+                  <a:srgbClr val="475569"/>
+                </a:solidFill>
+                <a:latin typeface="Calibri" pitchFamily="34" charset="0"/>
+                <a:ea typeface="Calibri" pitchFamily="34" charset="-122"/>
+                <a:cs typeface="Calibri" pitchFamily="34" charset="-120"/>
+              </a:rPr>
+              <a:t>more than one</a:t>
+            </a:r>
+            <a:endParaRPr lang="en-US" sz="850" dirty="0"/>
+          </a:p>
+        </p:txBody>
+      </p:sp>
+      <p:sp>
+        <p:nvSpPr>
+          <p:cNvPr id="25" name="Shape 23"/>
           <p:cNvSpPr/>
           <p:nvPr/>
         </p:nvSpPr>
@@ -14532,7 +14822,7 @@
       </p:sp>
       <p:sp>
         <p:nvSpPr>
-          <p:cNvPr id="23" name="Text 21"/>
+          <p:cNvPr id="26" name="Text 24"/>
           <p:cNvSpPr/>
           <p:nvPr/>
         </p:nvSpPr>
@@ -14571,7 +14861,7 @@
       </p:sp>
       <p:sp>
         <p:nvSpPr>
-          <p:cNvPr id="24" name="Shape 22"/>
+          <p:cNvPr id="27" name="Shape 25"/>
           <p:cNvSpPr/>
           <p:nvPr/>
         </p:nvSpPr>
@@ -14598,14 +14888,14 @@
       </p:sp>
       <p:sp>
         <p:nvSpPr>
-          <p:cNvPr id="25" name="Shape 23"/>
-          <p:cNvSpPr/>
-          <p:nvPr/>
-        </p:nvSpPr>
-        <p:spPr>
-          <a:xfrm>
-            <a:off x="2313432" y="3364992"/>
-            <a:ext cx="1645920" cy="475488"/>
+          <p:cNvPr id="28" name="Shape 26"/>
+          <p:cNvSpPr/>
+          <p:nvPr/>
+        </p:nvSpPr>
+        <p:spPr>
+          <a:xfrm>
+            <a:off x="1975104" y="3364992"/>
+            <a:ext cx="1554480" cy="475488"/>
           </a:xfrm>
           <a:prstGeom prst="rect">
             <a:avLst>
@@ -14625,14 +14915,14 @@
       </p:sp>
       <p:sp>
         <p:nvSpPr>
-          <p:cNvPr id="26" name="Text 24"/>
-          <p:cNvSpPr/>
-          <p:nvPr/>
-        </p:nvSpPr>
-        <p:spPr>
-          <a:xfrm>
-            <a:off x="2313432" y="3364992"/>
-            <a:ext cx="1645920" cy="475488"/>
+          <p:cNvPr id="29" name="Text 27"/>
+          <p:cNvSpPr/>
+          <p:nvPr/>
+        </p:nvSpPr>
+        <p:spPr>
+          <a:xfrm>
+            <a:off x="1975104" y="3364992"/>
+            <a:ext cx="1554480" cy="475488"/>
           </a:xfrm>
           <a:prstGeom prst="rect">
             <a:avLst/>
@@ -14664,14 +14954,14 @@
       </p:sp>
       <p:sp>
         <p:nvSpPr>
-          <p:cNvPr id="27" name="Text 25"/>
-          <p:cNvSpPr/>
-          <p:nvPr/>
-        </p:nvSpPr>
-        <p:spPr>
-          <a:xfrm>
-            <a:off x="3959352" y="3364992"/>
-            <a:ext cx="411480" cy="475488"/>
+          <p:cNvPr id="30" name="Text 28"/>
+          <p:cNvSpPr/>
+          <p:nvPr/>
+        </p:nvSpPr>
+        <p:spPr>
+          <a:xfrm>
+            <a:off x="3529584" y="3364992"/>
+            <a:ext cx="73152" cy="475488"/>
           </a:xfrm>
           <a:prstGeom prst="rect">
             <a:avLst/>
@@ -14703,14 +14993,14 @@
       </p:sp>
       <p:sp>
         <p:nvSpPr>
-          <p:cNvPr id="28" name="Shape 26"/>
-          <p:cNvSpPr/>
-          <p:nvPr/>
-        </p:nvSpPr>
-        <p:spPr>
-          <a:xfrm>
-            <a:off x="4370832" y="3364992"/>
-            <a:ext cx="1645920" cy="475488"/>
+          <p:cNvPr id="31" name="Shape 29"/>
+          <p:cNvSpPr/>
+          <p:nvPr/>
+        </p:nvSpPr>
+        <p:spPr>
+          <a:xfrm>
+            <a:off x="3602736" y="3364992"/>
+            <a:ext cx="1554480" cy="475488"/>
           </a:xfrm>
           <a:prstGeom prst="rect">
             <a:avLst>
@@ -14730,14 +15020,14 @@
       </p:sp>
       <p:sp>
         <p:nvSpPr>
-          <p:cNvPr id="29" name="Text 27"/>
-          <p:cNvSpPr/>
-          <p:nvPr/>
-        </p:nvSpPr>
-        <p:spPr>
-          <a:xfrm>
-            <a:off x="4370832" y="3364992"/>
-            <a:ext cx="1645920" cy="475488"/>
+          <p:cNvPr id="32" name="Text 30"/>
+          <p:cNvSpPr/>
+          <p:nvPr/>
+        </p:nvSpPr>
+        <p:spPr>
+          <a:xfrm>
+            <a:off x="3602736" y="3364992"/>
+            <a:ext cx="1554480" cy="475488"/>
           </a:xfrm>
           <a:prstGeom prst="rect">
             <a:avLst/>
@@ -14769,14 +15059,14 @@
       </p:sp>
       <p:sp>
         <p:nvSpPr>
-          <p:cNvPr id="30" name="Text 28"/>
-          <p:cNvSpPr/>
-          <p:nvPr/>
-        </p:nvSpPr>
-        <p:spPr>
-          <a:xfrm>
-            <a:off x="6016752" y="3364992"/>
-            <a:ext cx="411480" cy="475488"/>
+          <p:cNvPr id="33" name="Text 31"/>
+          <p:cNvSpPr/>
+          <p:nvPr/>
+        </p:nvSpPr>
+        <p:spPr>
+          <a:xfrm>
+            <a:off x="5157216" y="3364992"/>
+            <a:ext cx="73152" cy="475488"/>
           </a:xfrm>
           <a:prstGeom prst="rect">
             <a:avLst/>
@@ -14808,14 +15098,14 @@
       </p:sp>
       <p:sp>
         <p:nvSpPr>
-          <p:cNvPr id="31" name="Shape 29"/>
-          <p:cNvSpPr/>
-          <p:nvPr/>
-        </p:nvSpPr>
-        <p:spPr>
-          <a:xfrm>
-            <a:off x="6428232" y="3364992"/>
-            <a:ext cx="1645920" cy="475488"/>
+          <p:cNvPr id="34" name="Shape 32"/>
+          <p:cNvSpPr/>
+          <p:nvPr/>
+        </p:nvSpPr>
+        <p:spPr>
+          <a:xfrm>
+            <a:off x="5230368" y="3364992"/>
+            <a:ext cx="1554480" cy="475488"/>
           </a:xfrm>
           <a:prstGeom prst="rect">
             <a:avLst>
@@ -14835,14 +15125,14 @@
       </p:sp>
       <p:sp>
         <p:nvSpPr>
-          <p:cNvPr id="32" name="Text 30"/>
-          <p:cNvSpPr/>
-          <p:nvPr/>
-        </p:nvSpPr>
-        <p:spPr>
-          <a:xfrm>
-            <a:off x="6428232" y="3364992"/>
-            <a:ext cx="1645920" cy="475488"/>
+          <p:cNvPr id="35" name="Text 33"/>
+          <p:cNvSpPr/>
+          <p:nvPr/>
+        </p:nvSpPr>
+        <p:spPr>
+          <a:xfrm>
+            <a:off x="5230368" y="3364992"/>
+            <a:ext cx="1554480" cy="475488"/>
           </a:xfrm>
           <a:prstGeom prst="rect">
             <a:avLst/>
@@ -14866,7 +15156,7 @@
                 <a:ea typeface="Trebuchet MS" pitchFamily="34" charset="-122"/>
                 <a:cs typeface="Trebuchet MS" pitchFamily="34" charset="-120"/>
               </a:rPr>
-              <a:t>vent</a:t>
+              <a:t>stan</a:t>
             </a:r>
             <a:endParaRPr lang="en-US" sz="1400" dirty="0"/>
           </a:p>
@@ -14874,7 +15164,112 @@
       </p:sp>
       <p:sp>
         <p:nvSpPr>
-          <p:cNvPr id="33" name="Shape 31"/>
+          <p:cNvPr id="36" name="Text 34"/>
+          <p:cNvSpPr/>
+          <p:nvPr/>
+        </p:nvSpPr>
+        <p:spPr>
+          <a:xfrm>
+            <a:off x="6784848" y="3364992"/>
+            <a:ext cx="73152" cy="475488"/>
+          </a:xfrm>
+          <a:prstGeom prst="rect">
+            <a:avLst/>
+          </a:prstGeom>
+          <a:noFill/>
+          <a:ln/>
+        </p:spPr>
+        <p:txBody>
+          <a:bodyPr wrap="square" lIns="0" tIns="0" rIns="0" bIns="0" rtlCol="0" anchor="ctr"/>
+          <a:lstStyle/>
+          <a:p>
+            <a:pPr algn="ctr" indent="0" marL="0">
+              <a:buNone/>
+            </a:pPr>
+            <a:r>
+              <a:rPr lang="en-US" sz="1600" b="1" dirty="0">
+                <a:solidFill>
+                  <a:srgbClr val="0D9488"/>
+                </a:solidFill>
+                <a:latin typeface="Trebuchet MS" pitchFamily="34" charset="0"/>
+                <a:ea typeface="Trebuchet MS" pitchFamily="34" charset="-122"/>
+                <a:cs typeface="Trebuchet MS" pitchFamily="34" charset="-120"/>
+              </a:rPr>
+              <a:t>·</a:t>
+            </a:r>
+            <a:endParaRPr lang="en-US" sz="1600" dirty="0"/>
+          </a:p>
+        </p:txBody>
+      </p:sp>
+      <p:sp>
+        <p:nvSpPr>
+          <p:cNvPr id="37" name="Shape 35"/>
+          <p:cNvSpPr/>
+          <p:nvPr/>
+        </p:nvSpPr>
+        <p:spPr>
+          <a:xfrm>
+            <a:off x="6858000" y="3364992"/>
+            <a:ext cx="1554480" cy="475488"/>
+          </a:xfrm>
+          <a:prstGeom prst="rect">
+            <a:avLst>
+              <a:gd name="adj" fmla="val 9615"/>
+            </a:avLst>
+          </a:prstGeom>
+          <a:solidFill>
+            <a:srgbClr val="FFFFFF"/>
+          </a:solidFill>
+          <a:ln w="12700">
+            <a:solidFill>
+              <a:srgbClr val="0D9488"/>
+            </a:solidFill>
+            <a:prstDash val="solid"/>
+          </a:ln>
+        </p:spPr>
+      </p:sp>
+      <p:sp>
+        <p:nvSpPr>
+          <p:cNvPr id="38" name="Text 36"/>
+          <p:cNvSpPr/>
+          <p:nvPr/>
+        </p:nvSpPr>
+        <p:spPr>
+          <a:xfrm>
+            <a:off x="6858000" y="3364992"/>
+            <a:ext cx="1554480" cy="475488"/>
+          </a:xfrm>
+          <a:prstGeom prst="rect">
+            <a:avLst/>
+          </a:prstGeom>
+          <a:noFill/>
+          <a:ln/>
+        </p:spPr>
+        <p:txBody>
+          <a:bodyPr wrap="square" lIns="0" tIns="0" rIns="0" bIns="0" rtlCol="0" anchor="ctr"/>
+          <a:lstStyle/>
+          <a:p>
+            <a:pPr algn="ctr" indent="0" marL="0">
+              <a:buNone/>
+            </a:pPr>
+            <a:r>
+              <a:rPr lang="en-US" sz="1400" b="1" dirty="0">
+                <a:solidFill>
+                  <a:srgbClr val="0D9488"/>
+                </a:solidFill>
+                <a:latin typeface="Trebuchet MS" pitchFamily="34" charset="0"/>
+                <a:ea typeface="Trebuchet MS" pitchFamily="34" charset="-122"/>
+                <a:cs typeface="Trebuchet MS" pitchFamily="34" charset="-120"/>
+              </a:rPr>
+              <a:t>ces</a:t>
+            </a:r>
+            <a:endParaRPr lang="en-US" sz="1400" dirty="0"/>
+          </a:p>
+        </p:txBody>
+      </p:sp>
+      <p:sp>
+        <p:nvSpPr>
+          <p:cNvPr id="39" name="Shape 37"/>
           <p:cNvSpPr/>
           <p:nvPr/>
         </p:nvSpPr>
@@ -14901,7 +15296,7 @@
       </p:sp>
       <p:sp>
         <p:nvSpPr>
-          <p:cNvPr id="34" name="Text 32"/>
+          <p:cNvPr id="40" name="Text 38"/>
           <p:cNvSpPr/>
           <p:nvPr/>
         </p:nvSpPr>
@@ -14940,7 +15335,7 @@
       </p:sp>
       <p:sp>
         <p:nvSpPr>
-          <p:cNvPr id="35" name="Shape 33"/>
+          <p:cNvPr id="41" name="Shape 39"/>
           <p:cNvSpPr/>
           <p:nvPr/>
         </p:nvSpPr>
@@ -14967,7 +15362,7 @@
       </p:sp>
       <p:sp>
         <p:nvSpPr>
-          <p:cNvPr id="36" name="Text 34"/>
+          <p:cNvPr id="42" name="Text 40"/>
           <p:cNvSpPr/>
           <p:nvPr/>
         </p:nvSpPr>
@@ -15694,7 +16089,7 @@
                 <a:ea typeface="Trebuchet MS" pitchFamily="34" charset="-122"/>
                 <a:cs typeface="Trebuchet MS" pitchFamily="34" charset="-120"/>
               </a:rPr>
-              <a:t>circumvent</a:t>
+              <a:t>circumstances</a:t>
             </a:r>
             <a:endParaRPr lang="en-US" sz="2800" dirty="0"/>
           </a:p>
@@ -15774,7 +16169,7 @@
         </p:nvSpPr>
         <p:spPr>
           <a:xfrm>
-            <a:off x="2938272" y="2258568"/>
+            <a:off x="2221992" y="2258568"/>
             <a:ext cx="1828800" cy="292608"/>
           </a:xfrm>
           <a:prstGeom prst="rect">
@@ -15808,7 +16203,7 @@
         </p:nvSpPr>
         <p:spPr>
           <a:xfrm>
-            <a:off x="2938272" y="2258568"/>
+            <a:off x="2221992" y="2258568"/>
             <a:ext cx="1828800" cy="292608"/>
           </a:xfrm>
           <a:prstGeom prst="rect">
@@ -15847,7 +16242,7 @@
         </p:nvSpPr>
         <p:spPr>
           <a:xfrm>
-            <a:off x="2938272" y="2569464"/>
+            <a:off x="2221992" y="2569464"/>
             <a:ext cx="1828800" cy="201168"/>
           </a:xfrm>
           <a:prstGeom prst="rect">
@@ -15886,7 +16281,7 @@
         </p:nvSpPr>
         <p:spPr>
           <a:xfrm>
-            <a:off x="5803392" y="2258568"/>
+            <a:off x="4370832" y="2258568"/>
             <a:ext cx="1828800" cy="292608"/>
           </a:xfrm>
           <a:prstGeom prst="rect">
@@ -15920,7 +16315,7 @@
         </p:nvSpPr>
         <p:spPr>
           <a:xfrm>
-            <a:off x="5803392" y="2258568"/>
+            <a:off x="4370832" y="2258568"/>
             <a:ext cx="1828800" cy="292608"/>
           </a:xfrm>
           <a:prstGeom prst="rect">
@@ -15945,7 +16340,7 @@
                 <a:ea typeface="Trebuchet MS" pitchFamily="34" charset="-122"/>
                 <a:cs typeface="Trebuchet MS" pitchFamily="34" charset="-120"/>
               </a:rPr>
-              <a:t>vent</a:t>
+              <a:t>stance</a:t>
             </a:r>
             <a:endParaRPr lang="en-US" sz="1300" dirty="0"/>
           </a:p>
@@ -15959,7 +16354,7 @@
         </p:nvSpPr>
         <p:spPr>
           <a:xfrm>
-            <a:off x="5803392" y="2569464"/>
+            <a:off x="4370832" y="2569464"/>
             <a:ext cx="1828800" cy="201168"/>
           </a:xfrm>
           <a:prstGeom prst="rect">
@@ -15984,7 +16379,7 @@
                 <a:ea typeface="Calibri" pitchFamily="34" charset="-122"/>
                 <a:cs typeface="Calibri" pitchFamily="34" charset="-120"/>
               </a:rPr>
-              <a:t>come, go</a:t>
+              <a:t>standing, condition</a:t>
             </a:r>
             <a:endParaRPr lang="en-US" sz="850" dirty="0"/>
           </a:p>
@@ -15993,6 +16388,118 @@
       <p:sp>
         <p:nvSpPr>
           <p:cNvPr id="22" name="Shape 20"/>
+          <p:cNvSpPr/>
+          <p:nvPr/>
+        </p:nvSpPr>
+        <p:spPr>
+          <a:xfrm>
+            <a:off x="6519672" y="2258568"/>
+            <a:ext cx="1828800" cy="292608"/>
+          </a:xfrm>
+          <a:prstGeom prst="rect">
+            <a:avLst>
+              <a:gd name="adj" fmla="val 25000"/>
+            </a:avLst>
+          </a:prstGeom>
+          <a:solidFill>
+            <a:srgbClr val="FCE7F3"/>
+          </a:solidFill>
+          <a:ln w="19050">
+            <a:solidFill>
+              <a:srgbClr val="DB2777"/>
+            </a:solidFill>
+            <a:prstDash val="solid"/>
+          </a:ln>
+          <a:effectLst>
+            <a:outerShdw sx="100000" sy="100000" kx="0" ky="0" algn="bl" rotWithShape="0" blurRad="101600" dist="38100" dir="8100000">
+              <a:srgbClr val="000000">
+                <a:alpha val="12000"/>
+              </a:srgbClr>
+            </a:outerShdw>
+          </a:effectLst>
+        </p:spPr>
+      </p:sp>
+      <p:sp>
+        <p:nvSpPr>
+          <p:cNvPr id="23" name="Text 21"/>
+          <p:cNvSpPr/>
+          <p:nvPr/>
+        </p:nvSpPr>
+        <p:spPr>
+          <a:xfrm>
+            <a:off x="6519672" y="2258568"/>
+            <a:ext cx="1828800" cy="292608"/>
+          </a:xfrm>
+          <a:prstGeom prst="rect">
+            <a:avLst/>
+          </a:prstGeom>
+          <a:noFill/>
+          <a:ln/>
+        </p:spPr>
+        <p:txBody>
+          <a:bodyPr wrap="square" lIns="0" tIns="0" rIns="0" bIns="0" rtlCol="0" anchor="ctr"/>
+          <a:lstStyle/>
+          <a:p>
+            <a:pPr algn="ctr" indent="0" marL="0">
+              <a:buNone/>
+            </a:pPr>
+            <a:r>
+              <a:rPr lang="en-US" sz="1300" b="1" dirty="0">
+                <a:solidFill>
+                  <a:srgbClr val="9D174D"/>
+                </a:solidFill>
+                <a:latin typeface="Trebuchet MS" pitchFamily="34" charset="0"/>
+                <a:ea typeface="Trebuchet MS" pitchFamily="34" charset="-122"/>
+                <a:cs typeface="Trebuchet MS" pitchFamily="34" charset="-120"/>
+              </a:rPr>
+              <a:t>s</a:t>
+            </a:r>
+            <a:endParaRPr lang="en-US" sz="1300" dirty="0"/>
+          </a:p>
+        </p:txBody>
+      </p:sp>
+      <p:sp>
+        <p:nvSpPr>
+          <p:cNvPr id="24" name="Text 22"/>
+          <p:cNvSpPr/>
+          <p:nvPr/>
+        </p:nvSpPr>
+        <p:spPr>
+          <a:xfrm>
+            <a:off x="6519672" y="2569464"/>
+            <a:ext cx="1828800" cy="201168"/>
+          </a:xfrm>
+          <a:prstGeom prst="rect">
+            <a:avLst/>
+          </a:prstGeom>
+          <a:noFill/>
+          <a:ln/>
+        </p:spPr>
+        <p:txBody>
+          <a:bodyPr wrap="square" lIns="0" tIns="0" rIns="0" bIns="0" rtlCol="0" anchor="t"/>
+          <a:lstStyle/>
+          <a:p>
+            <a:pPr algn="ctr" indent="0" marL="0">
+              <a:buNone/>
+            </a:pPr>
+            <a:r>
+              <a:rPr lang="en-US" sz="850" dirty="0">
+                <a:solidFill>
+                  <a:srgbClr val="475569"/>
+                </a:solidFill>
+                <a:latin typeface="Calibri" pitchFamily="34" charset="0"/>
+                <a:ea typeface="Calibri" pitchFamily="34" charset="-122"/>
+                <a:cs typeface="Calibri" pitchFamily="34" charset="-120"/>
+              </a:rPr>
+              <a:t>more than one</a:t>
+            </a:r>
+            <a:endParaRPr lang="en-US" sz="850" dirty="0"/>
+          </a:p>
+        </p:txBody>
+      </p:sp>
+      <p:sp>
+        <p:nvSpPr>
+          <p:cNvPr id="25" name="Shape 23"/>
           <p:cNvSpPr/>
           <p:nvPr/>
         </p:nvSpPr>
@@ -16019,7 +16526,7 @@
       </p:sp>
       <p:sp>
         <p:nvSpPr>
-          <p:cNvPr id="23" name="Text 21"/>
+          <p:cNvPr id="26" name="Text 24"/>
           <p:cNvSpPr/>
           <p:nvPr/>
         </p:nvSpPr>
@@ -16058,7 +16565,7 @@
       </p:sp>
       <p:sp>
         <p:nvSpPr>
-          <p:cNvPr id="24" name="Shape 22"/>
+          <p:cNvPr id="27" name="Shape 25"/>
           <p:cNvSpPr/>
           <p:nvPr/>
         </p:nvSpPr>
@@ -16085,14 +16592,14 @@
       </p:sp>
       <p:sp>
         <p:nvSpPr>
-          <p:cNvPr id="25" name="Shape 23"/>
-          <p:cNvSpPr/>
-          <p:nvPr/>
-        </p:nvSpPr>
-        <p:spPr>
-          <a:xfrm>
-            <a:off x="2313432" y="3364992"/>
-            <a:ext cx="1645920" cy="475488"/>
+          <p:cNvPr id="28" name="Shape 26"/>
+          <p:cNvSpPr/>
+          <p:nvPr/>
+        </p:nvSpPr>
+        <p:spPr>
+          <a:xfrm>
+            <a:off x="1975104" y="3364992"/>
+            <a:ext cx="1554480" cy="475488"/>
           </a:xfrm>
           <a:prstGeom prst="rect">
             <a:avLst>
@@ -16112,14 +16619,14 @@
       </p:sp>
       <p:sp>
         <p:nvSpPr>
-          <p:cNvPr id="26" name="Text 24"/>
-          <p:cNvSpPr/>
-          <p:nvPr/>
-        </p:nvSpPr>
-        <p:spPr>
-          <a:xfrm>
-            <a:off x="2313432" y="3364992"/>
-            <a:ext cx="1645920" cy="475488"/>
+          <p:cNvPr id="29" name="Text 27"/>
+          <p:cNvSpPr/>
+          <p:nvPr/>
+        </p:nvSpPr>
+        <p:spPr>
+          <a:xfrm>
+            <a:off x="1975104" y="3364992"/>
+            <a:ext cx="1554480" cy="475488"/>
           </a:xfrm>
           <a:prstGeom prst="rect">
             <a:avLst/>
@@ -16151,14 +16658,14 @@
       </p:sp>
       <p:sp>
         <p:nvSpPr>
-          <p:cNvPr id="27" name="Text 25"/>
-          <p:cNvSpPr/>
-          <p:nvPr/>
-        </p:nvSpPr>
-        <p:spPr>
-          <a:xfrm>
-            <a:off x="3959352" y="3364992"/>
-            <a:ext cx="411480" cy="475488"/>
+          <p:cNvPr id="30" name="Text 28"/>
+          <p:cNvSpPr/>
+          <p:nvPr/>
+        </p:nvSpPr>
+        <p:spPr>
+          <a:xfrm>
+            <a:off x="3529584" y="3364992"/>
+            <a:ext cx="73152" cy="475488"/>
           </a:xfrm>
           <a:prstGeom prst="rect">
             <a:avLst/>
@@ -16190,14 +16697,14 @@
       </p:sp>
       <p:sp>
         <p:nvSpPr>
-          <p:cNvPr id="28" name="Shape 26"/>
-          <p:cNvSpPr/>
-          <p:nvPr/>
-        </p:nvSpPr>
-        <p:spPr>
-          <a:xfrm>
-            <a:off x="4370832" y="3364992"/>
-            <a:ext cx="1645920" cy="475488"/>
+          <p:cNvPr id="31" name="Shape 29"/>
+          <p:cNvSpPr/>
+          <p:nvPr/>
+        </p:nvSpPr>
+        <p:spPr>
+          <a:xfrm>
+            <a:off x="3602736" y="3364992"/>
+            <a:ext cx="1554480" cy="475488"/>
           </a:xfrm>
           <a:prstGeom prst="rect">
             <a:avLst>
@@ -16217,14 +16724,14 @@
       </p:sp>
       <p:sp>
         <p:nvSpPr>
-          <p:cNvPr id="29" name="Text 27"/>
-          <p:cNvSpPr/>
-          <p:nvPr/>
-        </p:nvSpPr>
-        <p:spPr>
-          <a:xfrm>
-            <a:off x="4370832" y="3364992"/>
-            <a:ext cx="1645920" cy="475488"/>
+          <p:cNvPr id="32" name="Text 30"/>
+          <p:cNvSpPr/>
+          <p:nvPr/>
+        </p:nvSpPr>
+        <p:spPr>
+          <a:xfrm>
+            <a:off x="3602736" y="3364992"/>
+            <a:ext cx="1554480" cy="475488"/>
           </a:xfrm>
           <a:prstGeom prst="rect">
             <a:avLst/>
@@ -16256,14 +16763,14 @@
       </p:sp>
       <p:sp>
         <p:nvSpPr>
-          <p:cNvPr id="30" name="Text 28"/>
-          <p:cNvSpPr/>
-          <p:nvPr/>
-        </p:nvSpPr>
-        <p:spPr>
-          <a:xfrm>
-            <a:off x="6016752" y="3364992"/>
-            <a:ext cx="411480" cy="475488"/>
+          <p:cNvPr id="33" name="Text 31"/>
+          <p:cNvSpPr/>
+          <p:nvPr/>
+        </p:nvSpPr>
+        <p:spPr>
+          <a:xfrm>
+            <a:off x="5157216" y="3364992"/>
+            <a:ext cx="73152" cy="475488"/>
           </a:xfrm>
           <a:prstGeom prst="rect">
             <a:avLst/>
@@ -16295,14 +16802,14 @@
       </p:sp>
       <p:sp>
         <p:nvSpPr>
-          <p:cNvPr id="31" name="Shape 29"/>
-          <p:cNvSpPr/>
-          <p:nvPr/>
-        </p:nvSpPr>
-        <p:spPr>
-          <a:xfrm>
-            <a:off x="6428232" y="3364992"/>
-            <a:ext cx="1645920" cy="475488"/>
+          <p:cNvPr id="34" name="Shape 32"/>
+          <p:cNvSpPr/>
+          <p:nvPr/>
+        </p:nvSpPr>
+        <p:spPr>
+          <a:xfrm>
+            <a:off x="5230368" y="3364992"/>
+            <a:ext cx="1554480" cy="475488"/>
           </a:xfrm>
           <a:prstGeom prst="rect">
             <a:avLst>
@@ -16322,14 +16829,14 @@
       </p:sp>
       <p:sp>
         <p:nvSpPr>
-          <p:cNvPr id="32" name="Text 30"/>
-          <p:cNvSpPr/>
-          <p:nvPr/>
-        </p:nvSpPr>
-        <p:spPr>
-          <a:xfrm>
-            <a:off x="6428232" y="3364992"/>
-            <a:ext cx="1645920" cy="475488"/>
+          <p:cNvPr id="35" name="Text 33"/>
+          <p:cNvSpPr/>
+          <p:nvPr/>
+        </p:nvSpPr>
+        <p:spPr>
+          <a:xfrm>
+            <a:off x="5230368" y="3364992"/>
+            <a:ext cx="1554480" cy="475488"/>
           </a:xfrm>
           <a:prstGeom prst="rect">
             <a:avLst/>
@@ -16353,7 +16860,7 @@
                 <a:ea typeface="Trebuchet MS" pitchFamily="34" charset="-122"/>
                 <a:cs typeface="Trebuchet MS" pitchFamily="34" charset="-120"/>
               </a:rPr>
-              <a:t>vent</a:t>
+              <a:t>stan</a:t>
             </a:r>
             <a:endParaRPr lang="en-US" sz="1400" dirty="0"/>
           </a:p>
@@ -16361,7 +16868,112 @@
       </p:sp>
       <p:sp>
         <p:nvSpPr>
-          <p:cNvPr id="33" name="Shape 31"/>
+          <p:cNvPr id="36" name="Text 34"/>
+          <p:cNvSpPr/>
+          <p:nvPr/>
+        </p:nvSpPr>
+        <p:spPr>
+          <a:xfrm>
+            <a:off x="6784848" y="3364992"/>
+            <a:ext cx="73152" cy="475488"/>
+          </a:xfrm>
+          <a:prstGeom prst="rect">
+            <a:avLst/>
+          </a:prstGeom>
+          <a:noFill/>
+          <a:ln/>
+        </p:spPr>
+        <p:txBody>
+          <a:bodyPr wrap="square" lIns="0" tIns="0" rIns="0" bIns="0" rtlCol="0" anchor="ctr"/>
+          <a:lstStyle/>
+          <a:p>
+            <a:pPr algn="ctr" indent="0" marL="0">
+              <a:buNone/>
+            </a:pPr>
+            <a:r>
+              <a:rPr lang="en-US" sz="1600" b="1" dirty="0">
+                <a:solidFill>
+                  <a:srgbClr val="0D9488"/>
+                </a:solidFill>
+                <a:latin typeface="Trebuchet MS" pitchFamily="34" charset="0"/>
+                <a:ea typeface="Trebuchet MS" pitchFamily="34" charset="-122"/>
+                <a:cs typeface="Trebuchet MS" pitchFamily="34" charset="-120"/>
+              </a:rPr>
+              <a:t>·</a:t>
+            </a:r>
+            <a:endParaRPr lang="en-US" sz="1600" dirty="0"/>
+          </a:p>
+        </p:txBody>
+      </p:sp>
+      <p:sp>
+        <p:nvSpPr>
+          <p:cNvPr id="37" name="Shape 35"/>
+          <p:cNvSpPr/>
+          <p:nvPr/>
+        </p:nvSpPr>
+        <p:spPr>
+          <a:xfrm>
+            <a:off x="6858000" y="3364992"/>
+            <a:ext cx="1554480" cy="475488"/>
+          </a:xfrm>
+          <a:prstGeom prst="rect">
+            <a:avLst>
+              <a:gd name="adj" fmla="val 9615"/>
+            </a:avLst>
+          </a:prstGeom>
+          <a:solidFill>
+            <a:srgbClr val="FFFFFF"/>
+          </a:solidFill>
+          <a:ln w="12700">
+            <a:solidFill>
+              <a:srgbClr val="0D9488"/>
+            </a:solidFill>
+            <a:prstDash val="solid"/>
+          </a:ln>
+        </p:spPr>
+      </p:sp>
+      <p:sp>
+        <p:nvSpPr>
+          <p:cNvPr id="38" name="Text 36"/>
+          <p:cNvSpPr/>
+          <p:nvPr/>
+        </p:nvSpPr>
+        <p:spPr>
+          <a:xfrm>
+            <a:off x="6858000" y="3364992"/>
+            <a:ext cx="1554480" cy="475488"/>
+          </a:xfrm>
+          <a:prstGeom prst="rect">
+            <a:avLst/>
+          </a:prstGeom>
+          <a:noFill/>
+          <a:ln/>
+        </p:spPr>
+        <p:txBody>
+          <a:bodyPr wrap="square" lIns="0" tIns="0" rIns="0" bIns="0" rtlCol="0" anchor="ctr"/>
+          <a:lstStyle/>
+          <a:p>
+            <a:pPr algn="ctr" indent="0" marL="0">
+              <a:buNone/>
+            </a:pPr>
+            <a:r>
+              <a:rPr lang="en-US" sz="1400" b="1" dirty="0">
+                <a:solidFill>
+                  <a:srgbClr val="0D9488"/>
+                </a:solidFill>
+                <a:latin typeface="Trebuchet MS" pitchFamily="34" charset="0"/>
+                <a:ea typeface="Trebuchet MS" pitchFamily="34" charset="-122"/>
+                <a:cs typeface="Trebuchet MS" pitchFamily="34" charset="-120"/>
+              </a:rPr>
+              <a:t>ces</a:t>
+            </a:r>
+            <a:endParaRPr lang="en-US" sz="1400" dirty="0"/>
+          </a:p>
+        </p:txBody>
+      </p:sp>
+      <p:sp>
+        <p:nvSpPr>
+          <p:cNvPr id="39" name="Shape 37"/>
           <p:cNvSpPr/>
           <p:nvPr/>
         </p:nvSpPr>
@@ -16388,7 +17000,7 @@
       </p:sp>
       <p:sp>
         <p:nvSpPr>
-          <p:cNvPr id="34" name="Text 32"/>
+          <p:cNvPr id="40" name="Text 38"/>
           <p:cNvSpPr/>
           <p:nvPr/>
         </p:nvSpPr>
@@ -16427,7 +17039,7 @@
       </p:sp>
       <p:sp>
         <p:nvSpPr>
-          <p:cNvPr id="35" name="Shape 33"/>
+          <p:cNvPr id="41" name="Shape 39"/>
           <p:cNvSpPr/>
           <p:nvPr/>
         </p:nvSpPr>
@@ -16454,7 +17066,7 @@
       </p:sp>
       <p:sp>
         <p:nvSpPr>
-          <p:cNvPr id="36" name="Shape 34"/>
+          <p:cNvPr id="42" name="Shape 40"/>
           <p:cNvSpPr/>
           <p:nvPr/>
         </p:nvSpPr>
@@ -16481,7 +17093,7 @@
       </p:sp>
       <p:sp>
         <p:nvSpPr>
-          <p:cNvPr id="37" name="Text 35"/>
+          <p:cNvPr id="43" name="Text 41"/>
           <p:cNvSpPr/>
           <p:nvPr/>
         </p:nvSpPr>
@@ -16520,7 +17132,7 @@
       </p:sp>
       <p:sp>
         <p:nvSpPr>
-          <p:cNvPr id="38" name="Text 36"/>
+          <p:cNvPr id="44" name="Text 42"/>
           <p:cNvSpPr/>
           <p:nvPr/>
         </p:nvSpPr>
@@ -16559,7 +17171,7 @@
       </p:sp>
       <p:sp>
         <p:nvSpPr>
-          <p:cNvPr id="39" name="Shape 37"/>
+          <p:cNvPr id="45" name="Shape 43"/>
           <p:cNvSpPr/>
           <p:nvPr/>
         </p:nvSpPr>
@@ -16586,7 +17198,7 @@
       </p:sp>
       <p:sp>
         <p:nvSpPr>
-          <p:cNvPr id="40" name="Text 38"/>
+          <p:cNvPr id="46" name="Text 44"/>
           <p:cNvSpPr/>
           <p:nvPr/>
         </p:nvSpPr>
@@ -16625,7 +17237,7 @@
       </p:sp>
       <p:sp>
         <p:nvSpPr>
-          <p:cNvPr id="41" name="Shape 39"/>
+          <p:cNvPr id="47" name="Shape 45"/>
           <p:cNvSpPr/>
           <p:nvPr/>
         </p:nvSpPr>
@@ -16652,7 +17264,7 @@
       </p:sp>
       <p:sp>
         <p:nvSpPr>
-          <p:cNvPr id="42" name="Text 40"/>
+          <p:cNvPr id="48" name="Text 46"/>
           <p:cNvSpPr/>
           <p:nvPr/>
         </p:nvSpPr>
@@ -16691,46 +17303,7 @@
       </p:sp>
       <p:sp>
         <p:nvSpPr>
-          <p:cNvPr id="43" name="Text 41"/>
-          <p:cNvSpPr/>
-          <p:nvPr/>
-        </p:nvSpPr>
-        <p:spPr>
-          <a:xfrm>
-            <a:off x="3403397" y="4572000"/>
-            <a:ext cx="676656" cy="219456"/>
-          </a:xfrm>
-          <a:prstGeom prst="rect">
-            <a:avLst/>
-          </a:prstGeom>
-          <a:noFill/>
-          <a:ln/>
-        </p:spPr>
-        <p:txBody>
-          <a:bodyPr wrap="square" lIns="0" tIns="0" rIns="0" bIns="0" rtlCol="0" anchor="t"/>
-          <a:lstStyle/>
-          <a:p>
-            <a:pPr algn="ctr" indent="0" marL="0">
-              <a:buNone/>
-            </a:pPr>
-            <a:r>
-              <a:rPr lang="en-US" sz="750" i="1" dirty="0">
-                <a:solidFill>
-                  <a:srgbClr val="94A3B8"/>
-                </a:solidFill>
-                <a:latin typeface="Calibri" pitchFamily="34" charset="0"/>
-                <a:ea typeface="Calibri" pitchFamily="34" charset="-122"/>
-                <a:cs typeface="Calibri" pitchFamily="34" charset="-120"/>
-              </a:rPr>
-              <a:t>/k/</a:t>
-            </a:r>
-            <a:endParaRPr lang="en-US" sz="750" dirty="0"/>
-          </a:p>
-        </p:txBody>
-      </p:sp>
-      <p:sp>
-        <p:nvSpPr>
-          <p:cNvPr id="44" name="Shape 42"/>
+          <p:cNvPr id="49" name="Shape 47"/>
           <p:cNvSpPr/>
           <p:nvPr/>
         </p:nvSpPr>
@@ -16757,7 +17330,7 @@
       </p:sp>
       <p:sp>
         <p:nvSpPr>
-          <p:cNvPr id="45" name="Text 43"/>
+          <p:cNvPr id="50" name="Text 48"/>
           <p:cNvSpPr/>
           <p:nvPr/>
         </p:nvSpPr>
@@ -16788,7 +17361,7 @@
                 <a:ea typeface="Trebuchet MS" pitchFamily="34" charset="-122"/>
                 <a:cs typeface="Trebuchet MS" pitchFamily="34" charset="-120"/>
               </a:rPr>
-              <a:t>u</a:t>
+              <a:t>um</a:t>
             </a:r>
             <a:endParaRPr lang="en-US" sz="900" dirty="0"/>
           </a:p>
@@ -16796,7 +17369,7 @@
       </p:sp>
       <p:sp>
         <p:nvSpPr>
-          <p:cNvPr id="46" name="Shape 44"/>
+          <p:cNvPr id="51" name="Shape 49"/>
           <p:cNvSpPr/>
           <p:nvPr/>
         </p:nvSpPr>
@@ -16823,7 +17396,7 @@
       </p:sp>
       <p:sp>
         <p:nvSpPr>
-          <p:cNvPr id="47" name="Text 45"/>
+          <p:cNvPr id="52" name="Text 50"/>
           <p:cNvSpPr/>
           <p:nvPr/>
         </p:nvSpPr>
@@ -16854,7 +17427,7 @@
                 <a:ea typeface="Trebuchet MS" pitchFamily="34" charset="-122"/>
                 <a:cs typeface="Trebuchet MS" pitchFamily="34" charset="-120"/>
               </a:rPr>
-              <a:t>m</a:t>
+              <a:t>s</a:t>
             </a:r>
             <a:endParaRPr lang="en-US" sz="900" dirty="0"/>
           </a:p>
@@ -16862,7 +17435,7 @@
       </p:sp>
       <p:sp>
         <p:nvSpPr>
-          <p:cNvPr id="48" name="Shape 46"/>
+          <p:cNvPr id="53" name="Shape 51"/>
           <p:cNvSpPr/>
           <p:nvPr/>
         </p:nvSpPr>
@@ -16889,7 +17462,7 @@
       </p:sp>
       <p:sp>
         <p:nvSpPr>
-          <p:cNvPr id="49" name="Text 47"/>
+          <p:cNvPr id="54" name="Text 52"/>
           <p:cNvSpPr/>
           <p:nvPr/>
         </p:nvSpPr>
@@ -16920,7 +17493,7 @@
                 <a:ea typeface="Trebuchet MS" pitchFamily="34" charset="-122"/>
                 <a:cs typeface="Trebuchet MS" pitchFamily="34" charset="-120"/>
               </a:rPr>
-              <a:t>v</a:t>
+              <a:t>t</a:t>
             </a:r>
             <a:endParaRPr lang="en-US" sz="900" dirty="0"/>
           </a:p>
@@ -16928,7 +17501,7 @@
       </p:sp>
       <p:sp>
         <p:nvSpPr>
-          <p:cNvPr id="50" name="Shape 48"/>
+          <p:cNvPr id="55" name="Shape 53"/>
           <p:cNvSpPr/>
           <p:nvPr/>
         </p:nvSpPr>
@@ -16955,7 +17528,7 @@
       </p:sp>
       <p:sp>
         <p:nvSpPr>
-          <p:cNvPr id="51" name="Text 49"/>
+          <p:cNvPr id="56" name="Text 54"/>
           <p:cNvSpPr/>
           <p:nvPr/>
         </p:nvSpPr>
@@ -16986,7 +17559,7 @@
                 <a:ea typeface="Trebuchet MS" pitchFamily="34" charset="-122"/>
                 <a:cs typeface="Trebuchet MS" pitchFamily="34" charset="-120"/>
               </a:rPr>
-              <a:t>e</a:t>
+              <a:t>an</a:t>
             </a:r>
             <a:endParaRPr lang="en-US" sz="900" dirty="0"/>
           </a:p>
@@ -16994,7 +17567,7 @@
       </p:sp>
       <p:sp>
         <p:nvSpPr>
-          <p:cNvPr id="52" name="Shape 50"/>
+          <p:cNvPr id="57" name="Shape 55"/>
           <p:cNvSpPr/>
           <p:nvPr/>
         </p:nvSpPr>
@@ -17021,7 +17594,7 @@
       </p:sp>
       <p:sp>
         <p:nvSpPr>
-          <p:cNvPr id="53" name="Text 51"/>
+          <p:cNvPr id="58" name="Text 56"/>
           <p:cNvSpPr/>
           <p:nvPr/>
         </p:nvSpPr>
@@ -17052,7 +17625,7 @@
                 <a:ea typeface="Trebuchet MS" pitchFamily="34" charset="-122"/>
                 <a:cs typeface="Trebuchet MS" pitchFamily="34" charset="-120"/>
               </a:rPr>
-              <a:t>n</a:t>
+              <a:t>c</a:t>
             </a:r>
             <a:endParaRPr lang="en-US" sz="900" dirty="0"/>
           </a:p>
@@ -17060,7 +17633,7 @@
       </p:sp>
       <p:sp>
         <p:nvSpPr>
-          <p:cNvPr id="54" name="Shape 52"/>
+          <p:cNvPr id="59" name="Shape 57"/>
           <p:cNvSpPr/>
           <p:nvPr/>
         </p:nvSpPr>
@@ -17087,7 +17660,7 @@
       </p:sp>
       <p:sp>
         <p:nvSpPr>
-          <p:cNvPr id="55" name="Text 53"/>
+          <p:cNvPr id="60" name="Text 58"/>
           <p:cNvSpPr/>
           <p:nvPr/>
         </p:nvSpPr>
@@ -17118,7 +17691,7 @@
                 <a:ea typeface="Trebuchet MS" pitchFamily="34" charset="-122"/>
                 <a:cs typeface="Trebuchet MS" pitchFamily="34" charset="-120"/>
               </a:rPr>
-              <a:t>t</a:t>
+              <a:t>es</a:t>
             </a:r>
             <a:endParaRPr lang="en-US" sz="900" dirty="0"/>
           </a:p>
@@ -18444,7 +19017,7 @@
                 <a:ea typeface="Calibri" pitchFamily="34" charset="-122"/>
                 <a:cs typeface="Calibri" pitchFamily="34" charset="-120"/>
               </a:rPr>
-              <a:t>During their attempt to </a:t>
+              <a:t>The </a:t>
             </a:r>
             <a:pPr algn="l" indent="0" marL="0">
               <a:buNone/>
@@ -18461,7 +19034,7 @@
                 <a:ea typeface="Calibri" pitchFamily="34" charset="-122"/>
                 <a:cs typeface="Calibri" pitchFamily="34" charset="-120"/>
               </a:rPr>
-              <a:t>circumnavigate</a:t>
+              <a:t>circumference</a:t>
             </a:r>
             <a:pPr algn="l" indent="0" marL="0">
               <a:buNone/>
@@ -18475,7 +19048,7 @@
                 <a:ea typeface="Calibri" pitchFamily="34" charset="-122"/>
                 <a:cs typeface="Calibri" pitchFamily="34" charset="-120"/>
               </a:rPr>
-              <a:t> the island, the crew had to be </a:t>
+              <a:t> of the track was measured carefully, and the </a:t>
             </a:r>
             <a:pPr algn="l" indent="0" marL="0">
               <a:buNone/>
@@ -18506,7 +19079,7 @@
                 <a:ea typeface="Calibri" pitchFamily="34" charset="-122"/>
                 <a:cs typeface="Calibri" pitchFamily="34" charset="-120"/>
               </a:rPr>
-              <a:t> about the weather, as the </a:t>
+              <a:t> judges used </a:t>
             </a:r>
             <a:pPr algn="l" indent="0" marL="0">
               <a:buNone/>
@@ -18523,7 +19096,7 @@
                 <a:ea typeface="Calibri" pitchFamily="34" charset="-122"/>
                 <a:cs typeface="Calibri" pitchFamily="34" charset="-120"/>
               </a:rPr>
-              <a:t>circumstances</a:t>
+              <a:t>circumlocution</a:t>
             </a:r>
             <a:pPr algn="l" indent="0" marL="0">
               <a:buNone/>
@@ -18537,7 +19110,7 @@
                 <a:ea typeface="Calibri" pitchFamily="34" charset="-122"/>
                 <a:cs typeface="Calibri" pitchFamily="34" charset="-120"/>
               </a:rPr>
-              <a:t> made sailing very dangerous.</a:t>
+              <a:t> to avoid announcing the winner too soon.</a:t>
             </a:r>
             <a:endParaRPr lang="en-US" sz="1800" dirty="0"/>
           </a:p>
@@ -18692,7 +19265,7 @@
                 <a:ea typeface="Trebuchet MS" pitchFamily="34" charset="-122"/>
                 <a:cs typeface="Trebuchet MS" pitchFamily="34" charset="-120"/>
               </a:rPr>
-              <a:t>circumnavigate</a:t>
+              <a:t>circumference</a:t>
             </a:r>
             <a:endParaRPr lang="en-US" sz="1400" dirty="0"/>
           </a:p>
@@ -18948,7 +19521,7 @@
                 <a:ea typeface="Trebuchet MS" pitchFamily="34" charset="-122"/>
                 <a:cs typeface="Trebuchet MS" pitchFamily="34" charset="-120"/>
               </a:rPr>
-              <a:t>circumstances</a:t>
+              <a:t>circumlocution</a:t>
             </a:r>
             <a:endParaRPr lang="en-US" sz="1400" dirty="0"/>
           </a:p>
@@ -19418,7 +19991,7 @@
                 <a:ea typeface="Trebuchet MS" pitchFamily="34" charset="-122"/>
                 <a:cs typeface="Trebuchet MS" pitchFamily="34" charset="-120"/>
               </a:rPr>
-              <a:t>circumnavigate</a:t>
+              <a:t>circumference</a:t>
             </a:r>
             <a:endParaRPr lang="en-US" sz="2800" dirty="0"/>
           </a:p>
@@ -20245,7 +20818,7 @@
                 <a:ea typeface="Trebuchet MS" pitchFamily="34" charset="-122"/>
                 <a:cs typeface="Trebuchet MS" pitchFamily="34" charset="-120"/>
               </a:rPr>
-              <a:t>circumnavigate</a:t>
+              <a:t>circumference</a:t>
             </a:r>
             <a:endParaRPr lang="en-US" sz="2800" dirty="0"/>
           </a:p>
@@ -20496,7 +21069,7 @@
                 <a:ea typeface="Trebuchet MS" pitchFamily="34" charset="-122"/>
                 <a:cs typeface="Trebuchet MS" pitchFamily="34" charset="-120"/>
               </a:rPr>
-              <a:t>navig</a:t>
+              <a:t>fer</a:t>
             </a:r>
             <a:endParaRPr lang="en-US" sz="1300" dirty="0"/>
           </a:p>
@@ -20535,7 +21108,7 @@
                 <a:ea typeface="Calibri" pitchFamily="34" charset="-122"/>
                 <a:cs typeface="Calibri" pitchFamily="34" charset="-120"/>
               </a:rPr>
-              <a:t>sail, steer</a:t>
+              <a:t>to carry or bear</a:t>
             </a:r>
             <a:endParaRPr lang="en-US" sz="850" dirty="0"/>
           </a:p>
@@ -20608,7 +21181,7 @@
                 <a:ea typeface="Trebuchet MS" pitchFamily="34" charset="-122"/>
                 <a:cs typeface="Trebuchet MS" pitchFamily="34" charset="-120"/>
               </a:rPr>
-              <a:t>ate</a:t>
+              <a:t>ence</a:t>
             </a:r>
             <a:endParaRPr lang="en-US" sz="1300" dirty="0"/>
           </a:p>
@@ -20647,7 +21220,7 @@
                 <a:ea typeface="Calibri" pitchFamily="34" charset="-122"/>
                 <a:cs typeface="Calibri" pitchFamily="34" charset="-120"/>
               </a:rPr>
-              <a:t>to make or do</a:t>
+              <a:t>state or quality of</a:t>
             </a:r>
             <a:endParaRPr lang="en-US" sz="850" dirty="0"/>
           </a:p>
@@ -21342,7 +21915,7 @@
                 <a:ea typeface="Trebuchet MS" pitchFamily="34" charset="-122"/>
                 <a:cs typeface="Trebuchet MS" pitchFamily="34" charset="-120"/>
               </a:rPr>
-              <a:t>circumnavigate</a:t>
+              <a:t>circumference</a:t>
             </a:r>
             <a:endParaRPr lang="en-US" sz="2800" dirty="0"/>
           </a:p>
@@ -21593,7 +22166,7 @@
                 <a:ea typeface="Trebuchet MS" pitchFamily="34" charset="-122"/>
                 <a:cs typeface="Trebuchet MS" pitchFamily="34" charset="-120"/>
               </a:rPr>
-              <a:t>navig</a:t>
+              <a:t>fer</a:t>
             </a:r>
             <a:endParaRPr lang="en-US" sz="1300" dirty="0"/>
           </a:p>
@@ -21632,7 +22205,7 @@
                 <a:ea typeface="Calibri" pitchFamily="34" charset="-122"/>
                 <a:cs typeface="Calibri" pitchFamily="34" charset="-120"/>
               </a:rPr>
-              <a:t>sail, steer</a:t>
+              <a:t>to carry or bear</a:t>
             </a:r>
             <a:endParaRPr lang="en-US" sz="850" dirty="0"/>
           </a:p>
@@ -21705,7 +22278,7 @@
                 <a:ea typeface="Trebuchet MS" pitchFamily="34" charset="-122"/>
                 <a:cs typeface="Trebuchet MS" pitchFamily="34" charset="-120"/>
               </a:rPr>
-              <a:t>ate</a:t>
+              <a:t>ence</a:t>
             </a:r>
             <a:endParaRPr lang="en-US" sz="1300" dirty="0"/>
           </a:p>
@@ -21744,7 +22317,7 @@
                 <a:ea typeface="Calibri" pitchFamily="34" charset="-122"/>
                 <a:cs typeface="Calibri" pitchFamily="34" charset="-120"/>
               </a:rPr>
-              <a:t>to make or do</a:t>
+              <a:t>state or quality of</a:t>
             </a:r>
             <a:endParaRPr lang="en-US" sz="850" dirty="0"/>
           </a:p>
@@ -21851,8 +22424,8 @@
         </p:nvSpPr>
         <p:spPr>
           <a:xfrm>
-            <a:off x="1978152" y="3364992"/>
-            <a:ext cx="1225296" cy="475488"/>
+            <a:off x="1975104" y="3364992"/>
+            <a:ext cx="1554480" cy="475488"/>
           </a:xfrm>
           <a:prstGeom prst="rect">
             <a:avLst>
@@ -21878,8 +22451,8 @@
         </p:nvSpPr>
         <p:spPr>
           <a:xfrm>
-            <a:off x="1978152" y="3364992"/>
-            <a:ext cx="1225296" cy="475488"/>
+            <a:off x="1975104" y="3364992"/>
+            <a:ext cx="1554480" cy="475488"/>
           </a:xfrm>
           <a:prstGeom prst="rect">
             <a:avLst/>
@@ -21917,8 +22490,8 @@
         </p:nvSpPr>
         <p:spPr>
           <a:xfrm>
-            <a:off x="3203448" y="3364992"/>
-            <a:ext cx="76200" cy="475488"/>
+            <a:off x="3529584" y="3364992"/>
+            <a:ext cx="73152" cy="475488"/>
           </a:xfrm>
           <a:prstGeom prst="rect">
             <a:avLst/>
@@ -21956,8 +22529,8 @@
         </p:nvSpPr>
         <p:spPr>
           <a:xfrm>
-            <a:off x="3279648" y="3364992"/>
-            <a:ext cx="1225296" cy="475488"/>
+            <a:off x="3602736" y="3364992"/>
+            <a:ext cx="1554480" cy="475488"/>
           </a:xfrm>
           <a:prstGeom prst="rect">
             <a:avLst>
@@ -21983,8 +22556,8 @@
         </p:nvSpPr>
         <p:spPr>
           <a:xfrm>
-            <a:off x="3279648" y="3364992"/>
-            <a:ext cx="1225296" cy="475488"/>
+            <a:off x="3602736" y="3364992"/>
+            <a:ext cx="1554480" cy="475488"/>
           </a:xfrm>
           <a:prstGeom prst="rect">
             <a:avLst/>
@@ -22022,8 +22595,8 @@
         </p:nvSpPr>
         <p:spPr>
           <a:xfrm>
-            <a:off x="4504944" y="3364992"/>
-            <a:ext cx="76200" cy="475488"/>
+            <a:off x="5157216" y="3364992"/>
+            <a:ext cx="73152" cy="475488"/>
           </a:xfrm>
           <a:prstGeom prst="rect">
             <a:avLst/>
@@ -22061,8 +22634,8 @@
         </p:nvSpPr>
         <p:spPr>
           <a:xfrm>
-            <a:off x="4581144" y="3364992"/>
-            <a:ext cx="1225296" cy="475488"/>
+            <a:off x="5230368" y="3364992"/>
+            <a:ext cx="1554480" cy="475488"/>
           </a:xfrm>
           <a:prstGeom prst="rect">
             <a:avLst>
@@ -22088,8 +22661,8 @@
         </p:nvSpPr>
         <p:spPr>
           <a:xfrm>
-            <a:off x="4581144" y="3364992"/>
-            <a:ext cx="1225296" cy="475488"/>
+            <a:off x="5230368" y="3364992"/>
+            <a:ext cx="1554480" cy="475488"/>
           </a:xfrm>
           <a:prstGeom prst="rect">
             <a:avLst/>
@@ -22113,7 +22686,7 @@
                 <a:ea typeface="Trebuchet MS" pitchFamily="34" charset="-122"/>
                 <a:cs typeface="Trebuchet MS" pitchFamily="34" charset="-120"/>
               </a:rPr>
-              <a:t>nav</a:t>
+              <a:t>fer</a:t>
             </a:r>
             <a:endParaRPr lang="en-US" sz="1400" dirty="0"/>
           </a:p>
@@ -22127,8 +22700,8 @@
         </p:nvSpPr>
         <p:spPr>
           <a:xfrm>
-            <a:off x="5806440" y="3364992"/>
-            <a:ext cx="76200" cy="475488"/>
+            <a:off x="6784848" y="3364992"/>
+            <a:ext cx="73152" cy="475488"/>
           </a:xfrm>
           <a:prstGeom prst="rect">
             <a:avLst/>
@@ -22166,8 +22739,8 @@
         </p:nvSpPr>
         <p:spPr>
           <a:xfrm>
-            <a:off x="5882640" y="3364992"/>
-            <a:ext cx="1225296" cy="475488"/>
+            <a:off x="6858000" y="3364992"/>
+            <a:ext cx="1554480" cy="475488"/>
           </a:xfrm>
           <a:prstGeom prst="rect">
             <a:avLst>
@@ -22193,8 +22766,8 @@
         </p:nvSpPr>
         <p:spPr>
           <a:xfrm>
-            <a:off x="5882640" y="3364992"/>
-            <a:ext cx="1225296" cy="475488"/>
+            <a:off x="6858000" y="3364992"/>
+            <a:ext cx="1554480" cy="475488"/>
           </a:xfrm>
           <a:prstGeom prst="rect">
             <a:avLst/>
@@ -22218,7 +22791,7 @@
                 <a:ea typeface="Trebuchet MS" pitchFamily="34" charset="-122"/>
                 <a:cs typeface="Trebuchet MS" pitchFamily="34" charset="-120"/>
               </a:rPr>
-              <a:t>i</a:t>
+              <a:t>ence</a:t>
             </a:r>
             <a:endParaRPr lang="en-US" sz="1400" dirty="0"/>
           </a:p>
@@ -22226,119 +22799,80 @@
       </p:sp>
       <p:sp>
         <p:nvSpPr>
-          <p:cNvPr id="39" name="Text 37"/>
-          <p:cNvSpPr/>
-          <p:nvPr/>
-        </p:nvSpPr>
-        <p:spPr>
-          <a:xfrm>
-            <a:off x="7107936" y="3364992"/>
-            <a:ext cx="76200" cy="475488"/>
-          </a:xfrm>
-          <a:prstGeom prst="rect">
-            <a:avLst/>
-          </a:prstGeom>
-          <a:noFill/>
-          <a:ln/>
-        </p:spPr>
-        <p:txBody>
-          <a:bodyPr wrap="square" lIns="0" tIns="0" rIns="0" bIns="0" rtlCol="0" anchor="ctr"/>
-          <a:lstStyle/>
-          <a:p>
-            <a:pPr algn="ctr" indent="0" marL="0">
-              <a:buNone/>
-            </a:pPr>
-            <a:r>
-              <a:rPr lang="en-US" sz="1600" b="1" dirty="0">
-                <a:solidFill>
-                  <a:srgbClr val="0D9488"/>
+          <p:cNvPr id="39" name="Shape 37"/>
+          <p:cNvSpPr/>
+          <p:nvPr/>
+        </p:nvSpPr>
+        <p:spPr>
+          <a:xfrm>
+            <a:off x="365760" y="4096512"/>
+            <a:ext cx="1371600" cy="804672"/>
+          </a:xfrm>
+          <a:prstGeom prst="rect">
+            <a:avLst>
+              <a:gd name="adj" fmla="val 6818"/>
+            </a:avLst>
+          </a:prstGeom>
+          <a:solidFill>
+            <a:srgbClr val="E2E8F0"/>
+          </a:solidFill>
+          <a:ln w="12700">
+            <a:solidFill>
+              <a:srgbClr val="E2E8F0"/>
+            </a:solidFill>
+            <a:prstDash val="solid"/>
+          </a:ln>
+        </p:spPr>
+      </p:sp>
+      <p:sp>
+        <p:nvSpPr>
+          <p:cNvPr id="40" name="Text 38"/>
+          <p:cNvSpPr/>
+          <p:nvPr/>
+        </p:nvSpPr>
+        <p:spPr>
+          <a:xfrm>
+            <a:off x="365760" y="4096512"/>
+            <a:ext cx="1371600" cy="804672"/>
+          </a:xfrm>
+          <a:prstGeom prst="rect">
+            <a:avLst/>
+          </a:prstGeom>
+          <a:noFill/>
+          <a:ln/>
+        </p:spPr>
+        <p:txBody>
+          <a:bodyPr wrap="square" lIns="0" tIns="0" rIns="0" bIns="0" rtlCol="0" anchor="ctr"/>
+          <a:lstStyle/>
+          <a:p>
+            <a:pPr algn="ctr" indent="0" marL="0">
+              <a:buNone/>
+            </a:pPr>
+            <a:r>
+              <a:rPr lang="en-US" sz="1100" b="1" dirty="0">
+                <a:solidFill>
+                  <a:srgbClr val="475569"/>
                 </a:solidFill>
                 <a:latin typeface="Trebuchet MS" pitchFamily="34" charset="0"/>
                 <a:ea typeface="Trebuchet MS" pitchFamily="34" charset="-122"/>
                 <a:cs typeface="Trebuchet MS" pitchFamily="34" charset="-120"/>
               </a:rPr>
-              <a:t>·</a:t>
-            </a:r>
-            <a:endParaRPr lang="en-US" sz="1600" dirty="0"/>
-          </a:p>
-        </p:txBody>
-      </p:sp>
-      <p:sp>
-        <p:nvSpPr>
-          <p:cNvPr id="40" name="Shape 38"/>
-          <p:cNvSpPr/>
-          <p:nvPr/>
-        </p:nvSpPr>
-        <p:spPr>
-          <a:xfrm>
-            <a:off x="7184136" y="3364992"/>
-            <a:ext cx="1225296" cy="475488"/>
-          </a:xfrm>
-          <a:prstGeom prst="rect">
-            <a:avLst>
-              <a:gd name="adj" fmla="val 9615"/>
-            </a:avLst>
-          </a:prstGeom>
-          <a:solidFill>
-            <a:srgbClr val="FFFFFF"/>
-          </a:solidFill>
-          <a:ln w="12700">
-            <a:solidFill>
-              <a:srgbClr val="0D9488"/>
-            </a:solidFill>
-            <a:prstDash val="solid"/>
-          </a:ln>
-        </p:spPr>
-      </p:sp>
-      <p:sp>
-        <p:nvSpPr>
-          <p:cNvPr id="41" name="Text 39"/>
-          <p:cNvSpPr/>
-          <p:nvPr/>
-        </p:nvSpPr>
-        <p:spPr>
-          <a:xfrm>
-            <a:off x="7184136" y="3364992"/>
-            <a:ext cx="1225296" cy="475488"/>
-          </a:xfrm>
-          <a:prstGeom prst="rect">
-            <a:avLst/>
-          </a:prstGeom>
-          <a:noFill/>
-          <a:ln/>
-        </p:spPr>
-        <p:txBody>
-          <a:bodyPr wrap="square" lIns="0" tIns="0" rIns="0" bIns="0" rtlCol="0" anchor="ctr"/>
-          <a:lstStyle/>
-          <a:p>
-            <a:pPr algn="ctr" indent="0" marL="0">
-              <a:buNone/>
-            </a:pPr>
-            <a:r>
-              <a:rPr lang="en-US" sz="1400" b="1" dirty="0">
-                <a:solidFill>
-                  <a:srgbClr val="0D9488"/>
-                </a:solidFill>
-                <a:latin typeface="Trebuchet MS" pitchFamily="34" charset="0"/>
-                <a:ea typeface="Trebuchet MS" pitchFamily="34" charset="-122"/>
-                <a:cs typeface="Trebuchet MS" pitchFamily="34" charset="-120"/>
-              </a:rPr>
-              <a:t>gate</a:t>
-            </a:r>
-            <a:endParaRPr lang="en-US" sz="1400" dirty="0"/>
-          </a:p>
-        </p:txBody>
-      </p:sp>
-      <p:sp>
-        <p:nvSpPr>
-          <p:cNvPr id="42" name="Shape 40"/>
-          <p:cNvSpPr/>
-          <p:nvPr/>
-        </p:nvSpPr>
-        <p:spPr>
-          <a:xfrm>
-            <a:off x="365760" y="4096512"/>
-            <a:ext cx="1371600" cy="804672"/>
+              <a:t>Phonemes</a:t>
+            </a:r>
+            <a:endParaRPr lang="en-US" sz="1100" dirty="0"/>
+          </a:p>
+        </p:txBody>
+      </p:sp>
+      <p:sp>
+        <p:nvSpPr>
+          <p:cNvPr id="41" name="Shape 39"/>
+          <p:cNvSpPr/>
+          <p:nvPr/>
+        </p:nvSpPr>
+        <p:spPr>
+          <a:xfrm>
+            <a:off x="1874520" y="4096512"/>
+            <a:ext cx="6903720" cy="804672"/>
           </a:xfrm>
           <a:prstGeom prst="rect">
             <a:avLst>
@@ -22346,85 +22880,19 @@
             </a:avLst>
           </a:prstGeom>
           <a:solidFill>
-            <a:srgbClr val="E2E8F0"/>
+            <a:srgbClr val="F8FAFC"/>
           </a:solidFill>
           <a:ln w="12700">
             <a:solidFill>
               <a:srgbClr val="E2E8F0"/>
             </a:solidFill>
-            <a:prstDash val="solid"/>
-          </a:ln>
-        </p:spPr>
-      </p:sp>
-      <p:sp>
-        <p:nvSpPr>
-          <p:cNvPr id="43" name="Text 41"/>
-          <p:cNvSpPr/>
-          <p:nvPr/>
-        </p:nvSpPr>
-        <p:spPr>
-          <a:xfrm>
-            <a:off x="365760" y="4096512"/>
-            <a:ext cx="1371600" cy="804672"/>
-          </a:xfrm>
-          <a:prstGeom prst="rect">
-            <a:avLst/>
-          </a:prstGeom>
-          <a:noFill/>
-          <a:ln/>
-        </p:spPr>
-        <p:txBody>
-          <a:bodyPr wrap="square" lIns="0" tIns="0" rIns="0" bIns="0" rtlCol="0" anchor="ctr"/>
-          <a:lstStyle/>
-          <a:p>
-            <a:pPr algn="ctr" indent="0" marL="0">
-              <a:buNone/>
-            </a:pPr>
-            <a:r>
-              <a:rPr lang="en-US" sz="1100" b="1" dirty="0">
-                <a:solidFill>
-                  <a:srgbClr val="475569"/>
-                </a:solidFill>
-                <a:latin typeface="Trebuchet MS" pitchFamily="34" charset="0"/>
-                <a:ea typeface="Trebuchet MS" pitchFamily="34" charset="-122"/>
-                <a:cs typeface="Trebuchet MS" pitchFamily="34" charset="-120"/>
-              </a:rPr>
-              <a:t>Phonemes</a:t>
-            </a:r>
-            <a:endParaRPr lang="en-US" sz="1100" dirty="0"/>
-          </a:p>
-        </p:txBody>
-      </p:sp>
-      <p:sp>
-        <p:nvSpPr>
-          <p:cNvPr id="44" name="Shape 42"/>
-          <p:cNvSpPr/>
-          <p:nvPr/>
-        </p:nvSpPr>
-        <p:spPr>
-          <a:xfrm>
-            <a:off x="1874520" y="4096512"/>
-            <a:ext cx="6903720" cy="804672"/>
-          </a:xfrm>
-          <a:prstGeom prst="rect">
-            <a:avLst>
-              <a:gd name="adj" fmla="val 6818"/>
-            </a:avLst>
-          </a:prstGeom>
-          <a:solidFill>
-            <a:srgbClr val="F8FAFC"/>
-          </a:solidFill>
-          <a:ln w="12700">
-            <a:solidFill>
-              <a:srgbClr val="E2E8F0"/>
-            </a:solidFill>
             <a:prstDash val="dash"/>
           </a:ln>
         </p:spPr>
       </p:sp>
       <p:sp>
         <p:nvSpPr>
-          <p:cNvPr id="45" name="Text 43"/>
+          <p:cNvPr id="42" name="Text 40"/>
           <p:cNvSpPr/>
           <p:nvPr/>
         </p:nvSpPr>
@@ -22886,7 +23354,7 @@
                 <a:ea typeface="Trebuchet MS" pitchFamily="34" charset="-122"/>
                 <a:cs typeface="Trebuchet MS" pitchFamily="34" charset="-120"/>
               </a:rPr>
-              <a:t>circumnavigate</a:t>
+              <a:t>circumference</a:t>
             </a:r>
             <a:endParaRPr lang="en-US" sz="2800" dirty="0"/>
           </a:p>
@@ -23137,7 +23605,7 @@
                 <a:ea typeface="Trebuchet MS" pitchFamily="34" charset="-122"/>
                 <a:cs typeface="Trebuchet MS" pitchFamily="34" charset="-120"/>
               </a:rPr>
-              <a:t>navig</a:t>
+              <a:t>fer</a:t>
             </a:r>
             <a:endParaRPr lang="en-US" sz="1300" dirty="0"/>
           </a:p>
@@ -23176,7 +23644,7 @@
                 <a:ea typeface="Calibri" pitchFamily="34" charset="-122"/>
                 <a:cs typeface="Calibri" pitchFamily="34" charset="-120"/>
               </a:rPr>
-              <a:t>sail, steer</a:t>
+              <a:t>to carry or bear</a:t>
             </a:r>
             <a:endParaRPr lang="en-US" sz="850" dirty="0"/>
           </a:p>
@@ -23249,7 +23717,7 @@
                 <a:ea typeface="Trebuchet MS" pitchFamily="34" charset="-122"/>
                 <a:cs typeface="Trebuchet MS" pitchFamily="34" charset="-120"/>
               </a:rPr>
-              <a:t>ate</a:t>
+              <a:t>ence</a:t>
             </a:r>
             <a:endParaRPr lang="en-US" sz="1300" dirty="0"/>
           </a:p>
@@ -23288,7 +23756,7 @@
                 <a:ea typeface="Calibri" pitchFamily="34" charset="-122"/>
                 <a:cs typeface="Calibri" pitchFamily="34" charset="-120"/>
               </a:rPr>
-              <a:t>to make or do</a:t>
+              <a:t>state or quality of</a:t>
             </a:r>
             <a:endParaRPr lang="en-US" sz="850" dirty="0"/>
           </a:p>
@@ -23395,8 +23863,8 @@
         </p:nvSpPr>
         <p:spPr>
           <a:xfrm>
-            <a:off x="1978152" y="3364992"/>
-            <a:ext cx="1225296" cy="475488"/>
+            <a:off x="1975104" y="3364992"/>
+            <a:ext cx="1554480" cy="475488"/>
           </a:xfrm>
           <a:prstGeom prst="rect">
             <a:avLst>
@@ -23422,8 +23890,8 @@
         </p:nvSpPr>
         <p:spPr>
           <a:xfrm>
-            <a:off x="1978152" y="3364992"/>
-            <a:ext cx="1225296" cy="475488"/>
+            <a:off x="1975104" y="3364992"/>
+            <a:ext cx="1554480" cy="475488"/>
           </a:xfrm>
           <a:prstGeom prst="rect">
             <a:avLst/>
@@ -23461,8 +23929,8 @@
         </p:nvSpPr>
         <p:spPr>
           <a:xfrm>
-            <a:off x="3203448" y="3364992"/>
-            <a:ext cx="76200" cy="475488"/>
+            <a:off x="3529584" y="3364992"/>
+            <a:ext cx="73152" cy="475488"/>
           </a:xfrm>
           <a:prstGeom prst="rect">
             <a:avLst/>
@@ -23500,8 +23968,8 @@
         </p:nvSpPr>
         <p:spPr>
           <a:xfrm>
-            <a:off x="3279648" y="3364992"/>
-            <a:ext cx="1225296" cy="475488"/>
+            <a:off x="3602736" y="3364992"/>
+            <a:ext cx="1554480" cy="475488"/>
           </a:xfrm>
           <a:prstGeom prst="rect">
             <a:avLst>
@@ -23527,8 +23995,8 @@
         </p:nvSpPr>
         <p:spPr>
           <a:xfrm>
-            <a:off x="3279648" y="3364992"/>
-            <a:ext cx="1225296" cy="475488"/>
+            <a:off x="3602736" y="3364992"/>
+            <a:ext cx="1554480" cy="475488"/>
           </a:xfrm>
           <a:prstGeom prst="rect">
             <a:avLst/>
@@ -23566,8 +24034,8 @@
         </p:nvSpPr>
         <p:spPr>
           <a:xfrm>
-            <a:off x="4504944" y="3364992"/>
-            <a:ext cx="76200" cy="475488"/>
+            <a:off x="5157216" y="3364992"/>
+            <a:ext cx="73152" cy="475488"/>
           </a:xfrm>
           <a:prstGeom prst="rect">
             <a:avLst/>
@@ -23605,8 +24073,8 @@
         </p:nvSpPr>
         <p:spPr>
           <a:xfrm>
-            <a:off x="4581144" y="3364992"/>
-            <a:ext cx="1225296" cy="475488"/>
+            <a:off x="5230368" y="3364992"/>
+            <a:ext cx="1554480" cy="475488"/>
           </a:xfrm>
           <a:prstGeom prst="rect">
             <a:avLst>
@@ -23632,8 +24100,8 @@
         </p:nvSpPr>
         <p:spPr>
           <a:xfrm>
-            <a:off x="4581144" y="3364992"/>
-            <a:ext cx="1225296" cy="475488"/>
+            <a:off x="5230368" y="3364992"/>
+            <a:ext cx="1554480" cy="475488"/>
           </a:xfrm>
           <a:prstGeom prst="rect">
             <a:avLst/>
@@ -23657,7 +24125,7 @@
                 <a:ea typeface="Trebuchet MS" pitchFamily="34" charset="-122"/>
                 <a:cs typeface="Trebuchet MS" pitchFamily="34" charset="-120"/>
               </a:rPr>
-              <a:t>nav</a:t>
+              <a:t>fer</a:t>
             </a:r>
             <a:endParaRPr lang="en-US" sz="1400" dirty="0"/>
           </a:p>
@@ -23671,8 +24139,8 @@
         </p:nvSpPr>
         <p:spPr>
           <a:xfrm>
-            <a:off x="5806440" y="3364992"/>
-            <a:ext cx="76200" cy="475488"/>
+            <a:off x="6784848" y="3364992"/>
+            <a:ext cx="73152" cy="475488"/>
           </a:xfrm>
           <a:prstGeom prst="rect">
             <a:avLst/>
@@ -23710,8 +24178,8 @@
         </p:nvSpPr>
         <p:spPr>
           <a:xfrm>
-            <a:off x="5882640" y="3364992"/>
-            <a:ext cx="1225296" cy="475488"/>
+            <a:off x="6858000" y="3364992"/>
+            <a:ext cx="1554480" cy="475488"/>
           </a:xfrm>
           <a:prstGeom prst="rect">
             <a:avLst>
@@ -23737,8 +24205,8 @@
         </p:nvSpPr>
         <p:spPr>
           <a:xfrm>
-            <a:off x="5882640" y="3364992"/>
-            <a:ext cx="1225296" cy="475488"/>
+            <a:off x="6858000" y="3364992"/>
+            <a:ext cx="1554480" cy="475488"/>
           </a:xfrm>
           <a:prstGeom prst="rect">
             <a:avLst/>
@@ -23762,7 +24230,7 @@
                 <a:ea typeface="Trebuchet MS" pitchFamily="34" charset="-122"/>
                 <a:cs typeface="Trebuchet MS" pitchFamily="34" charset="-120"/>
               </a:rPr>
-              <a:t>i</a:t>
+              <a:t>ence</a:t>
             </a:r>
             <a:endParaRPr lang="en-US" sz="1400" dirty="0"/>
           </a:p>
@@ -23770,212 +24238,278 @@
       </p:sp>
       <p:sp>
         <p:nvSpPr>
-          <p:cNvPr id="39" name="Text 37"/>
-          <p:cNvSpPr/>
-          <p:nvPr/>
-        </p:nvSpPr>
-        <p:spPr>
-          <a:xfrm>
-            <a:off x="7107936" y="3364992"/>
-            <a:ext cx="76200" cy="475488"/>
-          </a:xfrm>
-          <a:prstGeom prst="rect">
-            <a:avLst/>
-          </a:prstGeom>
-          <a:noFill/>
-          <a:ln/>
-        </p:spPr>
-        <p:txBody>
-          <a:bodyPr wrap="square" lIns="0" tIns="0" rIns="0" bIns="0" rtlCol="0" anchor="ctr"/>
-          <a:lstStyle/>
-          <a:p>
-            <a:pPr algn="ctr" indent="0" marL="0">
-              <a:buNone/>
-            </a:pPr>
-            <a:r>
-              <a:rPr lang="en-US" sz="1600" b="1" dirty="0">
-                <a:solidFill>
-                  <a:srgbClr val="0D9488"/>
+          <p:cNvPr id="39" name="Shape 37"/>
+          <p:cNvSpPr/>
+          <p:nvPr/>
+        </p:nvSpPr>
+        <p:spPr>
+          <a:xfrm>
+            <a:off x="365760" y="4096512"/>
+            <a:ext cx="1371600" cy="804672"/>
+          </a:xfrm>
+          <a:prstGeom prst="rect">
+            <a:avLst>
+              <a:gd name="adj" fmla="val 6818"/>
+            </a:avLst>
+          </a:prstGeom>
+          <a:solidFill>
+            <a:srgbClr val="E2E8F0"/>
+          </a:solidFill>
+          <a:ln w="12700">
+            <a:solidFill>
+              <a:srgbClr val="E2E8F0"/>
+            </a:solidFill>
+            <a:prstDash val="solid"/>
+          </a:ln>
+        </p:spPr>
+      </p:sp>
+      <p:sp>
+        <p:nvSpPr>
+          <p:cNvPr id="40" name="Text 38"/>
+          <p:cNvSpPr/>
+          <p:nvPr/>
+        </p:nvSpPr>
+        <p:spPr>
+          <a:xfrm>
+            <a:off x="365760" y="4096512"/>
+            <a:ext cx="1371600" cy="804672"/>
+          </a:xfrm>
+          <a:prstGeom prst="rect">
+            <a:avLst/>
+          </a:prstGeom>
+          <a:noFill/>
+          <a:ln/>
+        </p:spPr>
+        <p:txBody>
+          <a:bodyPr wrap="square" lIns="0" tIns="0" rIns="0" bIns="0" rtlCol="0" anchor="ctr"/>
+          <a:lstStyle/>
+          <a:p>
+            <a:pPr algn="ctr" indent="0" marL="0">
+              <a:buNone/>
+            </a:pPr>
+            <a:r>
+              <a:rPr lang="en-US" sz="1100" b="1" dirty="0">
+                <a:solidFill>
+                  <a:srgbClr val="475569"/>
                 </a:solidFill>
                 <a:latin typeface="Trebuchet MS" pitchFamily="34" charset="0"/>
                 <a:ea typeface="Trebuchet MS" pitchFamily="34" charset="-122"/>
                 <a:cs typeface="Trebuchet MS" pitchFamily="34" charset="-120"/>
               </a:rPr>
-              <a:t>·</a:t>
-            </a:r>
-            <a:endParaRPr lang="en-US" sz="1600" dirty="0"/>
-          </a:p>
-        </p:txBody>
-      </p:sp>
-      <p:sp>
-        <p:nvSpPr>
-          <p:cNvPr id="40" name="Shape 38"/>
-          <p:cNvSpPr/>
-          <p:nvPr/>
-        </p:nvSpPr>
-        <p:spPr>
-          <a:xfrm>
-            <a:off x="7184136" y="3364992"/>
-            <a:ext cx="1225296" cy="475488"/>
+              <a:t>Phonemes</a:t>
+            </a:r>
+            <a:endParaRPr lang="en-US" sz="1100" dirty="0"/>
+          </a:p>
+        </p:txBody>
+      </p:sp>
+      <p:sp>
+        <p:nvSpPr>
+          <p:cNvPr id="41" name="Shape 39"/>
+          <p:cNvSpPr/>
+          <p:nvPr/>
+        </p:nvSpPr>
+        <p:spPr>
+          <a:xfrm>
+            <a:off x="1874520" y="4096512"/>
+            <a:ext cx="6903720" cy="804672"/>
           </a:xfrm>
           <a:prstGeom prst="rect">
             <a:avLst>
-              <a:gd name="adj" fmla="val 9615"/>
+              <a:gd name="adj" fmla="val 6818"/>
             </a:avLst>
           </a:prstGeom>
           <a:solidFill>
+            <a:srgbClr val="FCE7F3"/>
+          </a:solidFill>
+          <a:ln w="12700">
+            <a:solidFill>
+              <a:srgbClr val="DB2777"/>
+            </a:solidFill>
+            <a:prstDash val="solid"/>
+          </a:ln>
+        </p:spPr>
+      </p:sp>
+      <p:sp>
+        <p:nvSpPr>
+          <p:cNvPr id="42" name="Shape 40"/>
+          <p:cNvSpPr/>
+          <p:nvPr/>
+        </p:nvSpPr>
+        <p:spPr>
+          <a:xfrm>
+            <a:off x="1951330" y="4169664"/>
+            <a:ext cx="676656" cy="384048"/>
+          </a:xfrm>
+          <a:prstGeom prst="rect">
+            <a:avLst>
+              <a:gd name="adj" fmla="val 9524"/>
+            </a:avLst>
+          </a:prstGeom>
+          <a:solidFill>
             <a:srgbClr val="FFFFFF"/>
           </a:solidFill>
           <a:ln w="12700">
             <a:solidFill>
-              <a:srgbClr val="0D9488"/>
-            </a:solidFill>
-            <a:prstDash val="solid"/>
-          </a:ln>
-        </p:spPr>
-      </p:sp>
-      <p:sp>
-        <p:nvSpPr>
-          <p:cNvPr id="41" name="Text 39"/>
-          <p:cNvSpPr/>
-          <p:nvPr/>
-        </p:nvSpPr>
-        <p:spPr>
-          <a:xfrm>
-            <a:off x="7184136" y="3364992"/>
-            <a:ext cx="1225296" cy="475488"/>
-          </a:xfrm>
-          <a:prstGeom prst="rect">
-            <a:avLst/>
-          </a:prstGeom>
-          <a:noFill/>
-          <a:ln/>
-        </p:spPr>
-        <p:txBody>
-          <a:bodyPr wrap="square" lIns="0" tIns="0" rIns="0" bIns="0" rtlCol="0" anchor="ctr"/>
-          <a:lstStyle/>
-          <a:p>
-            <a:pPr algn="ctr" indent="0" marL="0">
-              <a:buNone/>
-            </a:pPr>
-            <a:r>
-              <a:rPr lang="en-US" sz="1400" b="1" dirty="0">
-                <a:solidFill>
-                  <a:srgbClr val="0D9488"/>
+              <a:srgbClr val="DB2777"/>
+            </a:solidFill>
+            <a:prstDash val="solid"/>
+          </a:ln>
+        </p:spPr>
+      </p:sp>
+      <p:sp>
+        <p:nvSpPr>
+          <p:cNvPr id="43" name="Text 41"/>
+          <p:cNvSpPr/>
+          <p:nvPr/>
+        </p:nvSpPr>
+        <p:spPr>
+          <a:xfrm>
+            <a:off x="1951330" y="4169664"/>
+            <a:ext cx="676656" cy="384048"/>
+          </a:xfrm>
+          <a:prstGeom prst="rect">
+            <a:avLst/>
+          </a:prstGeom>
+          <a:noFill/>
+          <a:ln/>
+        </p:spPr>
+        <p:txBody>
+          <a:bodyPr wrap="square" lIns="0" tIns="0" rIns="0" bIns="0" rtlCol="0" anchor="ctr"/>
+          <a:lstStyle/>
+          <a:p>
+            <a:pPr algn="ctr" indent="0" marL="0">
+              <a:buNone/>
+            </a:pPr>
+            <a:r>
+              <a:rPr lang="en-US" sz="900" b="1" dirty="0">
+                <a:solidFill>
+                  <a:srgbClr val="9D174D"/>
                 </a:solidFill>
                 <a:latin typeface="Trebuchet MS" pitchFamily="34" charset="0"/>
                 <a:ea typeface="Trebuchet MS" pitchFamily="34" charset="-122"/>
                 <a:cs typeface="Trebuchet MS" pitchFamily="34" charset="-120"/>
               </a:rPr>
-              <a:t>gate</a:t>
-            </a:r>
-            <a:endParaRPr lang="en-US" sz="1400" dirty="0"/>
-          </a:p>
-        </p:txBody>
-      </p:sp>
-      <p:sp>
-        <p:nvSpPr>
-          <p:cNvPr id="42" name="Shape 40"/>
-          <p:cNvSpPr/>
-          <p:nvPr/>
-        </p:nvSpPr>
-        <p:spPr>
-          <a:xfrm>
-            <a:off x="365760" y="4096512"/>
-            <a:ext cx="1371600" cy="804672"/>
+              <a:t>c</a:t>
+            </a:r>
+            <a:endParaRPr lang="en-US" sz="900" dirty="0"/>
+          </a:p>
+        </p:txBody>
+      </p:sp>
+      <p:sp>
+        <p:nvSpPr>
+          <p:cNvPr id="44" name="Text 42"/>
+          <p:cNvSpPr/>
+          <p:nvPr/>
+        </p:nvSpPr>
+        <p:spPr>
+          <a:xfrm>
+            <a:off x="1951330" y="4572000"/>
+            <a:ext cx="676656" cy="219456"/>
+          </a:xfrm>
+          <a:prstGeom prst="rect">
+            <a:avLst/>
+          </a:prstGeom>
+          <a:noFill/>
+          <a:ln/>
+        </p:spPr>
+        <p:txBody>
+          <a:bodyPr wrap="square" lIns="0" tIns="0" rIns="0" bIns="0" rtlCol="0" anchor="t"/>
+          <a:lstStyle/>
+          <a:p>
+            <a:pPr algn="ctr" indent="0" marL="0">
+              <a:buNone/>
+            </a:pPr>
+            <a:r>
+              <a:rPr lang="en-US" sz="750" i="1" dirty="0">
+                <a:solidFill>
+                  <a:srgbClr val="94A3B8"/>
+                </a:solidFill>
+                <a:latin typeface="Calibri" pitchFamily="34" charset="0"/>
+                <a:ea typeface="Calibri" pitchFamily="34" charset="-122"/>
+                <a:cs typeface="Calibri" pitchFamily="34" charset="-120"/>
+              </a:rPr>
+              <a:t>/s/</a:t>
+            </a:r>
+            <a:endParaRPr lang="en-US" sz="750" dirty="0"/>
+          </a:p>
+        </p:txBody>
+      </p:sp>
+      <p:sp>
+        <p:nvSpPr>
+          <p:cNvPr id="45" name="Shape 43"/>
+          <p:cNvSpPr/>
+          <p:nvPr/>
+        </p:nvSpPr>
+        <p:spPr>
+          <a:xfrm>
+            <a:off x="2677363" y="4169664"/>
+            <a:ext cx="676656" cy="384048"/>
           </a:xfrm>
           <a:prstGeom prst="rect">
             <a:avLst>
-              <a:gd name="adj" fmla="val 6818"/>
+              <a:gd name="adj" fmla="val 9524"/>
             </a:avLst>
           </a:prstGeom>
           <a:solidFill>
-            <a:srgbClr val="E2E8F0"/>
-          </a:solidFill>
-          <a:ln w="12700">
-            <a:solidFill>
-              <a:srgbClr val="E2E8F0"/>
-            </a:solidFill>
-            <a:prstDash val="solid"/>
-          </a:ln>
-        </p:spPr>
-      </p:sp>
-      <p:sp>
-        <p:nvSpPr>
-          <p:cNvPr id="43" name="Text 41"/>
-          <p:cNvSpPr/>
-          <p:nvPr/>
-        </p:nvSpPr>
-        <p:spPr>
-          <a:xfrm>
-            <a:off x="365760" y="4096512"/>
-            <a:ext cx="1371600" cy="804672"/>
-          </a:xfrm>
-          <a:prstGeom prst="rect">
-            <a:avLst/>
-          </a:prstGeom>
-          <a:noFill/>
-          <a:ln/>
-        </p:spPr>
-        <p:txBody>
-          <a:bodyPr wrap="square" lIns="0" tIns="0" rIns="0" bIns="0" rtlCol="0" anchor="ctr"/>
-          <a:lstStyle/>
-          <a:p>
-            <a:pPr algn="ctr" indent="0" marL="0">
-              <a:buNone/>
-            </a:pPr>
-            <a:r>
-              <a:rPr lang="en-US" sz="1100" b="1" dirty="0">
-                <a:solidFill>
-                  <a:srgbClr val="475569"/>
+            <a:srgbClr val="FFFFFF"/>
+          </a:solidFill>
+          <a:ln w="12700">
+            <a:solidFill>
+              <a:srgbClr val="DB2777"/>
+            </a:solidFill>
+            <a:prstDash val="solid"/>
+          </a:ln>
+        </p:spPr>
+      </p:sp>
+      <p:sp>
+        <p:nvSpPr>
+          <p:cNvPr id="46" name="Text 44"/>
+          <p:cNvSpPr/>
+          <p:nvPr/>
+        </p:nvSpPr>
+        <p:spPr>
+          <a:xfrm>
+            <a:off x="2677363" y="4169664"/>
+            <a:ext cx="676656" cy="384048"/>
+          </a:xfrm>
+          <a:prstGeom prst="rect">
+            <a:avLst/>
+          </a:prstGeom>
+          <a:noFill/>
+          <a:ln/>
+        </p:spPr>
+        <p:txBody>
+          <a:bodyPr wrap="square" lIns="0" tIns="0" rIns="0" bIns="0" rtlCol="0" anchor="ctr"/>
+          <a:lstStyle/>
+          <a:p>
+            <a:pPr algn="ctr" indent="0" marL="0">
+              <a:buNone/>
+            </a:pPr>
+            <a:r>
+              <a:rPr lang="en-US" sz="900" b="1" dirty="0">
+                <a:solidFill>
+                  <a:srgbClr val="9D174D"/>
                 </a:solidFill>
                 <a:latin typeface="Trebuchet MS" pitchFamily="34" charset="0"/>
                 <a:ea typeface="Trebuchet MS" pitchFamily="34" charset="-122"/>
                 <a:cs typeface="Trebuchet MS" pitchFamily="34" charset="-120"/>
               </a:rPr>
-              <a:t>Phonemes</a:t>
-            </a:r>
-            <a:endParaRPr lang="en-US" sz="1100" dirty="0"/>
-          </a:p>
-        </p:txBody>
-      </p:sp>
-      <p:sp>
-        <p:nvSpPr>
-          <p:cNvPr id="44" name="Shape 42"/>
-          <p:cNvSpPr/>
-          <p:nvPr/>
-        </p:nvSpPr>
-        <p:spPr>
-          <a:xfrm>
-            <a:off x="1874520" y="4096512"/>
-            <a:ext cx="6903720" cy="804672"/>
-          </a:xfrm>
-          <a:prstGeom prst="rect">
-            <a:avLst>
-              <a:gd name="adj" fmla="val 6818"/>
-            </a:avLst>
-          </a:prstGeom>
-          <a:solidFill>
-            <a:srgbClr val="FCE7F3"/>
-          </a:solidFill>
-          <a:ln w="12700">
-            <a:solidFill>
-              <a:srgbClr val="DB2777"/>
-            </a:solidFill>
-            <a:prstDash val="solid"/>
-          </a:ln>
-        </p:spPr>
-      </p:sp>
-      <p:sp>
-        <p:nvSpPr>
-          <p:cNvPr id="45" name="Shape 43"/>
-          <p:cNvSpPr/>
-          <p:nvPr/>
-        </p:nvSpPr>
-        <p:spPr>
-          <a:xfrm>
-            <a:off x="1952897" y="4169664"/>
-            <a:ext cx="451573" cy="384048"/>
+              <a:t>ir</a:t>
+            </a:r>
+            <a:endParaRPr lang="en-US" sz="900" dirty="0"/>
+          </a:p>
+        </p:txBody>
+      </p:sp>
+      <p:sp>
+        <p:nvSpPr>
+          <p:cNvPr id="47" name="Shape 45"/>
+          <p:cNvSpPr/>
+          <p:nvPr/>
+        </p:nvSpPr>
+        <p:spPr>
+          <a:xfrm>
+            <a:off x="3403397" y="4169664"/>
+            <a:ext cx="676656" cy="384048"/>
           </a:xfrm>
           <a:prstGeom prst="rect">
             <a:avLst>
@@ -23995,14 +24529,14 @@
       </p:sp>
       <p:sp>
         <p:nvSpPr>
-          <p:cNvPr id="46" name="Text 44"/>
-          <p:cNvSpPr/>
-          <p:nvPr/>
-        </p:nvSpPr>
-        <p:spPr>
-          <a:xfrm>
-            <a:off x="1952897" y="4169664"/>
-            <a:ext cx="451573" cy="384048"/>
+          <p:cNvPr id="48" name="Text 46"/>
+          <p:cNvSpPr/>
+          <p:nvPr/>
+        </p:nvSpPr>
+        <p:spPr>
+          <a:xfrm>
+            <a:off x="3403397" y="4169664"/>
+            <a:ext cx="676656" cy="384048"/>
           </a:xfrm>
           <a:prstGeom prst="rect">
             <a:avLst/>
@@ -24034,14 +24568,410 @@
       </p:sp>
       <p:sp>
         <p:nvSpPr>
-          <p:cNvPr id="47" name="Text 45"/>
-          <p:cNvSpPr/>
-          <p:nvPr/>
-        </p:nvSpPr>
-        <p:spPr>
-          <a:xfrm>
-            <a:off x="1952897" y="4572000"/>
-            <a:ext cx="451573" cy="219456"/>
+          <p:cNvPr id="49" name="Shape 47"/>
+          <p:cNvSpPr/>
+          <p:nvPr/>
+        </p:nvSpPr>
+        <p:spPr>
+          <a:xfrm>
+            <a:off x="4129430" y="4169664"/>
+            <a:ext cx="676656" cy="384048"/>
+          </a:xfrm>
+          <a:prstGeom prst="rect">
+            <a:avLst>
+              <a:gd name="adj" fmla="val 9524"/>
+            </a:avLst>
+          </a:prstGeom>
+          <a:solidFill>
+            <a:srgbClr val="FFFFFF"/>
+          </a:solidFill>
+          <a:ln w="12700">
+            <a:solidFill>
+              <a:srgbClr val="DB2777"/>
+            </a:solidFill>
+            <a:prstDash val="solid"/>
+          </a:ln>
+        </p:spPr>
+      </p:sp>
+      <p:sp>
+        <p:nvSpPr>
+          <p:cNvPr id="50" name="Text 48"/>
+          <p:cNvSpPr/>
+          <p:nvPr/>
+        </p:nvSpPr>
+        <p:spPr>
+          <a:xfrm>
+            <a:off x="4129430" y="4169664"/>
+            <a:ext cx="676656" cy="384048"/>
+          </a:xfrm>
+          <a:prstGeom prst="rect">
+            <a:avLst/>
+          </a:prstGeom>
+          <a:noFill/>
+          <a:ln/>
+        </p:spPr>
+        <p:txBody>
+          <a:bodyPr wrap="square" lIns="0" tIns="0" rIns="0" bIns="0" rtlCol="0" anchor="ctr"/>
+          <a:lstStyle/>
+          <a:p>
+            <a:pPr algn="ctr" indent="0" marL="0">
+              <a:buNone/>
+            </a:pPr>
+            <a:r>
+              <a:rPr lang="en-US" sz="900" b="1" dirty="0">
+                <a:solidFill>
+                  <a:srgbClr val="9D174D"/>
+                </a:solidFill>
+                <a:latin typeface="Trebuchet MS" pitchFamily="34" charset="0"/>
+                <a:ea typeface="Trebuchet MS" pitchFamily="34" charset="-122"/>
+                <a:cs typeface="Trebuchet MS" pitchFamily="34" charset="-120"/>
+              </a:rPr>
+              <a:t>um</a:t>
+            </a:r>
+            <a:endParaRPr lang="en-US" sz="900" dirty="0"/>
+          </a:p>
+        </p:txBody>
+      </p:sp>
+      <p:sp>
+        <p:nvSpPr>
+          <p:cNvPr id="51" name="Shape 49"/>
+          <p:cNvSpPr/>
+          <p:nvPr/>
+        </p:nvSpPr>
+        <p:spPr>
+          <a:xfrm>
+            <a:off x="4855464" y="4169664"/>
+            <a:ext cx="676656" cy="384048"/>
+          </a:xfrm>
+          <a:prstGeom prst="rect">
+            <a:avLst>
+              <a:gd name="adj" fmla="val 9524"/>
+            </a:avLst>
+          </a:prstGeom>
+          <a:solidFill>
+            <a:srgbClr val="FFFFFF"/>
+          </a:solidFill>
+          <a:ln w="12700">
+            <a:solidFill>
+              <a:srgbClr val="DB2777"/>
+            </a:solidFill>
+            <a:prstDash val="solid"/>
+          </a:ln>
+        </p:spPr>
+      </p:sp>
+      <p:sp>
+        <p:nvSpPr>
+          <p:cNvPr id="52" name="Text 50"/>
+          <p:cNvSpPr/>
+          <p:nvPr/>
+        </p:nvSpPr>
+        <p:spPr>
+          <a:xfrm>
+            <a:off x="4855464" y="4169664"/>
+            <a:ext cx="676656" cy="384048"/>
+          </a:xfrm>
+          <a:prstGeom prst="rect">
+            <a:avLst/>
+          </a:prstGeom>
+          <a:noFill/>
+          <a:ln/>
+        </p:spPr>
+        <p:txBody>
+          <a:bodyPr wrap="square" lIns="0" tIns="0" rIns="0" bIns="0" rtlCol="0" anchor="ctr"/>
+          <a:lstStyle/>
+          <a:p>
+            <a:pPr algn="ctr" indent="0" marL="0">
+              <a:buNone/>
+            </a:pPr>
+            <a:r>
+              <a:rPr lang="en-US" sz="900" b="1" dirty="0">
+                <a:solidFill>
+                  <a:srgbClr val="9D174D"/>
+                </a:solidFill>
+                <a:latin typeface="Trebuchet MS" pitchFamily="34" charset="0"/>
+                <a:ea typeface="Trebuchet MS" pitchFamily="34" charset="-122"/>
+                <a:cs typeface="Trebuchet MS" pitchFamily="34" charset="-120"/>
+              </a:rPr>
+              <a:t>f</a:t>
+            </a:r>
+            <a:endParaRPr lang="en-US" sz="900" dirty="0"/>
+          </a:p>
+        </p:txBody>
+      </p:sp>
+      <p:sp>
+        <p:nvSpPr>
+          <p:cNvPr id="53" name="Shape 51"/>
+          <p:cNvSpPr/>
+          <p:nvPr/>
+        </p:nvSpPr>
+        <p:spPr>
+          <a:xfrm>
+            <a:off x="5581498" y="4169664"/>
+            <a:ext cx="676656" cy="384048"/>
+          </a:xfrm>
+          <a:prstGeom prst="rect">
+            <a:avLst>
+              <a:gd name="adj" fmla="val 9524"/>
+            </a:avLst>
+          </a:prstGeom>
+          <a:solidFill>
+            <a:srgbClr val="FFFFFF"/>
+          </a:solidFill>
+          <a:ln w="12700">
+            <a:solidFill>
+              <a:srgbClr val="DB2777"/>
+            </a:solidFill>
+            <a:prstDash val="solid"/>
+          </a:ln>
+        </p:spPr>
+      </p:sp>
+      <p:sp>
+        <p:nvSpPr>
+          <p:cNvPr id="54" name="Text 52"/>
+          <p:cNvSpPr/>
+          <p:nvPr/>
+        </p:nvSpPr>
+        <p:spPr>
+          <a:xfrm>
+            <a:off x="5581498" y="4169664"/>
+            <a:ext cx="676656" cy="384048"/>
+          </a:xfrm>
+          <a:prstGeom prst="rect">
+            <a:avLst/>
+          </a:prstGeom>
+          <a:noFill/>
+          <a:ln/>
+        </p:spPr>
+        <p:txBody>
+          <a:bodyPr wrap="square" lIns="0" tIns="0" rIns="0" bIns="0" rtlCol="0" anchor="ctr"/>
+          <a:lstStyle/>
+          <a:p>
+            <a:pPr algn="ctr" indent="0" marL="0">
+              <a:buNone/>
+            </a:pPr>
+            <a:r>
+              <a:rPr lang="en-US" sz="900" b="1" dirty="0">
+                <a:solidFill>
+                  <a:srgbClr val="9D174D"/>
+                </a:solidFill>
+                <a:latin typeface="Trebuchet MS" pitchFamily="34" charset="0"/>
+                <a:ea typeface="Trebuchet MS" pitchFamily="34" charset="-122"/>
+                <a:cs typeface="Trebuchet MS" pitchFamily="34" charset="-120"/>
+              </a:rPr>
+              <a:t>er</a:t>
+            </a:r>
+            <a:endParaRPr lang="en-US" sz="900" dirty="0"/>
+          </a:p>
+        </p:txBody>
+      </p:sp>
+      <p:sp>
+        <p:nvSpPr>
+          <p:cNvPr id="55" name="Shape 53"/>
+          <p:cNvSpPr/>
+          <p:nvPr/>
+        </p:nvSpPr>
+        <p:spPr>
+          <a:xfrm>
+            <a:off x="6307531" y="4169664"/>
+            <a:ext cx="676656" cy="384048"/>
+          </a:xfrm>
+          <a:prstGeom prst="rect">
+            <a:avLst>
+              <a:gd name="adj" fmla="val 9524"/>
+            </a:avLst>
+          </a:prstGeom>
+          <a:solidFill>
+            <a:srgbClr val="FFFFFF"/>
+          </a:solidFill>
+          <a:ln w="12700">
+            <a:solidFill>
+              <a:srgbClr val="DB2777"/>
+            </a:solidFill>
+            <a:prstDash val="solid"/>
+          </a:ln>
+        </p:spPr>
+      </p:sp>
+      <p:sp>
+        <p:nvSpPr>
+          <p:cNvPr id="56" name="Text 54"/>
+          <p:cNvSpPr/>
+          <p:nvPr/>
+        </p:nvSpPr>
+        <p:spPr>
+          <a:xfrm>
+            <a:off x="6307531" y="4169664"/>
+            <a:ext cx="676656" cy="384048"/>
+          </a:xfrm>
+          <a:prstGeom prst="rect">
+            <a:avLst/>
+          </a:prstGeom>
+          <a:noFill/>
+          <a:ln/>
+        </p:spPr>
+        <p:txBody>
+          <a:bodyPr wrap="square" lIns="0" tIns="0" rIns="0" bIns="0" rtlCol="0" anchor="ctr"/>
+          <a:lstStyle/>
+          <a:p>
+            <a:pPr algn="ctr" indent="0" marL="0">
+              <a:buNone/>
+            </a:pPr>
+            <a:r>
+              <a:rPr lang="en-US" sz="900" b="1" dirty="0">
+                <a:solidFill>
+                  <a:srgbClr val="9D174D"/>
+                </a:solidFill>
+                <a:latin typeface="Trebuchet MS" pitchFamily="34" charset="0"/>
+                <a:ea typeface="Trebuchet MS" pitchFamily="34" charset="-122"/>
+                <a:cs typeface="Trebuchet MS" pitchFamily="34" charset="-120"/>
+              </a:rPr>
+              <a:t>e</a:t>
+            </a:r>
+            <a:endParaRPr lang="en-US" sz="900" dirty="0"/>
+          </a:p>
+        </p:txBody>
+      </p:sp>
+      <p:sp>
+        <p:nvSpPr>
+          <p:cNvPr id="57" name="Shape 55"/>
+          <p:cNvSpPr/>
+          <p:nvPr/>
+        </p:nvSpPr>
+        <p:spPr>
+          <a:xfrm>
+            <a:off x="7033565" y="4169664"/>
+            <a:ext cx="676656" cy="384048"/>
+          </a:xfrm>
+          <a:prstGeom prst="rect">
+            <a:avLst>
+              <a:gd name="adj" fmla="val 9524"/>
+            </a:avLst>
+          </a:prstGeom>
+          <a:solidFill>
+            <a:srgbClr val="FFFFFF"/>
+          </a:solidFill>
+          <a:ln w="12700">
+            <a:solidFill>
+              <a:srgbClr val="DB2777"/>
+            </a:solidFill>
+            <a:prstDash val="solid"/>
+          </a:ln>
+        </p:spPr>
+      </p:sp>
+      <p:sp>
+        <p:nvSpPr>
+          <p:cNvPr id="58" name="Text 56"/>
+          <p:cNvSpPr/>
+          <p:nvPr/>
+        </p:nvSpPr>
+        <p:spPr>
+          <a:xfrm>
+            <a:off x="7033565" y="4169664"/>
+            <a:ext cx="676656" cy="384048"/>
+          </a:xfrm>
+          <a:prstGeom prst="rect">
+            <a:avLst/>
+          </a:prstGeom>
+          <a:noFill/>
+          <a:ln/>
+        </p:spPr>
+        <p:txBody>
+          <a:bodyPr wrap="square" lIns="0" tIns="0" rIns="0" bIns="0" rtlCol="0" anchor="ctr"/>
+          <a:lstStyle/>
+          <a:p>
+            <a:pPr algn="ctr" indent="0" marL="0">
+              <a:buNone/>
+            </a:pPr>
+            <a:r>
+              <a:rPr lang="en-US" sz="900" b="1" dirty="0">
+                <a:solidFill>
+                  <a:srgbClr val="9D174D"/>
+                </a:solidFill>
+                <a:latin typeface="Trebuchet MS" pitchFamily="34" charset="0"/>
+                <a:ea typeface="Trebuchet MS" pitchFamily="34" charset="-122"/>
+                <a:cs typeface="Trebuchet MS" pitchFamily="34" charset="-120"/>
+              </a:rPr>
+              <a:t>n</a:t>
+            </a:r>
+            <a:endParaRPr lang="en-US" sz="900" dirty="0"/>
+          </a:p>
+        </p:txBody>
+      </p:sp>
+      <p:sp>
+        <p:nvSpPr>
+          <p:cNvPr id="59" name="Shape 57"/>
+          <p:cNvSpPr/>
+          <p:nvPr/>
+        </p:nvSpPr>
+        <p:spPr>
+          <a:xfrm>
+            <a:off x="7759598" y="4169664"/>
+            <a:ext cx="676656" cy="384048"/>
+          </a:xfrm>
+          <a:prstGeom prst="rect">
+            <a:avLst>
+              <a:gd name="adj" fmla="val 9524"/>
+            </a:avLst>
+          </a:prstGeom>
+          <a:solidFill>
+            <a:srgbClr val="FFFFFF"/>
+          </a:solidFill>
+          <a:ln w="12700">
+            <a:solidFill>
+              <a:srgbClr val="DB2777"/>
+            </a:solidFill>
+            <a:prstDash val="solid"/>
+          </a:ln>
+        </p:spPr>
+      </p:sp>
+      <p:sp>
+        <p:nvSpPr>
+          <p:cNvPr id="60" name="Text 58"/>
+          <p:cNvSpPr/>
+          <p:nvPr/>
+        </p:nvSpPr>
+        <p:spPr>
+          <a:xfrm>
+            <a:off x="7759598" y="4169664"/>
+            <a:ext cx="676656" cy="384048"/>
+          </a:xfrm>
+          <a:prstGeom prst="rect">
+            <a:avLst/>
+          </a:prstGeom>
+          <a:noFill/>
+          <a:ln/>
+        </p:spPr>
+        <p:txBody>
+          <a:bodyPr wrap="square" lIns="0" tIns="0" rIns="0" bIns="0" rtlCol="0" anchor="ctr"/>
+          <a:lstStyle/>
+          <a:p>
+            <a:pPr algn="ctr" indent="0" marL="0">
+              <a:buNone/>
+            </a:pPr>
+            <a:r>
+              <a:rPr lang="en-US" sz="900" b="1" dirty="0">
+                <a:solidFill>
+                  <a:srgbClr val="9D174D"/>
+                </a:solidFill>
+                <a:latin typeface="Trebuchet MS" pitchFamily="34" charset="0"/>
+                <a:ea typeface="Trebuchet MS" pitchFamily="34" charset="-122"/>
+                <a:cs typeface="Trebuchet MS" pitchFamily="34" charset="-120"/>
+              </a:rPr>
+              <a:t>ce</a:t>
+            </a:r>
+            <a:endParaRPr lang="en-US" sz="900" dirty="0"/>
+          </a:p>
+        </p:txBody>
+      </p:sp>
+      <p:sp>
+        <p:nvSpPr>
+          <p:cNvPr id="61" name="Text 59"/>
+          <p:cNvSpPr/>
+          <p:nvPr/>
+        </p:nvSpPr>
+        <p:spPr>
+          <a:xfrm>
+            <a:off x="7759598" y="4572000"/>
+            <a:ext cx="676656" cy="219456"/>
           </a:xfrm>
           <a:prstGeom prst="rect">
             <a:avLst/>
@@ -24068,837 +24998,6 @@
               <a:t>/s/</a:t>
             </a:r>
             <a:endParaRPr lang="en-US" sz="750" dirty="0"/>
-          </a:p>
-        </p:txBody>
-      </p:sp>
-      <p:sp>
-        <p:nvSpPr>
-          <p:cNvPr id="48" name="Shape 46"/>
-          <p:cNvSpPr/>
-          <p:nvPr/>
-        </p:nvSpPr>
-        <p:spPr>
-          <a:xfrm>
-            <a:off x="2455415" y="4169664"/>
-            <a:ext cx="451573" cy="384048"/>
-          </a:xfrm>
-          <a:prstGeom prst="rect">
-            <a:avLst>
-              <a:gd name="adj" fmla="val 9524"/>
-            </a:avLst>
-          </a:prstGeom>
-          <a:solidFill>
-            <a:srgbClr val="FFFFFF"/>
-          </a:solidFill>
-          <a:ln w="12700">
-            <a:solidFill>
-              <a:srgbClr val="DB2777"/>
-            </a:solidFill>
-            <a:prstDash val="solid"/>
-          </a:ln>
-        </p:spPr>
-      </p:sp>
-      <p:sp>
-        <p:nvSpPr>
-          <p:cNvPr id="49" name="Text 47"/>
-          <p:cNvSpPr/>
-          <p:nvPr/>
-        </p:nvSpPr>
-        <p:spPr>
-          <a:xfrm>
-            <a:off x="2455415" y="4169664"/>
-            <a:ext cx="451573" cy="384048"/>
-          </a:xfrm>
-          <a:prstGeom prst="rect">
-            <a:avLst/>
-          </a:prstGeom>
-          <a:noFill/>
-          <a:ln/>
-        </p:spPr>
-        <p:txBody>
-          <a:bodyPr wrap="square" lIns="0" tIns="0" rIns="0" bIns="0" rtlCol="0" anchor="ctr"/>
-          <a:lstStyle/>
-          <a:p>
-            <a:pPr algn="ctr" indent="0" marL="0">
-              <a:buNone/>
-            </a:pPr>
-            <a:r>
-              <a:rPr lang="en-US" sz="900" b="1" dirty="0">
-                <a:solidFill>
-                  <a:srgbClr val="9D174D"/>
-                </a:solidFill>
-                <a:latin typeface="Trebuchet MS" pitchFamily="34" charset="0"/>
-                <a:ea typeface="Trebuchet MS" pitchFamily="34" charset="-122"/>
-                <a:cs typeface="Trebuchet MS" pitchFamily="34" charset="-120"/>
-              </a:rPr>
-              <a:t>ir</a:t>
-            </a:r>
-            <a:endParaRPr lang="en-US" sz="900" dirty="0"/>
-          </a:p>
-        </p:txBody>
-      </p:sp>
-      <p:sp>
-        <p:nvSpPr>
-          <p:cNvPr id="50" name="Shape 48"/>
-          <p:cNvSpPr/>
-          <p:nvPr/>
-        </p:nvSpPr>
-        <p:spPr>
-          <a:xfrm>
-            <a:off x="2957933" y="4169664"/>
-            <a:ext cx="451573" cy="384048"/>
-          </a:xfrm>
-          <a:prstGeom prst="rect">
-            <a:avLst>
-              <a:gd name="adj" fmla="val 9524"/>
-            </a:avLst>
-          </a:prstGeom>
-          <a:solidFill>
-            <a:srgbClr val="FFFFFF"/>
-          </a:solidFill>
-          <a:ln w="12700">
-            <a:solidFill>
-              <a:srgbClr val="DB2777"/>
-            </a:solidFill>
-            <a:prstDash val="solid"/>
-          </a:ln>
-        </p:spPr>
-      </p:sp>
-      <p:sp>
-        <p:nvSpPr>
-          <p:cNvPr id="51" name="Text 49"/>
-          <p:cNvSpPr/>
-          <p:nvPr/>
-        </p:nvSpPr>
-        <p:spPr>
-          <a:xfrm>
-            <a:off x="2957933" y="4169664"/>
-            <a:ext cx="451573" cy="384048"/>
-          </a:xfrm>
-          <a:prstGeom prst="rect">
-            <a:avLst/>
-          </a:prstGeom>
-          <a:noFill/>
-          <a:ln/>
-        </p:spPr>
-        <p:txBody>
-          <a:bodyPr wrap="square" lIns="0" tIns="0" rIns="0" bIns="0" rtlCol="0" anchor="ctr"/>
-          <a:lstStyle/>
-          <a:p>
-            <a:pPr algn="ctr" indent="0" marL="0">
-              <a:buNone/>
-            </a:pPr>
-            <a:r>
-              <a:rPr lang="en-US" sz="900" b="1" dirty="0">
-                <a:solidFill>
-                  <a:srgbClr val="9D174D"/>
-                </a:solidFill>
-                <a:latin typeface="Trebuchet MS" pitchFamily="34" charset="0"/>
-                <a:ea typeface="Trebuchet MS" pitchFamily="34" charset="-122"/>
-                <a:cs typeface="Trebuchet MS" pitchFamily="34" charset="-120"/>
-              </a:rPr>
-              <a:t>c</a:t>
-            </a:r>
-            <a:endParaRPr lang="en-US" sz="900" dirty="0"/>
-          </a:p>
-        </p:txBody>
-      </p:sp>
-      <p:sp>
-        <p:nvSpPr>
-          <p:cNvPr id="52" name="Text 50"/>
-          <p:cNvSpPr/>
-          <p:nvPr/>
-        </p:nvSpPr>
-        <p:spPr>
-          <a:xfrm>
-            <a:off x="2957933" y="4572000"/>
-            <a:ext cx="451573" cy="219456"/>
-          </a:xfrm>
-          <a:prstGeom prst="rect">
-            <a:avLst/>
-          </a:prstGeom>
-          <a:noFill/>
-          <a:ln/>
-        </p:spPr>
-        <p:txBody>
-          <a:bodyPr wrap="square" lIns="0" tIns="0" rIns="0" bIns="0" rtlCol="0" anchor="t"/>
-          <a:lstStyle/>
-          <a:p>
-            <a:pPr algn="ctr" indent="0" marL="0">
-              <a:buNone/>
-            </a:pPr>
-            <a:r>
-              <a:rPr lang="en-US" sz="750" i="1" dirty="0">
-                <a:solidFill>
-                  <a:srgbClr val="94A3B8"/>
-                </a:solidFill>
-                <a:latin typeface="Calibri" pitchFamily="34" charset="0"/>
-                <a:ea typeface="Calibri" pitchFamily="34" charset="-122"/>
-                <a:cs typeface="Calibri" pitchFamily="34" charset="-120"/>
-              </a:rPr>
-              <a:t>/k/</a:t>
-            </a:r>
-            <a:endParaRPr lang="en-US" sz="750" dirty="0"/>
-          </a:p>
-        </p:txBody>
-      </p:sp>
-      <p:sp>
-        <p:nvSpPr>
-          <p:cNvPr id="53" name="Shape 51"/>
-          <p:cNvSpPr/>
-          <p:nvPr/>
-        </p:nvSpPr>
-        <p:spPr>
-          <a:xfrm>
-            <a:off x="3460451" y="4169664"/>
-            <a:ext cx="451573" cy="384048"/>
-          </a:xfrm>
-          <a:prstGeom prst="rect">
-            <a:avLst>
-              <a:gd name="adj" fmla="val 9524"/>
-            </a:avLst>
-          </a:prstGeom>
-          <a:solidFill>
-            <a:srgbClr val="FFFFFF"/>
-          </a:solidFill>
-          <a:ln w="12700">
-            <a:solidFill>
-              <a:srgbClr val="DB2777"/>
-            </a:solidFill>
-            <a:prstDash val="solid"/>
-          </a:ln>
-        </p:spPr>
-      </p:sp>
-      <p:sp>
-        <p:nvSpPr>
-          <p:cNvPr id="54" name="Text 52"/>
-          <p:cNvSpPr/>
-          <p:nvPr/>
-        </p:nvSpPr>
-        <p:spPr>
-          <a:xfrm>
-            <a:off x="3460451" y="4169664"/>
-            <a:ext cx="451573" cy="384048"/>
-          </a:xfrm>
-          <a:prstGeom prst="rect">
-            <a:avLst/>
-          </a:prstGeom>
-          <a:noFill/>
-          <a:ln/>
-        </p:spPr>
-        <p:txBody>
-          <a:bodyPr wrap="square" lIns="0" tIns="0" rIns="0" bIns="0" rtlCol="0" anchor="ctr"/>
-          <a:lstStyle/>
-          <a:p>
-            <a:pPr algn="ctr" indent="0" marL="0">
-              <a:buNone/>
-            </a:pPr>
-            <a:r>
-              <a:rPr lang="en-US" sz="900" b="1" dirty="0">
-                <a:solidFill>
-                  <a:srgbClr val="9D174D"/>
-                </a:solidFill>
-                <a:latin typeface="Trebuchet MS" pitchFamily="34" charset="0"/>
-                <a:ea typeface="Trebuchet MS" pitchFamily="34" charset="-122"/>
-                <a:cs typeface="Trebuchet MS" pitchFamily="34" charset="-120"/>
-              </a:rPr>
-              <a:t>u</a:t>
-            </a:r>
-            <a:endParaRPr lang="en-US" sz="900" dirty="0"/>
-          </a:p>
-        </p:txBody>
-      </p:sp>
-      <p:sp>
-        <p:nvSpPr>
-          <p:cNvPr id="55" name="Shape 53"/>
-          <p:cNvSpPr/>
-          <p:nvPr/>
-        </p:nvSpPr>
-        <p:spPr>
-          <a:xfrm>
-            <a:off x="3962969" y="4169664"/>
-            <a:ext cx="451573" cy="384048"/>
-          </a:xfrm>
-          <a:prstGeom prst="rect">
-            <a:avLst>
-              <a:gd name="adj" fmla="val 9524"/>
-            </a:avLst>
-          </a:prstGeom>
-          <a:solidFill>
-            <a:srgbClr val="FFFFFF"/>
-          </a:solidFill>
-          <a:ln w="12700">
-            <a:solidFill>
-              <a:srgbClr val="DB2777"/>
-            </a:solidFill>
-            <a:prstDash val="solid"/>
-          </a:ln>
-        </p:spPr>
-      </p:sp>
-      <p:sp>
-        <p:nvSpPr>
-          <p:cNvPr id="56" name="Text 54"/>
-          <p:cNvSpPr/>
-          <p:nvPr/>
-        </p:nvSpPr>
-        <p:spPr>
-          <a:xfrm>
-            <a:off x="3962969" y="4169664"/>
-            <a:ext cx="451573" cy="384048"/>
-          </a:xfrm>
-          <a:prstGeom prst="rect">
-            <a:avLst/>
-          </a:prstGeom>
-          <a:noFill/>
-          <a:ln/>
-        </p:spPr>
-        <p:txBody>
-          <a:bodyPr wrap="square" lIns="0" tIns="0" rIns="0" bIns="0" rtlCol="0" anchor="ctr"/>
-          <a:lstStyle/>
-          <a:p>
-            <a:pPr algn="ctr" indent="0" marL="0">
-              <a:buNone/>
-            </a:pPr>
-            <a:r>
-              <a:rPr lang="en-US" sz="900" b="1" dirty="0">
-                <a:solidFill>
-                  <a:srgbClr val="9D174D"/>
-                </a:solidFill>
-                <a:latin typeface="Trebuchet MS" pitchFamily="34" charset="0"/>
-                <a:ea typeface="Trebuchet MS" pitchFamily="34" charset="-122"/>
-                <a:cs typeface="Trebuchet MS" pitchFamily="34" charset="-120"/>
-              </a:rPr>
-              <a:t>m</a:t>
-            </a:r>
-            <a:endParaRPr lang="en-US" sz="900" dirty="0"/>
-          </a:p>
-        </p:txBody>
-      </p:sp>
-      <p:sp>
-        <p:nvSpPr>
-          <p:cNvPr id="57" name="Shape 55"/>
-          <p:cNvSpPr/>
-          <p:nvPr/>
-        </p:nvSpPr>
-        <p:spPr>
-          <a:xfrm>
-            <a:off x="4465487" y="4169664"/>
-            <a:ext cx="451573" cy="384048"/>
-          </a:xfrm>
-          <a:prstGeom prst="rect">
-            <a:avLst>
-              <a:gd name="adj" fmla="val 9524"/>
-            </a:avLst>
-          </a:prstGeom>
-          <a:solidFill>
-            <a:srgbClr val="FFFFFF"/>
-          </a:solidFill>
-          <a:ln w="12700">
-            <a:solidFill>
-              <a:srgbClr val="DB2777"/>
-            </a:solidFill>
-            <a:prstDash val="solid"/>
-          </a:ln>
-        </p:spPr>
-      </p:sp>
-      <p:sp>
-        <p:nvSpPr>
-          <p:cNvPr id="58" name="Text 56"/>
-          <p:cNvSpPr/>
-          <p:nvPr/>
-        </p:nvSpPr>
-        <p:spPr>
-          <a:xfrm>
-            <a:off x="4465487" y="4169664"/>
-            <a:ext cx="451573" cy="384048"/>
-          </a:xfrm>
-          <a:prstGeom prst="rect">
-            <a:avLst/>
-          </a:prstGeom>
-          <a:noFill/>
-          <a:ln/>
-        </p:spPr>
-        <p:txBody>
-          <a:bodyPr wrap="square" lIns="0" tIns="0" rIns="0" bIns="0" rtlCol="0" anchor="ctr"/>
-          <a:lstStyle/>
-          <a:p>
-            <a:pPr algn="ctr" indent="0" marL="0">
-              <a:buNone/>
-            </a:pPr>
-            <a:r>
-              <a:rPr lang="en-US" sz="900" b="1" dirty="0">
-                <a:solidFill>
-                  <a:srgbClr val="9D174D"/>
-                </a:solidFill>
-                <a:latin typeface="Trebuchet MS" pitchFamily="34" charset="0"/>
-                <a:ea typeface="Trebuchet MS" pitchFamily="34" charset="-122"/>
-                <a:cs typeface="Trebuchet MS" pitchFamily="34" charset="-120"/>
-              </a:rPr>
-              <a:t>n</a:t>
-            </a:r>
-            <a:endParaRPr lang="en-US" sz="900" dirty="0"/>
-          </a:p>
-        </p:txBody>
-      </p:sp>
-      <p:sp>
-        <p:nvSpPr>
-          <p:cNvPr id="59" name="Shape 57"/>
-          <p:cNvSpPr/>
-          <p:nvPr/>
-        </p:nvSpPr>
-        <p:spPr>
-          <a:xfrm>
-            <a:off x="4968006" y="4169664"/>
-            <a:ext cx="451573" cy="384048"/>
-          </a:xfrm>
-          <a:prstGeom prst="rect">
-            <a:avLst>
-              <a:gd name="adj" fmla="val 9524"/>
-            </a:avLst>
-          </a:prstGeom>
-          <a:solidFill>
-            <a:srgbClr val="FFFFFF"/>
-          </a:solidFill>
-          <a:ln w="12700">
-            <a:solidFill>
-              <a:srgbClr val="DB2777"/>
-            </a:solidFill>
-            <a:prstDash val="solid"/>
-          </a:ln>
-        </p:spPr>
-      </p:sp>
-      <p:sp>
-        <p:nvSpPr>
-          <p:cNvPr id="60" name="Text 58"/>
-          <p:cNvSpPr/>
-          <p:nvPr/>
-        </p:nvSpPr>
-        <p:spPr>
-          <a:xfrm>
-            <a:off x="4968006" y="4169664"/>
-            <a:ext cx="451573" cy="384048"/>
-          </a:xfrm>
-          <a:prstGeom prst="rect">
-            <a:avLst/>
-          </a:prstGeom>
-          <a:noFill/>
-          <a:ln/>
-        </p:spPr>
-        <p:txBody>
-          <a:bodyPr wrap="square" lIns="0" tIns="0" rIns="0" bIns="0" rtlCol="0" anchor="ctr"/>
-          <a:lstStyle/>
-          <a:p>
-            <a:pPr algn="ctr" indent="0" marL="0">
-              <a:buNone/>
-            </a:pPr>
-            <a:r>
-              <a:rPr lang="en-US" sz="900" b="1" dirty="0">
-                <a:solidFill>
-                  <a:srgbClr val="9D174D"/>
-                </a:solidFill>
-                <a:latin typeface="Trebuchet MS" pitchFamily="34" charset="0"/>
-                <a:ea typeface="Trebuchet MS" pitchFamily="34" charset="-122"/>
-                <a:cs typeface="Trebuchet MS" pitchFamily="34" charset="-120"/>
-              </a:rPr>
-              <a:t>a</a:t>
-            </a:r>
-            <a:endParaRPr lang="en-US" sz="900" dirty="0"/>
-          </a:p>
-        </p:txBody>
-      </p:sp>
-      <p:sp>
-        <p:nvSpPr>
-          <p:cNvPr id="61" name="Shape 59"/>
-          <p:cNvSpPr/>
-          <p:nvPr/>
-        </p:nvSpPr>
-        <p:spPr>
-          <a:xfrm>
-            <a:off x="5470524" y="4169664"/>
-            <a:ext cx="451573" cy="384048"/>
-          </a:xfrm>
-          <a:prstGeom prst="rect">
-            <a:avLst>
-              <a:gd name="adj" fmla="val 9524"/>
-            </a:avLst>
-          </a:prstGeom>
-          <a:solidFill>
-            <a:srgbClr val="FFFFFF"/>
-          </a:solidFill>
-          <a:ln w="12700">
-            <a:solidFill>
-              <a:srgbClr val="DB2777"/>
-            </a:solidFill>
-            <a:prstDash val="solid"/>
-          </a:ln>
-        </p:spPr>
-      </p:sp>
-      <p:sp>
-        <p:nvSpPr>
-          <p:cNvPr id="62" name="Text 60"/>
-          <p:cNvSpPr/>
-          <p:nvPr/>
-        </p:nvSpPr>
-        <p:spPr>
-          <a:xfrm>
-            <a:off x="5470524" y="4169664"/>
-            <a:ext cx="451573" cy="384048"/>
-          </a:xfrm>
-          <a:prstGeom prst="rect">
-            <a:avLst/>
-          </a:prstGeom>
-          <a:noFill/>
-          <a:ln/>
-        </p:spPr>
-        <p:txBody>
-          <a:bodyPr wrap="square" lIns="0" tIns="0" rIns="0" bIns="0" rtlCol="0" anchor="ctr"/>
-          <a:lstStyle/>
-          <a:p>
-            <a:pPr algn="ctr" indent="0" marL="0">
-              <a:buNone/>
-            </a:pPr>
-            <a:r>
-              <a:rPr lang="en-US" sz="900" b="1" dirty="0">
-                <a:solidFill>
-                  <a:srgbClr val="9D174D"/>
-                </a:solidFill>
-                <a:latin typeface="Trebuchet MS" pitchFamily="34" charset="0"/>
-                <a:ea typeface="Trebuchet MS" pitchFamily="34" charset="-122"/>
-                <a:cs typeface="Trebuchet MS" pitchFamily="34" charset="-120"/>
-              </a:rPr>
-              <a:t>v</a:t>
-            </a:r>
-            <a:endParaRPr lang="en-US" sz="900" dirty="0"/>
-          </a:p>
-        </p:txBody>
-      </p:sp>
-      <p:sp>
-        <p:nvSpPr>
-          <p:cNvPr id="63" name="Shape 61"/>
-          <p:cNvSpPr/>
-          <p:nvPr/>
-        </p:nvSpPr>
-        <p:spPr>
-          <a:xfrm>
-            <a:off x="5973042" y="4169664"/>
-            <a:ext cx="451573" cy="384048"/>
-          </a:xfrm>
-          <a:prstGeom prst="rect">
-            <a:avLst>
-              <a:gd name="adj" fmla="val 9524"/>
-            </a:avLst>
-          </a:prstGeom>
-          <a:solidFill>
-            <a:srgbClr val="FFFFFF"/>
-          </a:solidFill>
-          <a:ln w="12700">
-            <a:solidFill>
-              <a:srgbClr val="DB2777"/>
-            </a:solidFill>
-            <a:prstDash val="solid"/>
-          </a:ln>
-        </p:spPr>
-      </p:sp>
-      <p:sp>
-        <p:nvSpPr>
-          <p:cNvPr id="64" name="Text 62"/>
-          <p:cNvSpPr/>
-          <p:nvPr/>
-        </p:nvSpPr>
-        <p:spPr>
-          <a:xfrm>
-            <a:off x="5973042" y="4169664"/>
-            <a:ext cx="451573" cy="384048"/>
-          </a:xfrm>
-          <a:prstGeom prst="rect">
-            <a:avLst/>
-          </a:prstGeom>
-          <a:noFill/>
-          <a:ln/>
-        </p:spPr>
-        <p:txBody>
-          <a:bodyPr wrap="square" lIns="0" tIns="0" rIns="0" bIns="0" rtlCol="0" anchor="ctr"/>
-          <a:lstStyle/>
-          <a:p>
-            <a:pPr algn="ctr" indent="0" marL="0">
-              <a:buNone/>
-            </a:pPr>
-            <a:r>
-              <a:rPr lang="en-US" sz="900" b="1" dirty="0">
-                <a:solidFill>
-                  <a:srgbClr val="9D174D"/>
-                </a:solidFill>
-                <a:latin typeface="Trebuchet MS" pitchFamily="34" charset="0"/>
-                <a:ea typeface="Trebuchet MS" pitchFamily="34" charset="-122"/>
-                <a:cs typeface="Trebuchet MS" pitchFamily="34" charset="-120"/>
-              </a:rPr>
-              <a:t>i</a:t>
-            </a:r>
-            <a:endParaRPr lang="en-US" sz="900" dirty="0"/>
-          </a:p>
-        </p:txBody>
-      </p:sp>
-      <p:sp>
-        <p:nvSpPr>
-          <p:cNvPr id="65" name="Shape 63"/>
-          <p:cNvSpPr/>
-          <p:nvPr/>
-        </p:nvSpPr>
-        <p:spPr>
-          <a:xfrm>
-            <a:off x="6475560" y="4169664"/>
-            <a:ext cx="451573" cy="384048"/>
-          </a:xfrm>
-          <a:prstGeom prst="rect">
-            <a:avLst>
-              <a:gd name="adj" fmla="val 9524"/>
-            </a:avLst>
-          </a:prstGeom>
-          <a:solidFill>
-            <a:srgbClr val="FFFFFF"/>
-          </a:solidFill>
-          <a:ln w="12700">
-            <a:solidFill>
-              <a:srgbClr val="DB2777"/>
-            </a:solidFill>
-            <a:prstDash val="solid"/>
-          </a:ln>
-        </p:spPr>
-      </p:sp>
-      <p:sp>
-        <p:nvSpPr>
-          <p:cNvPr id="66" name="Text 64"/>
-          <p:cNvSpPr/>
-          <p:nvPr/>
-        </p:nvSpPr>
-        <p:spPr>
-          <a:xfrm>
-            <a:off x="6475560" y="4169664"/>
-            <a:ext cx="451573" cy="384048"/>
-          </a:xfrm>
-          <a:prstGeom prst="rect">
-            <a:avLst/>
-          </a:prstGeom>
-          <a:noFill/>
-          <a:ln/>
-        </p:spPr>
-        <p:txBody>
-          <a:bodyPr wrap="square" lIns="0" tIns="0" rIns="0" bIns="0" rtlCol="0" anchor="ctr"/>
-          <a:lstStyle/>
-          <a:p>
-            <a:pPr algn="ctr" indent="0" marL="0">
-              <a:buNone/>
-            </a:pPr>
-            <a:r>
-              <a:rPr lang="en-US" sz="900" b="1" dirty="0">
-                <a:solidFill>
-                  <a:srgbClr val="9D174D"/>
-                </a:solidFill>
-                <a:latin typeface="Trebuchet MS" pitchFamily="34" charset="0"/>
-                <a:ea typeface="Trebuchet MS" pitchFamily="34" charset="-122"/>
-                <a:cs typeface="Trebuchet MS" pitchFamily="34" charset="-120"/>
-              </a:rPr>
-              <a:t>g</a:t>
-            </a:r>
-            <a:endParaRPr lang="en-US" sz="900" dirty="0"/>
-          </a:p>
-        </p:txBody>
-      </p:sp>
-      <p:sp>
-        <p:nvSpPr>
-          <p:cNvPr id="67" name="Shape 65"/>
-          <p:cNvSpPr/>
-          <p:nvPr/>
-        </p:nvSpPr>
-        <p:spPr>
-          <a:xfrm>
-            <a:off x="6978078" y="4169664"/>
-            <a:ext cx="451573" cy="384048"/>
-          </a:xfrm>
-          <a:prstGeom prst="rect">
-            <a:avLst>
-              <a:gd name="adj" fmla="val 9524"/>
-            </a:avLst>
-          </a:prstGeom>
-          <a:solidFill>
-            <a:srgbClr val="FFFFFF"/>
-          </a:solidFill>
-          <a:ln w="12700">
-            <a:solidFill>
-              <a:srgbClr val="DB2777"/>
-            </a:solidFill>
-            <a:prstDash val="solid"/>
-          </a:ln>
-        </p:spPr>
-      </p:sp>
-      <p:sp>
-        <p:nvSpPr>
-          <p:cNvPr id="68" name="Text 66"/>
-          <p:cNvSpPr/>
-          <p:nvPr/>
-        </p:nvSpPr>
-        <p:spPr>
-          <a:xfrm>
-            <a:off x="6978078" y="4169664"/>
-            <a:ext cx="451573" cy="384048"/>
-          </a:xfrm>
-          <a:prstGeom prst="rect">
-            <a:avLst/>
-          </a:prstGeom>
-          <a:noFill/>
-          <a:ln/>
-        </p:spPr>
-        <p:txBody>
-          <a:bodyPr wrap="square" lIns="0" tIns="0" rIns="0" bIns="0" rtlCol="0" anchor="ctr"/>
-          <a:lstStyle/>
-          <a:p>
-            <a:pPr algn="ctr" indent="0" marL="0">
-              <a:buNone/>
-            </a:pPr>
-            <a:r>
-              <a:rPr lang="en-US" sz="900" b="1" dirty="0">
-                <a:solidFill>
-                  <a:srgbClr val="9D174D"/>
-                </a:solidFill>
-                <a:latin typeface="Trebuchet MS" pitchFamily="34" charset="0"/>
-                <a:ea typeface="Trebuchet MS" pitchFamily="34" charset="-122"/>
-                <a:cs typeface="Trebuchet MS" pitchFamily="34" charset="-120"/>
-              </a:rPr>
-              <a:t>a</a:t>
-            </a:r>
-            <a:endParaRPr lang="en-US" sz="900" dirty="0"/>
-          </a:p>
-        </p:txBody>
-      </p:sp>
-      <p:sp>
-        <p:nvSpPr>
-          <p:cNvPr id="69" name="Shape 67"/>
-          <p:cNvSpPr/>
-          <p:nvPr/>
-        </p:nvSpPr>
-        <p:spPr>
-          <a:xfrm>
-            <a:off x="7480596" y="4169664"/>
-            <a:ext cx="451573" cy="384048"/>
-          </a:xfrm>
-          <a:prstGeom prst="rect">
-            <a:avLst>
-              <a:gd name="adj" fmla="val 9524"/>
-            </a:avLst>
-          </a:prstGeom>
-          <a:solidFill>
-            <a:srgbClr val="FFFFFF"/>
-          </a:solidFill>
-          <a:ln w="12700">
-            <a:solidFill>
-              <a:srgbClr val="DB2777"/>
-            </a:solidFill>
-            <a:prstDash val="solid"/>
-          </a:ln>
-        </p:spPr>
-      </p:sp>
-      <p:sp>
-        <p:nvSpPr>
-          <p:cNvPr id="70" name="Text 68"/>
-          <p:cNvSpPr/>
-          <p:nvPr/>
-        </p:nvSpPr>
-        <p:spPr>
-          <a:xfrm>
-            <a:off x="7480596" y="4169664"/>
-            <a:ext cx="451573" cy="384048"/>
-          </a:xfrm>
-          <a:prstGeom prst="rect">
-            <a:avLst/>
-          </a:prstGeom>
-          <a:noFill/>
-          <a:ln/>
-        </p:spPr>
-        <p:txBody>
-          <a:bodyPr wrap="square" lIns="0" tIns="0" rIns="0" bIns="0" rtlCol="0" anchor="ctr"/>
-          <a:lstStyle/>
-          <a:p>
-            <a:pPr algn="ctr" indent="0" marL="0">
-              <a:buNone/>
-            </a:pPr>
-            <a:r>
-              <a:rPr lang="en-US" sz="900" b="1" dirty="0">
-                <a:solidFill>
-                  <a:srgbClr val="9D174D"/>
-                </a:solidFill>
-                <a:latin typeface="Trebuchet MS" pitchFamily="34" charset="0"/>
-                <a:ea typeface="Trebuchet MS" pitchFamily="34" charset="-122"/>
-                <a:cs typeface="Trebuchet MS" pitchFamily="34" charset="-120"/>
-              </a:rPr>
-              <a:t>t</a:t>
-            </a:r>
-            <a:endParaRPr lang="en-US" sz="900" dirty="0"/>
-          </a:p>
-        </p:txBody>
-      </p:sp>
-      <p:sp>
-        <p:nvSpPr>
-          <p:cNvPr id="71" name="Shape 69"/>
-          <p:cNvSpPr/>
-          <p:nvPr/>
-        </p:nvSpPr>
-        <p:spPr>
-          <a:xfrm>
-            <a:off x="7983114" y="4169664"/>
-            <a:ext cx="451573" cy="384048"/>
-          </a:xfrm>
-          <a:prstGeom prst="rect">
-            <a:avLst>
-              <a:gd name="adj" fmla="val 9524"/>
-            </a:avLst>
-          </a:prstGeom>
-          <a:solidFill>
-            <a:srgbClr val="FFFFFF"/>
-          </a:solidFill>
-          <a:ln w="12700">
-            <a:solidFill>
-              <a:srgbClr val="DB2777"/>
-            </a:solidFill>
-            <a:prstDash val="solid"/>
-          </a:ln>
-        </p:spPr>
-      </p:sp>
-      <p:sp>
-        <p:nvSpPr>
-          <p:cNvPr id="72" name="Text 70"/>
-          <p:cNvSpPr/>
-          <p:nvPr/>
-        </p:nvSpPr>
-        <p:spPr>
-          <a:xfrm>
-            <a:off x="7983114" y="4169664"/>
-            <a:ext cx="451573" cy="384048"/>
-          </a:xfrm>
-          <a:prstGeom prst="rect">
-            <a:avLst/>
-          </a:prstGeom>
-          <a:noFill/>
-          <a:ln/>
-        </p:spPr>
-        <p:txBody>
-          <a:bodyPr wrap="square" lIns="0" tIns="0" rIns="0" bIns="0" rtlCol="0" anchor="ctr"/>
-          <a:lstStyle/>
-          <a:p>
-            <a:pPr algn="ctr" indent="0" marL="0">
-              <a:buNone/>
-            </a:pPr>
-            <a:r>
-              <a:rPr lang="en-US" sz="900" b="1" dirty="0">
-                <a:solidFill>
-                  <a:srgbClr val="9D174D"/>
-                </a:solidFill>
-                <a:latin typeface="Trebuchet MS" pitchFamily="34" charset="0"/>
-                <a:ea typeface="Trebuchet MS" pitchFamily="34" charset="-122"/>
-                <a:cs typeface="Trebuchet MS" pitchFamily="34" charset="-120"/>
-              </a:rPr>
-              <a:t>e</a:t>
-            </a:r>
-            <a:endParaRPr lang="en-US" sz="900" dirty="0"/>
           </a:p>
         </p:txBody>
       </p:sp>
@@ -26444,7 +26543,7 @@
                 <a:ea typeface="Calibri" pitchFamily="34" charset="-122"/>
                 <a:cs typeface="Calibri" pitchFamily="34" charset="-120"/>
               </a:rPr>
-              <a:t>look, see</a:t>
+              <a:t>to look</a:t>
             </a:r>
             <a:endParaRPr lang="en-US" sz="850" dirty="0"/>
           </a:p>
@@ -28148,7 +28247,7 @@
                 <a:ea typeface="Calibri" pitchFamily="34" charset="-122"/>
                 <a:cs typeface="Calibri" pitchFamily="34" charset="-120"/>
               </a:rPr>
-              <a:t>look, see</a:t>
+              <a:t>to look</a:t>
             </a:r>
             <a:endParaRPr lang="en-US" sz="850" dirty="0"/>
           </a:p>
@@ -29370,7 +29469,7 @@
                 <a:ea typeface="Calibri" pitchFamily="34" charset="-122"/>
                 <a:cs typeface="Calibri" pitchFamily="34" charset="-120"/>
               </a:rPr>
-              <a:t>look, see</a:t>
+              <a:t>to look</a:t>
             </a:r>
             <a:endParaRPr lang="en-US" sz="850" dirty="0"/>
           </a:p>
@@ -29846,8 +29945,8 @@
         </p:nvSpPr>
         <p:spPr>
           <a:xfrm>
-            <a:off x="1951828" y="4169664"/>
-            <a:ext cx="603504" cy="384048"/>
+            <a:off x="1951330" y="4169664"/>
+            <a:ext cx="676656" cy="384048"/>
           </a:xfrm>
           <a:prstGeom prst="rect">
             <a:avLst>
@@ -29873,8 +29972,8 @@
         </p:nvSpPr>
         <p:spPr>
           <a:xfrm>
-            <a:off x="1951828" y="4169664"/>
-            <a:ext cx="603504" cy="384048"/>
+            <a:off x="1951330" y="4169664"/>
+            <a:ext cx="676656" cy="384048"/>
           </a:xfrm>
           <a:prstGeom prst="rect">
             <a:avLst/>
@@ -29912,8 +30011,8 @@
         </p:nvSpPr>
         <p:spPr>
           <a:xfrm>
-            <a:off x="1951828" y="4572000"/>
-            <a:ext cx="603504" cy="219456"/>
+            <a:off x="1951330" y="4572000"/>
+            <a:ext cx="676656" cy="219456"/>
           </a:xfrm>
           <a:prstGeom prst="rect">
             <a:avLst/>
@@ -29951,8 +30050,8 @@
         </p:nvSpPr>
         <p:spPr>
           <a:xfrm>
-            <a:off x="2605209" y="4169664"/>
-            <a:ext cx="603504" cy="384048"/>
+            <a:off x="2677363" y="4169664"/>
+            <a:ext cx="676656" cy="384048"/>
           </a:xfrm>
           <a:prstGeom prst="rect">
             <a:avLst>
@@ -29978,8 +30077,8 @@
         </p:nvSpPr>
         <p:spPr>
           <a:xfrm>
-            <a:off x="2605209" y="4169664"/>
-            <a:ext cx="603504" cy="384048"/>
+            <a:off x="2677363" y="4169664"/>
+            <a:ext cx="676656" cy="384048"/>
           </a:xfrm>
           <a:prstGeom prst="rect">
             <a:avLst/>
@@ -30017,8 +30116,8 @@
         </p:nvSpPr>
         <p:spPr>
           <a:xfrm>
-            <a:off x="3258589" y="4169664"/>
-            <a:ext cx="603504" cy="384048"/>
+            <a:off x="3403397" y="4169664"/>
+            <a:ext cx="676656" cy="384048"/>
           </a:xfrm>
           <a:prstGeom prst="rect">
             <a:avLst>
@@ -30044,8 +30143,8 @@
         </p:nvSpPr>
         <p:spPr>
           <a:xfrm>
-            <a:off x="3258589" y="4169664"/>
-            <a:ext cx="603504" cy="384048"/>
+            <a:off x="3403397" y="4169664"/>
+            <a:ext cx="676656" cy="384048"/>
           </a:xfrm>
           <a:prstGeom prst="rect">
             <a:avLst/>
@@ -30077,53 +30176,14 @@
       </p:sp>
       <p:sp>
         <p:nvSpPr>
-          <p:cNvPr id="43" name="Text 41"/>
-          <p:cNvSpPr/>
-          <p:nvPr/>
-        </p:nvSpPr>
-        <p:spPr>
-          <a:xfrm>
-            <a:off x="3258589" y="4572000"/>
-            <a:ext cx="603504" cy="219456"/>
-          </a:xfrm>
-          <a:prstGeom prst="rect">
-            <a:avLst/>
-          </a:prstGeom>
-          <a:noFill/>
-          <a:ln/>
-        </p:spPr>
-        <p:txBody>
-          <a:bodyPr wrap="square" lIns="0" tIns="0" rIns="0" bIns="0" rtlCol="0" anchor="t"/>
-          <a:lstStyle/>
-          <a:p>
-            <a:pPr algn="ctr" indent="0" marL="0">
-              <a:buNone/>
-            </a:pPr>
-            <a:r>
-              <a:rPr lang="en-US" sz="750" i="1" dirty="0">
-                <a:solidFill>
-                  <a:srgbClr val="94A3B8"/>
-                </a:solidFill>
-                <a:latin typeface="Calibri" pitchFamily="34" charset="0"/>
-                <a:ea typeface="Calibri" pitchFamily="34" charset="-122"/>
-                <a:cs typeface="Calibri" pitchFamily="34" charset="-120"/>
-              </a:rPr>
-              <a:t>/k/</a:t>
-            </a:r>
-            <a:endParaRPr lang="en-US" sz="750" dirty="0"/>
-          </a:p>
-        </p:txBody>
-      </p:sp>
-      <p:sp>
-        <p:nvSpPr>
-          <p:cNvPr id="44" name="Shape 42"/>
-          <p:cNvSpPr/>
-          <p:nvPr/>
-        </p:nvSpPr>
-        <p:spPr>
-          <a:xfrm>
-            <a:off x="3911969" y="4169664"/>
-            <a:ext cx="603504" cy="384048"/>
+          <p:cNvPr id="43" name="Shape 41"/>
+          <p:cNvSpPr/>
+          <p:nvPr/>
+        </p:nvSpPr>
+        <p:spPr>
+          <a:xfrm>
+            <a:off x="4129430" y="4169664"/>
+            <a:ext cx="676656" cy="384048"/>
           </a:xfrm>
           <a:prstGeom prst="rect">
             <a:avLst>
@@ -30143,14 +30203,14 @@
       </p:sp>
       <p:sp>
         <p:nvSpPr>
-          <p:cNvPr id="45" name="Text 43"/>
-          <p:cNvSpPr/>
-          <p:nvPr/>
-        </p:nvSpPr>
-        <p:spPr>
-          <a:xfrm>
-            <a:off x="3911969" y="4169664"/>
-            <a:ext cx="603504" cy="384048"/>
+          <p:cNvPr id="44" name="Text 42"/>
+          <p:cNvSpPr/>
+          <p:nvPr/>
+        </p:nvSpPr>
+        <p:spPr>
+          <a:xfrm>
+            <a:off x="4129430" y="4169664"/>
+            <a:ext cx="676656" cy="384048"/>
           </a:xfrm>
           <a:prstGeom prst="rect">
             <a:avLst/>
@@ -30174,7 +30234,7 @@
                 <a:ea typeface="Trebuchet MS" pitchFamily="34" charset="-122"/>
                 <a:cs typeface="Trebuchet MS" pitchFamily="34" charset="-120"/>
               </a:rPr>
-              <a:t>u</a:t>
+              <a:t>um</a:t>
             </a:r>
             <a:endParaRPr lang="en-US" sz="900" dirty="0"/>
           </a:p>
@@ -30182,14 +30242,14 @@
       </p:sp>
       <p:sp>
         <p:nvSpPr>
-          <p:cNvPr id="46" name="Shape 44"/>
-          <p:cNvSpPr/>
-          <p:nvPr/>
-        </p:nvSpPr>
-        <p:spPr>
-          <a:xfrm>
-            <a:off x="4565350" y="4169664"/>
-            <a:ext cx="603504" cy="384048"/>
+          <p:cNvPr id="45" name="Shape 43"/>
+          <p:cNvSpPr/>
+          <p:nvPr/>
+        </p:nvSpPr>
+        <p:spPr>
+          <a:xfrm>
+            <a:off x="4855464" y="4169664"/>
+            <a:ext cx="676656" cy="384048"/>
           </a:xfrm>
           <a:prstGeom prst="rect">
             <a:avLst>
@@ -30209,14 +30269,14 @@
       </p:sp>
       <p:sp>
         <p:nvSpPr>
-          <p:cNvPr id="47" name="Text 45"/>
-          <p:cNvSpPr/>
-          <p:nvPr/>
-        </p:nvSpPr>
-        <p:spPr>
-          <a:xfrm>
-            <a:off x="4565350" y="4169664"/>
-            <a:ext cx="603504" cy="384048"/>
+          <p:cNvPr id="46" name="Text 44"/>
+          <p:cNvSpPr/>
+          <p:nvPr/>
+        </p:nvSpPr>
+        <p:spPr>
+          <a:xfrm>
+            <a:off x="4855464" y="4169664"/>
+            <a:ext cx="676656" cy="384048"/>
           </a:xfrm>
           <a:prstGeom prst="rect">
             <a:avLst/>
@@ -30240,7 +30300,7 @@
                 <a:ea typeface="Trebuchet MS" pitchFamily="34" charset="-122"/>
                 <a:cs typeface="Trebuchet MS" pitchFamily="34" charset="-120"/>
               </a:rPr>
-              <a:t>m</a:t>
+              <a:t>s</a:t>
             </a:r>
             <a:endParaRPr lang="en-US" sz="900" dirty="0"/>
           </a:p>
@@ -30248,14 +30308,14 @@
       </p:sp>
       <p:sp>
         <p:nvSpPr>
-          <p:cNvPr id="48" name="Shape 46"/>
-          <p:cNvSpPr/>
-          <p:nvPr/>
-        </p:nvSpPr>
-        <p:spPr>
-          <a:xfrm>
-            <a:off x="5218730" y="4169664"/>
-            <a:ext cx="603504" cy="384048"/>
+          <p:cNvPr id="47" name="Shape 45"/>
+          <p:cNvSpPr/>
+          <p:nvPr/>
+        </p:nvSpPr>
+        <p:spPr>
+          <a:xfrm>
+            <a:off x="5581498" y="4169664"/>
+            <a:ext cx="676656" cy="384048"/>
           </a:xfrm>
           <a:prstGeom prst="rect">
             <a:avLst>
@@ -30275,14 +30335,14 @@
       </p:sp>
       <p:sp>
         <p:nvSpPr>
-          <p:cNvPr id="49" name="Text 47"/>
-          <p:cNvSpPr/>
-          <p:nvPr/>
-        </p:nvSpPr>
-        <p:spPr>
-          <a:xfrm>
-            <a:off x="5218730" y="4169664"/>
-            <a:ext cx="603504" cy="384048"/>
+          <p:cNvPr id="48" name="Text 46"/>
+          <p:cNvSpPr/>
+          <p:nvPr/>
+        </p:nvSpPr>
+        <p:spPr>
+          <a:xfrm>
+            <a:off x="5581498" y="4169664"/>
+            <a:ext cx="676656" cy="384048"/>
           </a:xfrm>
           <a:prstGeom prst="rect">
             <a:avLst/>
@@ -30306,7 +30366,7 @@
                 <a:ea typeface="Trebuchet MS" pitchFamily="34" charset="-122"/>
                 <a:cs typeface="Trebuchet MS" pitchFamily="34" charset="-120"/>
               </a:rPr>
-              <a:t>s</a:t>
+              <a:t>p</a:t>
             </a:r>
             <a:endParaRPr lang="en-US" sz="900" dirty="0"/>
           </a:p>
@@ -30314,14 +30374,14 @@
       </p:sp>
       <p:sp>
         <p:nvSpPr>
-          <p:cNvPr id="50" name="Shape 48"/>
-          <p:cNvSpPr/>
-          <p:nvPr/>
-        </p:nvSpPr>
-        <p:spPr>
-          <a:xfrm>
-            <a:off x="5872111" y="4169664"/>
-            <a:ext cx="603504" cy="384048"/>
+          <p:cNvPr id="49" name="Shape 47"/>
+          <p:cNvSpPr/>
+          <p:nvPr/>
+        </p:nvSpPr>
+        <p:spPr>
+          <a:xfrm>
+            <a:off x="6307531" y="4169664"/>
+            <a:ext cx="676656" cy="384048"/>
           </a:xfrm>
           <a:prstGeom prst="rect">
             <a:avLst>
@@ -30341,14 +30401,14 @@
       </p:sp>
       <p:sp>
         <p:nvSpPr>
-          <p:cNvPr id="51" name="Text 49"/>
-          <p:cNvSpPr/>
-          <p:nvPr/>
-        </p:nvSpPr>
-        <p:spPr>
-          <a:xfrm>
-            <a:off x="5872111" y="4169664"/>
-            <a:ext cx="603504" cy="384048"/>
+          <p:cNvPr id="50" name="Text 48"/>
+          <p:cNvSpPr/>
+          <p:nvPr/>
+        </p:nvSpPr>
+        <p:spPr>
+          <a:xfrm>
+            <a:off x="6307531" y="4169664"/>
+            <a:ext cx="676656" cy="384048"/>
           </a:xfrm>
           <a:prstGeom prst="rect">
             <a:avLst/>
@@ -30372,7 +30432,7 @@
                 <a:ea typeface="Trebuchet MS" pitchFamily="34" charset="-122"/>
                 <a:cs typeface="Trebuchet MS" pitchFamily="34" charset="-120"/>
               </a:rPr>
-              <a:t>p</a:t>
+              <a:t>e</a:t>
             </a:r>
             <a:endParaRPr lang="en-US" sz="900" dirty="0"/>
           </a:p>
@@ -30380,14 +30440,14 @@
       </p:sp>
       <p:sp>
         <p:nvSpPr>
-          <p:cNvPr id="52" name="Shape 50"/>
-          <p:cNvSpPr/>
-          <p:nvPr/>
-        </p:nvSpPr>
-        <p:spPr>
-          <a:xfrm>
-            <a:off x="6525491" y="4169664"/>
-            <a:ext cx="603504" cy="384048"/>
+          <p:cNvPr id="51" name="Shape 49"/>
+          <p:cNvSpPr/>
+          <p:nvPr/>
+        </p:nvSpPr>
+        <p:spPr>
+          <a:xfrm>
+            <a:off x="7033565" y="4169664"/>
+            <a:ext cx="676656" cy="384048"/>
           </a:xfrm>
           <a:prstGeom prst="rect">
             <a:avLst>
@@ -30407,14 +30467,14 @@
       </p:sp>
       <p:sp>
         <p:nvSpPr>
-          <p:cNvPr id="53" name="Text 51"/>
-          <p:cNvSpPr/>
-          <p:nvPr/>
-        </p:nvSpPr>
-        <p:spPr>
-          <a:xfrm>
-            <a:off x="6525491" y="4169664"/>
-            <a:ext cx="603504" cy="384048"/>
+          <p:cNvPr id="52" name="Text 50"/>
+          <p:cNvSpPr/>
+          <p:nvPr/>
+        </p:nvSpPr>
+        <p:spPr>
+          <a:xfrm>
+            <a:off x="7033565" y="4169664"/>
+            <a:ext cx="676656" cy="384048"/>
           </a:xfrm>
           <a:prstGeom prst="rect">
             <a:avLst/>
@@ -30438,7 +30498,7 @@
                 <a:ea typeface="Trebuchet MS" pitchFamily="34" charset="-122"/>
                 <a:cs typeface="Trebuchet MS" pitchFamily="34" charset="-120"/>
               </a:rPr>
-              <a:t>e</a:t>
+              <a:t>c</a:t>
             </a:r>
             <a:endParaRPr lang="en-US" sz="900" dirty="0"/>
           </a:p>
@@ -30446,14 +30506,14 @@
       </p:sp>
       <p:sp>
         <p:nvSpPr>
-          <p:cNvPr id="54" name="Shape 52"/>
-          <p:cNvSpPr/>
-          <p:nvPr/>
-        </p:nvSpPr>
-        <p:spPr>
-          <a:xfrm>
-            <a:off x="7178871" y="4169664"/>
-            <a:ext cx="603504" cy="384048"/>
+          <p:cNvPr id="53" name="Shape 51"/>
+          <p:cNvSpPr/>
+          <p:nvPr/>
+        </p:nvSpPr>
+        <p:spPr>
+          <a:xfrm>
+            <a:off x="7759598" y="4169664"/>
+            <a:ext cx="676656" cy="384048"/>
           </a:xfrm>
           <a:prstGeom prst="rect">
             <a:avLst>
@@ -30473,80 +30533,14 @@
       </p:sp>
       <p:sp>
         <p:nvSpPr>
-          <p:cNvPr id="55" name="Text 53"/>
-          <p:cNvSpPr/>
-          <p:nvPr/>
-        </p:nvSpPr>
-        <p:spPr>
-          <a:xfrm>
-            <a:off x="7178871" y="4169664"/>
-            <a:ext cx="603504" cy="384048"/>
-          </a:xfrm>
-          <a:prstGeom prst="rect">
-            <a:avLst/>
-          </a:prstGeom>
-          <a:noFill/>
-          <a:ln/>
-        </p:spPr>
-        <p:txBody>
-          <a:bodyPr wrap="square" lIns="0" tIns="0" rIns="0" bIns="0" rtlCol="0" anchor="ctr"/>
-          <a:lstStyle/>
-          <a:p>
-            <a:pPr algn="ctr" indent="0" marL="0">
-              <a:buNone/>
-            </a:pPr>
-            <a:r>
-              <a:rPr lang="en-US" sz="900" b="1" dirty="0">
-                <a:solidFill>
-                  <a:srgbClr val="9D174D"/>
-                </a:solidFill>
-                <a:latin typeface="Trebuchet MS" pitchFamily="34" charset="0"/>
-                <a:ea typeface="Trebuchet MS" pitchFamily="34" charset="-122"/>
-                <a:cs typeface="Trebuchet MS" pitchFamily="34" charset="-120"/>
-              </a:rPr>
-              <a:t>c</a:t>
-            </a:r>
-            <a:endParaRPr lang="en-US" sz="900" dirty="0"/>
-          </a:p>
-        </p:txBody>
-      </p:sp>
-      <p:sp>
-        <p:nvSpPr>
-          <p:cNvPr id="56" name="Shape 54"/>
-          <p:cNvSpPr/>
-          <p:nvPr/>
-        </p:nvSpPr>
-        <p:spPr>
-          <a:xfrm>
-            <a:off x="7832252" y="4169664"/>
-            <a:ext cx="603504" cy="384048"/>
-          </a:xfrm>
-          <a:prstGeom prst="rect">
-            <a:avLst>
-              <a:gd name="adj" fmla="val 9524"/>
-            </a:avLst>
-          </a:prstGeom>
-          <a:solidFill>
-            <a:srgbClr val="FFFFFF"/>
-          </a:solidFill>
-          <a:ln w="12700">
-            <a:solidFill>
-              <a:srgbClr val="DB2777"/>
-            </a:solidFill>
-            <a:prstDash val="solid"/>
-          </a:ln>
-        </p:spPr>
-      </p:sp>
-      <p:sp>
-        <p:nvSpPr>
-          <p:cNvPr id="57" name="Text 55"/>
-          <p:cNvSpPr/>
-          <p:nvPr/>
-        </p:nvSpPr>
-        <p:spPr>
-          <a:xfrm>
-            <a:off x="7832252" y="4169664"/>
-            <a:ext cx="603504" cy="384048"/>
+          <p:cNvPr id="54" name="Text 52"/>
+          <p:cNvSpPr/>
+          <p:nvPr/>
+        </p:nvSpPr>
+        <p:spPr>
+          <a:xfrm>
+            <a:off x="7759598" y="4169664"/>
+            <a:ext cx="676656" cy="384048"/>
           </a:xfrm>
           <a:prstGeom prst="rect">
             <a:avLst/>
@@ -31001,7 +30995,7 @@
                 <a:ea typeface="Trebuchet MS" pitchFamily="34" charset="-122"/>
                 <a:cs typeface="Trebuchet MS" pitchFamily="34" charset="-120"/>
               </a:rPr>
-              <a:t>circumstances</a:t>
+              <a:t>circumlocution</a:t>
             </a:r>
             <a:endParaRPr lang="en-US" sz="2800" dirty="0"/>
           </a:p>
@@ -31828,7 +31822,7 @@
                 <a:ea typeface="Trebuchet MS" pitchFamily="34" charset="-122"/>
                 <a:cs typeface="Trebuchet MS" pitchFamily="34" charset="-120"/>
               </a:rPr>
-              <a:t>circumstances</a:t>
+              <a:t>circumlocution</a:t>
             </a:r>
             <a:endParaRPr lang="en-US" sz="2800" dirty="0"/>
           </a:p>
@@ -32079,7 +32073,7 @@
                 <a:ea typeface="Trebuchet MS" pitchFamily="34" charset="-122"/>
                 <a:cs typeface="Trebuchet MS" pitchFamily="34" charset="-120"/>
               </a:rPr>
-              <a:t>stance</a:t>
+              <a:t>loc</a:t>
             </a:r>
             <a:endParaRPr lang="en-US" sz="1300" dirty="0"/>
           </a:p>
@@ -32118,7 +32112,7 @@
                 <a:ea typeface="Calibri" pitchFamily="34" charset="-122"/>
                 <a:cs typeface="Calibri" pitchFamily="34" charset="-120"/>
               </a:rPr>
-              <a:t>stand, position</a:t>
+              <a:t>to speak</a:t>
             </a:r>
             <a:endParaRPr lang="en-US" sz="850" dirty="0"/>
           </a:p>
@@ -32191,7 +32185,7 @@
                 <a:ea typeface="Trebuchet MS" pitchFamily="34" charset="-122"/>
                 <a:cs typeface="Trebuchet MS" pitchFamily="34" charset="-120"/>
               </a:rPr>
-              <a:t>s</a:t>
+              <a:t>ution</a:t>
             </a:r>
             <a:endParaRPr lang="en-US" sz="1300" dirty="0"/>
           </a:p>
@@ -32230,7 +32224,7 @@
                 <a:ea typeface="Calibri" pitchFamily="34" charset="-122"/>
                 <a:cs typeface="Calibri" pitchFamily="34" charset="-120"/>
               </a:rPr>
-              <a:t>more than one</a:t>
+              <a:t>act or process of</a:t>
             </a:r>
             <a:endParaRPr lang="en-US" sz="850" dirty="0"/>
           </a:p>
@@ -32238,7 +32232,46 @@
       </p:sp>
       <p:sp>
         <p:nvSpPr>
-          <p:cNvPr id="25" name="Shape 23"/>
+          <p:cNvPr id="25" name="Text 23"/>
+          <p:cNvSpPr/>
+          <p:nvPr/>
+        </p:nvSpPr>
+        <p:spPr>
+          <a:xfrm>
+            <a:off x="6519672" y="2752344"/>
+            <a:ext cx="1828800" cy="182880"/>
+          </a:xfrm>
+          <a:prstGeom prst="rect">
+            <a:avLst/>
+          </a:prstGeom>
+          <a:noFill/>
+          <a:ln/>
+        </p:spPr>
+        <p:txBody>
+          <a:bodyPr wrap="square" lIns="0" tIns="0" rIns="0" bIns="0" rtlCol="0" anchor="t"/>
+          <a:lstStyle/>
+          <a:p>
+            <a:pPr algn="ctr" indent="0" marL="0">
+              <a:buNone/>
+            </a:pPr>
+            <a:r>
+              <a:rPr lang="en-US" sz="700" i="1" dirty="0">
+                <a:solidFill>
+                  <a:srgbClr val="94A3B8"/>
+                </a:solidFill>
+                <a:latin typeface="Calibri" pitchFamily="34" charset="0"/>
+                <a:ea typeface="Calibri" pitchFamily="34" charset="-122"/>
+                <a:cs typeface="Calibri" pitchFamily="34" charset="-120"/>
+              </a:rPr>
+              <a:t>ti → /sh/ before vowel</a:t>
+            </a:r>
+            <a:endParaRPr lang="en-US" sz="700" dirty="0"/>
+          </a:p>
+        </p:txBody>
+      </p:sp>
+      <p:sp>
+        <p:nvSpPr>
+          <p:cNvPr id="26" name="Shape 24"/>
           <p:cNvSpPr/>
           <p:nvPr/>
         </p:nvSpPr>
@@ -32265,7 +32298,7 @@
       </p:sp>
       <p:sp>
         <p:nvSpPr>
-          <p:cNvPr id="26" name="Text 24"/>
+          <p:cNvPr id="27" name="Text 25"/>
           <p:cNvSpPr/>
           <p:nvPr/>
         </p:nvSpPr>
@@ -32304,7 +32337,7 @@
       </p:sp>
       <p:sp>
         <p:nvSpPr>
-          <p:cNvPr id="27" name="Shape 25"/>
+          <p:cNvPr id="28" name="Shape 26"/>
           <p:cNvSpPr/>
           <p:nvPr/>
         </p:nvSpPr>
@@ -32331,7 +32364,7 @@
       </p:sp>
       <p:sp>
         <p:nvSpPr>
-          <p:cNvPr id="28" name="Text 26"/>
+          <p:cNvPr id="29" name="Text 27"/>
           <p:cNvSpPr/>
           <p:nvPr/>
         </p:nvSpPr>
@@ -32370,7 +32403,7 @@
       </p:sp>
       <p:sp>
         <p:nvSpPr>
-          <p:cNvPr id="29" name="Shape 27"/>
+          <p:cNvPr id="30" name="Shape 28"/>
           <p:cNvSpPr/>
           <p:nvPr/>
         </p:nvSpPr>
@@ -32397,7 +32430,7 @@
       </p:sp>
       <p:sp>
         <p:nvSpPr>
-          <p:cNvPr id="30" name="Text 28"/>
+          <p:cNvPr id="31" name="Text 29"/>
           <p:cNvSpPr/>
           <p:nvPr/>
         </p:nvSpPr>
@@ -32436,7 +32469,7 @@
       </p:sp>
       <p:sp>
         <p:nvSpPr>
-          <p:cNvPr id="31" name="Shape 29"/>
+          <p:cNvPr id="32" name="Shape 30"/>
           <p:cNvSpPr/>
           <p:nvPr/>
         </p:nvSpPr>
@@ -32463,7 +32496,7 @@
       </p:sp>
       <p:sp>
         <p:nvSpPr>
-          <p:cNvPr id="32" name="Text 30"/>
+          <p:cNvPr id="33" name="Text 31"/>
           <p:cNvSpPr/>
           <p:nvPr/>
         </p:nvSpPr>
@@ -32925,7 +32958,7 @@
                 <a:ea typeface="Trebuchet MS" pitchFamily="34" charset="-122"/>
                 <a:cs typeface="Trebuchet MS" pitchFamily="34" charset="-120"/>
               </a:rPr>
-              <a:t>circumstances</a:t>
+              <a:t>circumlocution</a:t>
             </a:r>
             <a:endParaRPr lang="en-US" sz="2800" dirty="0"/>
           </a:p>
@@ -33176,7 +33209,7 @@
                 <a:ea typeface="Trebuchet MS" pitchFamily="34" charset="-122"/>
                 <a:cs typeface="Trebuchet MS" pitchFamily="34" charset="-120"/>
               </a:rPr>
-              <a:t>stance</a:t>
+              <a:t>loc</a:t>
             </a:r>
             <a:endParaRPr lang="en-US" sz="1300" dirty="0"/>
           </a:p>
@@ -33215,7 +33248,7 @@
                 <a:ea typeface="Calibri" pitchFamily="34" charset="-122"/>
                 <a:cs typeface="Calibri" pitchFamily="34" charset="-120"/>
               </a:rPr>
-              <a:t>stand, position</a:t>
+              <a:t>to speak</a:t>
             </a:r>
             <a:endParaRPr lang="en-US" sz="850" dirty="0"/>
           </a:p>
@@ -33288,7 +33321,7 @@
                 <a:ea typeface="Trebuchet MS" pitchFamily="34" charset="-122"/>
                 <a:cs typeface="Trebuchet MS" pitchFamily="34" charset="-120"/>
               </a:rPr>
-              <a:t>s</a:t>
+              <a:t>ution</a:t>
             </a:r>
             <a:endParaRPr lang="en-US" sz="1300" dirty="0"/>
           </a:p>
@@ -33327,7 +33360,7 @@
                 <a:ea typeface="Calibri" pitchFamily="34" charset="-122"/>
                 <a:cs typeface="Calibri" pitchFamily="34" charset="-120"/>
               </a:rPr>
-              <a:t>more than one</a:t>
+              <a:t>act or process of</a:t>
             </a:r>
             <a:endParaRPr lang="en-US" sz="850" dirty="0"/>
           </a:p>
@@ -33335,7 +33368,46 @@
       </p:sp>
       <p:sp>
         <p:nvSpPr>
-          <p:cNvPr id="25" name="Shape 23"/>
+          <p:cNvPr id="25" name="Text 23"/>
+          <p:cNvSpPr/>
+          <p:nvPr/>
+        </p:nvSpPr>
+        <p:spPr>
+          <a:xfrm>
+            <a:off x="6519672" y="2752344"/>
+            <a:ext cx="1828800" cy="182880"/>
+          </a:xfrm>
+          <a:prstGeom prst="rect">
+            <a:avLst/>
+          </a:prstGeom>
+          <a:noFill/>
+          <a:ln/>
+        </p:spPr>
+        <p:txBody>
+          <a:bodyPr wrap="square" lIns="0" tIns="0" rIns="0" bIns="0" rtlCol="0" anchor="t"/>
+          <a:lstStyle/>
+          <a:p>
+            <a:pPr algn="ctr" indent="0" marL="0">
+              <a:buNone/>
+            </a:pPr>
+            <a:r>
+              <a:rPr lang="en-US" sz="700" i="1" dirty="0">
+                <a:solidFill>
+                  <a:srgbClr val="94A3B8"/>
+                </a:solidFill>
+                <a:latin typeface="Calibri" pitchFamily="34" charset="0"/>
+                <a:ea typeface="Calibri" pitchFamily="34" charset="-122"/>
+                <a:cs typeface="Calibri" pitchFamily="34" charset="-120"/>
+              </a:rPr>
+              <a:t>ti → /sh/ before vowel</a:t>
+            </a:r>
+            <a:endParaRPr lang="en-US" sz="700" dirty="0"/>
+          </a:p>
+        </p:txBody>
+      </p:sp>
+      <p:sp>
+        <p:nvSpPr>
+          <p:cNvPr id="26" name="Shape 24"/>
           <p:cNvSpPr/>
           <p:nvPr/>
         </p:nvSpPr>
@@ -33362,7 +33434,7 @@
       </p:sp>
       <p:sp>
         <p:nvSpPr>
-          <p:cNvPr id="26" name="Text 24"/>
+          <p:cNvPr id="27" name="Text 25"/>
           <p:cNvSpPr/>
           <p:nvPr/>
         </p:nvSpPr>
@@ -33401,7 +33473,7 @@
       </p:sp>
       <p:sp>
         <p:nvSpPr>
-          <p:cNvPr id="27" name="Shape 25"/>
+          <p:cNvPr id="28" name="Shape 26"/>
           <p:cNvSpPr/>
           <p:nvPr/>
         </p:nvSpPr>
@@ -33428,14 +33500,14 @@
       </p:sp>
       <p:sp>
         <p:nvSpPr>
-          <p:cNvPr id="28" name="Shape 26"/>
-          <p:cNvSpPr/>
-          <p:nvPr/>
-        </p:nvSpPr>
-        <p:spPr>
-          <a:xfrm>
-            <a:off x="1975104" y="3364992"/>
-            <a:ext cx="1554480" cy="475488"/>
+          <p:cNvPr id="29" name="Shape 27"/>
+          <p:cNvSpPr/>
+          <p:nvPr/>
+        </p:nvSpPr>
+        <p:spPr>
+          <a:xfrm>
+            <a:off x="1978152" y="3364992"/>
+            <a:ext cx="1225296" cy="475488"/>
           </a:xfrm>
           <a:prstGeom prst="rect">
             <a:avLst>
@@ -33455,14 +33527,14 @@
       </p:sp>
       <p:sp>
         <p:nvSpPr>
-          <p:cNvPr id="29" name="Text 27"/>
-          <p:cNvSpPr/>
-          <p:nvPr/>
-        </p:nvSpPr>
-        <p:spPr>
-          <a:xfrm>
-            <a:off x="1975104" y="3364992"/>
-            <a:ext cx="1554480" cy="475488"/>
+          <p:cNvPr id="30" name="Text 28"/>
+          <p:cNvSpPr/>
+          <p:nvPr/>
+        </p:nvSpPr>
+        <p:spPr>
+          <a:xfrm>
+            <a:off x="1978152" y="3364992"/>
+            <a:ext cx="1225296" cy="475488"/>
           </a:xfrm>
           <a:prstGeom prst="rect">
             <a:avLst/>
@@ -33494,14 +33566,14 @@
       </p:sp>
       <p:sp>
         <p:nvSpPr>
-          <p:cNvPr id="30" name="Text 28"/>
-          <p:cNvSpPr/>
-          <p:nvPr/>
-        </p:nvSpPr>
-        <p:spPr>
-          <a:xfrm>
-            <a:off x="3529584" y="3364992"/>
-            <a:ext cx="73152" cy="475488"/>
+          <p:cNvPr id="31" name="Text 29"/>
+          <p:cNvSpPr/>
+          <p:nvPr/>
+        </p:nvSpPr>
+        <p:spPr>
+          <a:xfrm>
+            <a:off x="3203448" y="3364992"/>
+            <a:ext cx="76200" cy="475488"/>
           </a:xfrm>
           <a:prstGeom prst="rect">
             <a:avLst/>
@@ -33533,14 +33605,14 @@
       </p:sp>
       <p:sp>
         <p:nvSpPr>
-          <p:cNvPr id="31" name="Shape 29"/>
-          <p:cNvSpPr/>
-          <p:nvPr/>
-        </p:nvSpPr>
-        <p:spPr>
-          <a:xfrm>
-            <a:off x="3602736" y="3364992"/>
-            <a:ext cx="1554480" cy="475488"/>
+          <p:cNvPr id="32" name="Shape 30"/>
+          <p:cNvSpPr/>
+          <p:nvPr/>
+        </p:nvSpPr>
+        <p:spPr>
+          <a:xfrm>
+            <a:off x="3279648" y="3364992"/>
+            <a:ext cx="1225296" cy="475488"/>
           </a:xfrm>
           <a:prstGeom prst="rect">
             <a:avLst>
@@ -33560,14 +33632,14 @@
       </p:sp>
       <p:sp>
         <p:nvSpPr>
-          <p:cNvPr id="32" name="Text 30"/>
-          <p:cNvSpPr/>
-          <p:nvPr/>
-        </p:nvSpPr>
-        <p:spPr>
-          <a:xfrm>
-            <a:off x="3602736" y="3364992"/>
-            <a:ext cx="1554480" cy="475488"/>
+          <p:cNvPr id="33" name="Text 31"/>
+          <p:cNvSpPr/>
+          <p:nvPr/>
+        </p:nvSpPr>
+        <p:spPr>
+          <a:xfrm>
+            <a:off x="3279648" y="3364992"/>
+            <a:ext cx="1225296" cy="475488"/>
           </a:xfrm>
           <a:prstGeom prst="rect">
             <a:avLst/>
@@ -33599,14 +33671,14 @@
       </p:sp>
       <p:sp>
         <p:nvSpPr>
-          <p:cNvPr id="33" name="Text 31"/>
-          <p:cNvSpPr/>
-          <p:nvPr/>
-        </p:nvSpPr>
-        <p:spPr>
-          <a:xfrm>
-            <a:off x="5157216" y="3364992"/>
-            <a:ext cx="73152" cy="475488"/>
+          <p:cNvPr id="34" name="Text 32"/>
+          <p:cNvSpPr/>
+          <p:nvPr/>
+        </p:nvSpPr>
+        <p:spPr>
+          <a:xfrm>
+            <a:off x="4504944" y="3364992"/>
+            <a:ext cx="76200" cy="475488"/>
           </a:xfrm>
           <a:prstGeom prst="rect">
             <a:avLst/>
@@ -33638,14 +33710,14 @@
       </p:sp>
       <p:sp>
         <p:nvSpPr>
-          <p:cNvPr id="34" name="Shape 32"/>
-          <p:cNvSpPr/>
-          <p:nvPr/>
-        </p:nvSpPr>
-        <p:spPr>
-          <a:xfrm>
-            <a:off x="5230368" y="3364992"/>
-            <a:ext cx="1554480" cy="475488"/>
+          <p:cNvPr id="35" name="Shape 33"/>
+          <p:cNvSpPr/>
+          <p:nvPr/>
+        </p:nvSpPr>
+        <p:spPr>
+          <a:xfrm>
+            <a:off x="4581144" y="3364992"/>
+            <a:ext cx="1225296" cy="475488"/>
           </a:xfrm>
           <a:prstGeom prst="rect">
             <a:avLst>
@@ -33665,14 +33737,14 @@
       </p:sp>
       <p:sp>
         <p:nvSpPr>
-          <p:cNvPr id="35" name="Text 33"/>
-          <p:cNvSpPr/>
-          <p:nvPr/>
-        </p:nvSpPr>
-        <p:spPr>
-          <a:xfrm>
-            <a:off x="5230368" y="3364992"/>
-            <a:ext cx="1554480" cy="475488"/>
+          <p:cNvPr id="36" name="Text 34"/>
+          <p:cNvSpPr/>
+          <p:nvPr/>
+        </p:nvSpPr>
+        <p:spPr>
+          <a:xfrm>
+            <a:off x="4581144" y="3364992"/>
+            <a:ext cx="1225296" cy="475488"/>
           </a:xfrm>
           <a:prstGeom prst="rect">
             <a:avLst/>
@@ -33696,7 +33768,7 @@
                 <a:ea typeface="Trebuchet MS" pitchFamily="34" charset="-122"/>
                 <a:cs typeface="Trebuchet MS" pitchFamily="34" charset="-120"/>
               </a:rPr>
-              <a:t>stanc</a:t>
+              <a:t>lo</a:t>
             </a:r>
             <a:endParaRPr lang="en-US" sz="1400" dirty="0"/>
           </a:p>
@@ -33704,14 +33776,14 @@
       </p:sp>
       <p:sp>
         <p:nvSpPr>
-          <p:cNvPr id="36" name="Text 34"/>
-          <p:cNvSpPr/>
-          <p:nvPr/>
-        </p:nvSpPr>
-        <p:spPr>
-          <a:xfrm>
-            <a:off x="6784848" y="3364992"/>
-            <a:ext cx="73152" cy="475488"/>
+          <p:cNvPr id="37" name="Text 35"/>
+          <p:cNvSpPr/>
+          <p:nvPr/>
+        </p:nvSpPr>
+        <p:spPr>
+          <a:xfrm>
+            <a:off x="5806440" y="3364992"/>
+            <a:ext cx="76200" cy="475488"/>
           </a:xfrm>
           <a:prstGeom prst="rect">
             <a:avLst/>
@@ -33743,14 +33815,14 @@
       </p:sp>
       <p:sp>
         <p:nvSpPr>
-          <p:cNvPr id="37" name="Shape 35"/>
-          <p:cNvSpPr/>
-          <p:nvPr/>
-        </p:nvSpPr>
-        <p:spPr>
-          <a:xfrm>
-            <a:off x="6858000" y="3364992"/>
-            <a:ext cx="1554480" cy="475488"/>
+          <p:cNvPr id="38" name="Shape 36"/>
+          <p:cNvSpPr/>
+          <p:nvPr/>
+        </p:nvSpPr>
+        <p:spPr>
+          <a:xfrm>
+            <a:off x="5882640" y="3364992"/>
+            <a:ext cx="1225296" cy="475488"/>
           </a:xfrm>
           <a:prstGeom prst="rect">
             <a:avLst>
@@ -33770,14 +33842,14 @@
       </p:sp>
       <p:sp>
         <p:nvSpPr>
-          <p:cNvPr id="38" name="Text 36"/>
-          <p:cNvSpPr/>
-          <p:nvPr/>
-        </p:nvSpPr>
-        <p:spPr>
-          <a:xfrm>
-            <a:off x="6858000" y="3364992"/>
-            <a:ext cx="1554480" cy="475488"/>
+          <p:cNvPr id="39" name="Text 37"/>
+          <p:cNvSpPr/>
+          <p:nvPr/>
+        </p:nvSpPr>
+        <p:spPr>
+          <a:xfrm>
+            <a:off x="5882640" y="3364992"/>
+            <a:ext cx="1225296" cy="475488"/>
           </a:xfrm>
           <a:prstGeom prst="rect">
             <a:avLst/>
@@ -33801,7 +33873,7 @@
                 <a:ea typeface="Trebuchet MS" pitchFamily="34" charset="-122"/>
                 <a:cs typeface="Trebuchet MS" pitchFamily="34" charset="-120"/>
               </a:rPr>
-              <a:t>es</a:t>
+              <a:t>cu</a:t>
             </a:r>
             <a:endParaRPr lang="en-US" sz="1400" dirty="0"/>
           </a:p>
@@ -33809,7 +33881,112 @@
       </p:sp>
       <p:sp>
         <p:nvSpPr>
-          <p:cNvPr id="39" name="Shape 37"/>
+          <p:cNvPr id="40" name="Text 38"/>
+          <p:cNvSpPr/>
+          <p:nvPr/>
+        </p:nvSpPr>
+        <p:spPr>
+          <a:xfrm>
+            <a:off x="7107936" y="3364992"/>
+            <a:ext cx="76200" cy="475488"/>
+          </a:xfrm>
+          <a:prstGeom prst="rect">
+            <a:avLst/>
+          </a:prstGeom>
+          <a:noFill/>
+          <a:ln/>
+        </p:spPr>
+        <p:txBody>
+          <a:bodyPr wrap="square" lIns="0" tIns="0" rIns="0" bIns="0" rtlCol="0" anchor="ctr"/>
+          <a:lstStyle/>
+          <a:p>
+            <a:pPr algn="ctr" indent="0" marL="0">
+              <a:buNone/>
+            </a:pPr>
+            <a:r>
+              <a:rPr lang="en-US" sz="1600" b="1" dirty="0">
+                <a:solidFill>
+                  <a:srgbClr val="0D9488"/>
+                </a:solidFill>
+                <a:latin typeface="Trebuchet MS" pitchFamily="34" charset="0"/>
+                <a:ea typeface="Trebuchet MS" pitchFamily="34" charset="-122"/>
+                <a:cs typeface="Trebuchet MS" pitchFamily="34" charset="-120"/>
+              </a:rPr>
+              <a:t>·</a:t>
+            </a:r>
+            <a:endParaRPr lang="en-US" sz="1600" dirty="0"/>
+          </a:p>
+        </p:txBody>
+      </p:sp>
+      <p:sp>
+        <p:nvSpPr>
+          <p:cNvPr id="41" name="Shape 39"/>
+          <p:cNvSpPr/>
+          <p:nvPr/>
+        </p:nvSpPr>
+        <p:spPr>
+          <a:xfrm>
+            <a:off x="7184136" y="3364992"/>
+            <a:ext cx="1225296" cy="475488"/>
+          </a:xfrm>
+          <a:prstGeom prst="rect">
+            <a:avLst>
+              <a:gd name="adj" fmla="val 9615"/>
+            </a:avLst>
+          </a:prstGeom>
+          <a:solidFill>
+            <a:srgbClr val="FFFFFF"/>
+          </a:solidFill>
+          <a:ln w="12700">
+            <a:solidFill>
+              <a:srgbClr val="0D9488"/>
+            </a:solidFill>
+            <a:prstDash val="solid"/>
+          </a:ln>
+        </p:spPr>
+      </p:sp>
+      <p:sp>
+        <p:nvSpPr>
+          <p:cNvPr id="42" name="Text 40"/>
+          <p:cNvSpPr/>
+          <p:nvPr/>
+        </p:nvSpPr>
+        <p:spPr>
+          <a:xfrm>
+            <a:off x="7184136" y="3364992"/>
+            <a:ext cx="1225296" cy="475488"/>
+          </a:xfrm>
+          <a:prstGeom prst="rect">
+            <a:avLst/>
+          </a:prstGeom>
+          <a:noFill/>
+          <a:ln/>
+        </p:spPr>
+        <p:txBody>
+          <a:bodyPr wrap="square" lIns="0" tIns="0" rIns="0" bIns="0" rtlCol="0" anchor="ctr"/>
+          <a:lstStyle/>
+          <a:p>
+            <a:pPr algn="ctr" indent="0" marL="0">
+              <a:buNone/>
+            </a:pPr>
+            <a:r>
+              <a:rPr lang="en-US" sz="1400" b="1" dirty="0">
+                <a:solidFill>
+                  <a:srgbClr val="0D9488"/>
+                </a:solidFill>
+                <a:latin typeface="Trebuchet MS" pitchFamily="34" charset="0"/>
+                <a:ea typeface="Trebuchet MS" pitchFamily="34" charset="-122"/>
+                <a:cs typeface="Trebuchet MS" pitchFamily="34" charset="-120"/>
+              </a:rPr>
+              <a:t>tion</a:t>
+            </a:r>
+            <a:endParaRPr lang="en-US" sz="1400" dirty="0"/>
+          </a:p>
+        </p:txBody>
+      </p:sp>
+      <p:sp>
+        <p:nvSpPr>
+          <p:cNvPr id="43" name="Shape 41"/>
           <p:cNvSpPr/>
           <p:nvPr/>
         </p:nvSpPr>
@@ -33836,7 +34013,7 @@
       </p:sp>
       <p:sp>
         <p:nvSpPr>
-          <p:cNvPr id="40" name="Text 38"/>
+          <p:cNvPr id="44" name="Text 42"/>
           <p:cNvSpPr/>
           <p:nvPr/>
         </p:nvSpPr>
@@ -33875,7 +34052,7 @@
       </p:sp>
       <p:sp>
         <p:nvSpPr>
-          <p:cNvPr id="41" name="Shape 39"/>
+          <p:cNvPr id="45" name="Shape 43"/>
           <p:cNvSpPr/>
           <p:nvPr/>
         </p:nvSpPr>
@@ -33902,7 +34079,7 @@
       </p:sp>
       <p:sp>
         <p:nvSpPr>
-          <p:cNvPr id="42" name="Text 40"/>
+          <p:cNvPr id="46" name="Text 44"/>
           <p:cNvSpPr/>
           <p:nvPr/>
         </p:nvSpPr>
@@ -34364,7 +34541,7 @@
                 <a:ea typeface="Trebuchet MS" pitchFamily="34" charset="-122"/>
                 <a:cs typeface="Trebuchet MS" pitchFamily="34" charset="-120"/>
               </a:rPr>
-              <a:t>circumstances</a:t>
+              <a:t>circumlocution</a:t>
             </a:r>
             <a:endParaRPr lang="en-US" sz="2800" dirty="0"/>
           </a:p>
@@ -34615,7 +34792,7 @@
                 <a:ea typeface="Trebuchet MS" pitchFamily="34" charset="-122"/>
                 <a:cs typeface="Trebuchet MS" pitchFamily="34" charset="-120"/>
               </a:rPr>
-              <a:t>stance</a:t>
+              <a:t>loc</a:t>
             </a:r>
             <a:endParaRPr lang="en-US" sz="1300" dirty="0"/>
           </a:p>
@@ -34654,7 +34831,7 @@
                 <a:ea typeface="Calibri" pitchFamily="34" charset="-122"/>
                 <a:cs typeface="Calibri" pitchFamily="34" charset="-120"/>
               </a:rPr>
-              <a:t>stand, position</a:t>
+              <a:t>to speak</a:t>
             </a:r>
             <a:endParaRPr lang="en-US" sz="850" dirty="0"/>
           </a:p>
@@ -34727,7 +34904,7 @@
                 <a:ea typeface="Trebuchet MS" pitchFamily="34" charset="-122"/>
                 <a:cs typeface="Trebuchet MS" pitchFamily="34" charset="-120"/>
               </a:rPr>
-              <a:t>s</a:t>
+              <a:t>ution</a:t>
             </a:r>
             <a:endParaRPr lang="en-US" sz="1300" dirty="0"/>
           </a:p>
@@ -34766,7 +34943,7 @@
                 <a:ea typeface="Calibri" pitchFamily="34" charset="-122"/>
                 <a:cs typeface="Calibri" pitchFamily="34" charset="-120"/>
               </a:rPr>
-              <a:t>more than one</a:t>
+              <a:t>act or process of</a:t>
             </a:r>
             <a:endParaRPr lang="en-US" sz="850" dirty="0"/>
           </a:p>
@@ -34774,7 +34951,46 @@
       </p:sp>
       <p:sp>
         <p:nvSpPr>
-          <p:cNvPr id="25" name="Shape 23"/>
+          <p:cNvPr id="25" name="Text 23"/>
+          <p:cNvSpPr/>
+          <p:nvPr/>
+        </p:nvSpPr>
+        <p:spPr>
+          <a:xfrm>
+            <a:off x="6519672" y="2752344"/>
+            <a:ext cx="1828800" cy="182880"/>
+          </a:xfrm>
+          <a:prstGeom prst="rect">
+            <a:avLst/>
+          </a:prstGeom>
+          <a:noFill/>
+          <a:ln/>
+        </p:spPr>
+        <p:txBody>
+          <a:bodyPr wrap="square" lIns="0" tIns="0" rIns="0" bIns="0" rtlCol="0" anchor="t"/>
+          <a:lstStyle/>
+          <a:p>
+            <a:pPr algn="ctr" indent="0" marL="0">
+              <a:buNone/>
+            </a:pPr>
+            <a:r>
+              <a:rPr lang="en-US" sz="700" i="1" dirty="0">
+                <a:solidFill>
+                  <a:srgbClr val="94A3B8"/>
+                </a:solidFill>
+                <a:latin typeface="Calibri" pitchFamily="34" charset="0"/>
+                <a:ea typeface="Calibri" pitchFamily="34" charset="-122"/>
+                <a:cs typeface="Calibri" pitchFamily="34" charset="-120"/>
+              </a:rPr>
+              <a:t>ti → /sh/ before vowel</a:t>
+            </a:r>
+            <a:endParaRPr lang="en-US" sz="700" dirty="0"/>
+          </a:p>
+        </p:txBody>
+      </p:sp>
+      <p:sp>
+        <p:nvSpPr>
+          <p:cNvPr id="26" name="Shape 24"/>
           <p:cNvSpPr/>
           <p:nvPr/>
         </p:nvSpPr>
@@ -34801,7 +35017,7 @@
       </p:sp>
       <p:sp>
         <p:nvSpPr>
-          <p:cNvPr id="26" name="Text 24"/>
+          <p:cNvPr id="27" name="Text 25"/>
           <p:cNvSpPr/>
           <p:nvPr/>
         </p:nvSpPr>
@@ -34840,7 +35056,7 @@
       </p:sp>
       <p:sp>
         <p:nvSpPr>
-          <p:cNvPr id="27" name="Shape 25"/>
+          <p:cNvPr id="28" name="Shape 26"/>
           <p:cNvSpPr/>
           <p:nvPr/>
         </p:nvSpPr>
@@ -34867,14 +35083,14 @@
       </p:sp>
       <p:sp>
         <p:nvSpPr>
-          <p:cNvPr id="28" name="Shape 26"/>
-          <p:cNvSpPr/>
-          <p:nvPr/>
-        </p:nvSpPr>
-        <p:spPr>
-          <a:xfrm>
-            <a:off x="1975104" y="3364992"/>
-            <a:ext cx="1554480" cy="475488"/>
+          <p:cNvPr id="29" name="Shape 27"/>
+          <p:cNvSpPr/>
+          <p:nvPr/>
+        </p:nvSpPr>
+        <p:spPr>
+          <a:xfrm>
+            <a:off x="1978152" y="3364992"/>
+            <a:ext cx="1225296" cy="475488"/>
           </a:xfrm>
           <a:prstGeom prst="rect">
             <a:avLst>
@@ -34894,14 +35110,14 @@
       </p:sp>
       <p:sp>
         <p:nvSpPr>
-          <p:cNvPr id="29" name="Text 27"/>
-          <p:cNvSpPr/>
-          <p:nvPr/>
-        </p:nvSpPr>
-        <p:spPr>
-          <a:xfrm>
-            <a:off x="1975104" y="3364992"/>
-            <a:ext cx="1554480" cy="475488"/>
+          <p:cNvPr id="30" name="Text 28"/>
+          <p:cNvSpPr/>
+          <p:nvPr/>
+        </p:nvSpPr>
+        <p:spPr>
+          <a:xfrm>
+            <a:off x="1978152" y="3364992"/>
+            <a:ext cx="1225296" cy="475488"/>
           </a:xfrm>
           <a:prstGeom prst="rect">
             <a:avLst/>
@@ -34933,14 +35149,14 @@
       </p:sp>
       <p:sp>
         <p:nvSpPr>
-          <p:cNvPr id="30" name="Text 28"/>
-          <p:cNvSpPr/>
-          <p:nvPr/>
-        </p:nvSpPr>
-        <p:spPr>
-          <a:xfrm>
-            <a:off x="3529584" y="3364992"/>
-            <a:ext cx="73152" cy="475488"/>
+          <p:cNvPr id="31" name="Text 29"/>
+          <p:cNvSpPr/>
+          <p:nvPr/>
+        </p:nvSpPr>
+        <p:spPr>
+          <a:xfrm>
+            <a:off x="3203448" y="3364992"/>
+            <a:ext cx="76200" cy="475488"/>
           </a:xfrm>
           <a:prstGeom prst="rect">
             <a:avLst/>
@@ -34972,14 +35188,14 @@
       </p:sp>
       <p:sp>
         <p:nvSpPr>
-          <p:cNvPr id="31" name="Shape 29"/>
-          <p:cNvSpPr/>
-          <p:nvPr/>
-        </p:nvSpPr>
-        <p:spPr>
-          <a:xfrm>
-            <a:off x="3602736" y="3364992"/>
-            <a:ext cx="1554480" cy="475488"/>
+          <p:cNvPr id="32" name="Shape 30"/>
+          <p:cNvSpPr/>
+          <p:nvPr/>
+        </p:nvSpPr>
+        <p:spPr>
+          <a:xfrm>
+            <a:off x="3279648" y="3364992"/>
+            <a:ext cx="1225296" cy="475488"/>
           </a:xfrm>
           <a:prstGeom prst="rect">
             <a:avLst>
@@ -34999,14 +35215,14 @@
       </p:sp>
       <p:sp>
         <p:nvSpPr>
-          <p:cNvPr id="32" name="Text 30"/>
-          <p:cNvSpPr/>
-          <p:nvPr/>
-        </p:nvSpPr>
-        <p:spPr>
-          <a:xfrm>
-            <a:off x="3602736" y="3364992"/>
-            <a:ext cx="1554480" cy="475488"/>
+          <p:cNvPr id="33" name="Text 31"/>
+          <p:cNvSpPr/>
+          <p:nvPr/>
+        </p:nvSpPr>
+        <p:spPr>
+          <a:xfrm>
+            <a:off x="3279648" y="3364992"/>
+            <a:ext cx="1225296" cy="475488"/>
           </a:xfrm>
           <a:prstGeom prst="rect">
             <a:avLst/>
@@ -35038,14 +35254,14 @@
       </p:sp>
       <p:sp>
         <p:nvSpPr>
-          <p:cNvPr id="33" name="Text 31"/>
-          <p:cNvSpPr/>
-          <p:nvPr/>
-        </p:nvSpPr>
-        <p:spPr>
-          <a:xfrm>
-            <a:off x="5157216" y="3364992"/>
-            <a:ext cx="73152" cy="475488"/>
+          <p:cNvPr id="34" name="Text 32"/>
+          <p:cNvSpPr/>
+          <p:nvPr/>
+        </p:nvSpPr>
+        <p:spPr>
+          <a:xfrm>
+            <a:off x="4504944" y="3364992"/>
+            <a:ext cx="76200" cy="475488"/>
           </a:xfrm>
           <a:prstGeom prst="rect">
             <a:avLst/>
@@ -35077,14 +35293,14 @@
       </p:sp>
       <p:sp>
         <p:nvSpPr>
-          <p:cNvPr id="34" name="Shape 32"/>
-          <p:cNvSpPr/>
-          <p:nvPr/>
-        </p:nvSpPr>
-        <p:spPr>
-          <a:xfrm>
-            <a:off x="5230368" y="3364992"/>
-            <a:ext cx="1554480" cy="475488"/>
+          <p:cNvPr id="35" name="Shape 33"/>
+          <p:cNvSpPr/>
+          <p:nvPr/>
+        </p:nvSpPr>
+        <p:spPr>
+          <a:xfrm>
+            <a:off x="4581144" y="3364992"/>
+            <a:ext cx="1225296" cy="475488"/>
           </a:xfrm>
           <a:prstGeom prst="rect">
             <a:avLst>
@@ -35104,14 +35320,14 @@
       </p:sp>
       <p:sp>
         <p:nvSpPr>
-          <p:cNvPr id="35" name="Text 33"/>
-          <p:cNvSpPr/>
-          <p:nvPr/>
-        </p:nvSpPr>
-        <p:spPr>
-          <a:xfrm>
-            <a:off x="5230368" y="3364992"/>
-            <a:ext cx="1554480" cy="475488"/>
+          <p:cNvPr id="36" name="Text 34"/>
+          <p:cNvSpPr/>
+          <p:nvPr/>
+        </p:nvSpPr>
+        <p:spPr>
+          <a:xfrm>
+            <a:off x="4581144" y="3364992"/>
+            <a:ext cx="1225296" cy="475488"/>
           </a:xfrm>
           <a:prstGeom prst="rect">
             <a:avLst/>
@@ -35135,7 +35351,7 @@
                 <a:ea typeface="Trebuchet MS" pitchFamily="34" charset="-122"/>
                 <a:cs typeface="Trebuchet MS" pitchFamily="34" charset="-120"/>
               </a:rPr>
-              <a:t>stanc</a:t>
+              <a:t>lo</a:t>
             </a:r>
             <a:endParaRPr lang="en-US" sz="1400" dirty="0"/>
           </a:p>
@@ -35143,14 +35359,14 @@
       </p:sp>
       <p:sp>
         <p:nvSpPr>
-          <p:cNvPr id="36" name="Text 34"/>
-          <p:cNvSpPr/>
-          <p:nvPr/>
-        </p:nvSpPr>
-        <p:spPr>
-          <a:xfrm>
-            <a:off x="6784848" y="3364992"/>
-            <a:ext cx="73152" cy="475488"/>
+          <p:cNvPr id="37" name="Text 35"/>
+          <p:cNvSpPr/>
+          <p:nvPr/>
+        </p:nvSpPr>
+        <p:spPr>
+          <a:xfrm>
+            <a:off x="5806440" y="3364992"/>
+            <a:ext cx="76200" cy="475488"/>
           </a:xfrm>
           <a:prstGeom prst="rect">
             <a:avLst/>
@@ -35182,14 +35398,14 @@
       </p:sp>
       <p:sp>
         <p:nvSpPr>
-          <p:cNvPr id="37" name="Shape 35"/>
-          <p:cNvSpPr/>
-          <p:nvPr/>
-        </p:nvSpPr>
-        <p:spPr>
-          <a:xfrm>
-            <a:off x="6858000" y="3364992"/>
-            <a:ext cx="1554480" cy="475488"/>
+          <p:cNvPr id="38" name="Shape 36"/>
+          <p:cNvSpPr/>
+          <p:nvPr/>
+        </p:nvSpPr>
+        <p:spPr>
+          <a:xfrm>
+            <a:off x="5882640" y="3364992"/>
+            <a:ext cx="1225296" cy="475488"/>
           </a:xfrm>
           <a:prstGeom prst="rect">
             <a:avLst>
@@ -35209,14 +35425,14 @@
       </p:sp>
       <p:sp>
         <p:nvSpPr>
-          <p:cNvPr id="38" name="Text 36"/>
-          <p:cNvSpPr/>
-          <p:nvPr/>
-        </p:nvSpPr>
-        <p:spPr>
-          <a:xfrm>
-            <a:off x="6858000" y="3364992"/>
-            <a:ext cx="1554480" cy="475488"/>
+          <p:cNvPr id="39" name="Text 37"/>
+          <p:cNvSpPr/>
+          <p:nvPr/>
+        </p:nvSpPr>
+        <p:spPr>
+          <a:xfrm>
+            <a:off x="5882640" y="3364992"/>
+            <a:ext cx="1225296" cy="475488"/>
           </a:xfrm>
           <a:prstGeom prst="rect">
             <a:avLst/>
@@ -35240,7 +35456,7 @@
                 <a:ea typeface="Trebuchet MS" pitchFamily="34" charset="-122"/>
                 <a:cs typeface="Trebuchet MS" pitchFamily="34" charset="-120"/>
               </a:rPr>
-              <a:t>es</a:t>
+              <a:t>cu</a:t>
             </a:r>
             <a:endParaRPr lang="en-US" sz="1400" dirty="0"/>
           </a:p>
@@ -35248,7 +35464,112 @@
       </p:sp>
       <p:sp>
         <p:nvSpPr>
-          <p:cNvPr id="39" name="Shape 37"/>
+          <p:cNvPr id="40" name="Text 38"/>
+          <p:cNvSpPr/>
+          <p:nvPr/>
+        </p:nvSpPr>
+        <p:spPr>
+          <a:xfrm>
+            <a:off x="7107936" y="3364992"/>
+            <a:ext cx="76200" cy="475488"/>
+          </a:xfrm>
+          <a:prstGeom prst="rect">
+            <a:avLst/>
+          </a:prstGeom>
+          <a:noFill/>
+          <a:ln/>
+        </p:spPr>
+        <p:txBody>
+          <a:bodyPr wrap="square" lIns="0" tIns="0" rIns="0" bIns="0" rtlCol="0" anchor="ctr"/>
+          <a:lstStyle/>
+          <a:p>
+            <a:pPr algn="ctr" indent="0" marL="0">
+              <a:buNone/>
+            </a:pPr>
+            <a:r>
+              <a:rPr lang="en-US" sz="1600" b="1" dirty="0">
+                <a:solidFill>
+                  <a:srgbClr val="0D9488"/>
+                </a:solidFill>
+                <a:latin typeface="Trebuchet MS" pitchFamily="34" charset="0"/>
+                <a:ea typeface="Trebuchet MS" pitchFamily="34" charset="-122"/>
+                <a:cs typeface="Trebuchet MS" pitchFamily="34" charset="-120"/>
+              </a:rPr>
+              <a:t>·</a:t>
+            </a:r>
+            <a:endParaRPr lang="en-US" sz="1600" dirty="0"/>
+          </a:p>
+        </p:txBody>
+      </p:sp>
+      <p:sp>
+        <p:nvSpPr>
+          <p:cNvPr id="41" name="Shape 39"/>
+          <p:cNvSpPr/>
+          <p:nvPr/>
+        </p:nvSpPr>
+        <p:spPr>
+          <a:xfrm>
+            <a:off x="7184136" y="3364992"/>
+            <a:ext cx="1225296" cy="475488"/>
+          </a:xfrm>
+          <a:prstGeom prst="rect">
+            <a:avLst>
+              <a:gd name="adj" fmla="val 9615"/>
+            </a:avLst>
+          </a:prstGeom>
+          <a:solidFill>
+            <a:srgbClr val="FFFFFF"/>
+          </a:solidFill>
+          <a:ln w="12700">
+            <a:solidFill>
+              <a:srgbClr val="0D9488"/>
+            </a:solidFill>
+            <a:prstDash val="solid"/>
+          </a:ln>
+        </p:spPr>
+      </p:sp>
+      <p:sp>
+        <p:nvSpPr>
+          <p:cNvPr id="42" name="Text 40"/>
+          <p:cNvSpPr/>
+          <p:nvPr/>
+        </p:nvSpPr>
+        <p:spPr>
+          <a:xfrm>
+            <a:off x="7184136" y="3364992"/>
+            <a:ext cx="1225296" cy="475488"/>
+          </a:xfrm>
+          <a:prstGeom prst="rect">
+            <a:avLst/>
+          </a:prstGeom>
+          <a:noFill/>
+          <a:ln/>
+        </p:spPr>
+        <p:txBody>
+          <a:bodyPr wrap="square" lIns="0" tIns="0" rIns="0" bIns="0" rtlCol="0" anchor="ctr"/>
+          <a:lstStyle/>
+          <a:p>
+            <a:pPr algn="ctr" indent="0" marL="0">
+              <a:buNone/>
+            </a:pPr>
+            <a:r>
+              <a:rPr lang="en-US" sz="1400" b="1" dirty="0">
+                <a:solidFill>
+                  <a:srgbClr val="0D9488"/>
+                </a:solidFill>
+                <a:latin typeface="Trebuchet MS" pitchFamily="34" charset="0"/>
+                <a:ea typeface="Trebuchet MS" pitchFamily="34" charset="-122"/>
+                <a:cs typeface="Trebuchet MS" pitchFamily="34" charset="-120"/>
+              </a:rPr>
+              <a:t>tion</a:t>
+            </a:r>
+            <a:endParaRPr lang="en-US" sz="1400" dirty="0"/>
+          </a:p>
+        </p:txBody>
+      </p:sp>
+      <p:sp>
+        <p:nvSpPr>
+          <p:cNvPr id="43" name="Shape 41"/>
           <p:cNvSpPr/>
           <p:nvPr/>
         </p:nvSpPr>
@@ -35275,7 +35596,7 @@
       </p:sp>
       <p:sp>
         <p:nvSpPr>
-          <p:cNvPr id="40" name="Text 38"/>
+          <p:cNvPr id="44" name="Text 42"/>
           <p:cNvSpPr/>
           <p:nvPr/>
         </p:nvSpPr>
@@ -35314,7 +35635,7 @@
       </p:sp>
       <p:sp>
         <p:nvSpPr>
-          <p:cNvPr id="41" name="Shape 39"/>
+          <p:cNvPr id="45" name="Shape 43"/>
           <p:cNvSpPr/>
           <p:nvPr/>
         </p:nvSpPr>
@@ -35341,14 +35662,14 @@
       </p:sp>
       <p:sp>
         <p:nvSpPr>
-          <p:cNvPr id="42" name="Shape 40"/>
-          <p:cNvSpPr/>
-          <p:nvPr/>
-        </p:nvSpPr>
-        <p:spPr>
-          <a:xfrm>
-            <a:off x="1952244" y="4169664"/>
-            <a:ext cx="543652" cy="384048"/>
+          <p:cNvPr id="46" name="Shape 44"/>
+          <p:cNvSpPr/>
+          <p:nvPr/>
+        </p:nvSpPr>
+        <p:spPr>
+          <a:xfrm>
+            <a:off x="1951828" y="4169664"/>
+            <a:ext cx="603504" cy="384048"/>
           </a:xfrm>
           <a:prstGeom prst="rect">
             <a:avLst>
@@ -35368,14 +35689,14 @@
       </p:sp>
       <p:sp>
         <p:nvSpPr>
-          <p:cNvPr id="43" name="Text 41"/>
-          <p:cNvSpPr/>
-          <p:nvPr/>
-        </p:nvSpPr>
-        <p:spPr>
-          <a:xfrm>
-            <a:off x="1952244" y="4169664"/>
-            <a:ext cx="543652" cy="384048"/>
+          <p:cNvPr id="47" name="Text 45"/>
+          <p:cNvSpPr/>
+          <p:nvPr/>
+        </p:nvSpPr>
+        <p:spPr>
+          <a:xfrm>
+            <a:off x="1951828" y="4169664"/>
+            <a:ext cx="603504" cy="384048"/>
           </a:xfrm>
           <a:prstGeom prst="rect">
             <a:avLst/>
@@ -35407,14 +35728,14 @@
       </p:sp>
       <p:sp>
         <p:nvSpPr>
-          <p:cNvPr id="44" name="Text 42"/>
-          <p:cNvSpPr/>
-          <p:nvPr/>
-        </p:nvSpPr>
-        <p:spPr>
-          <a:xfrm>
-            <a:off x="1952244" y="4572000"/>
-            <a:ext cx="543652" cy="219456"/>
+          <p:cNvPr id="48" name="Text 46"/>
+          <p:cNvSpPr/>
+          <p:nvPr/>
+        </p:nvSpPr>
+        <p:spPr>
+          <a:xfrm>
+            <a:off x="1951828" y="4572000"/>
+            <a:ext cx="603504" cy="219456"/>
           </a:xfrm>
           <a:prstGeom prst="rect">
             <a:avLst/>
@@ -35446,14 +35767,14 @@
       </p:sp>
       <p:sp>
         <p:nvSpPr>
-          <p:cNvPr id="45" name="Shape 43"/>
-          <p:cNvSpPr/>
-          <p:nvPr/>
-        </p:nvSpPr>
-        <p:spPr>
-          <a:xfrm>
-            <a:off x="2546188" y="4169664"/>
-            <a:ext cx="543652" cy="384048"/>
+          <p:cNvPr id="49" name="Shape 47"/>
+          <p:cNvSpPr/>
+          <p:nvPr/>
+        </p:nvSpPr>
+        <p:spPr>
+          <a:xfrm>
+            <a:off x="2605209" y="4169664"/>
+            <a:ext cx="603504" cy="384048"/>
           </a:xfrm>
           <a:prstGeom prst="rect">
             <a:avLst>
@@ -35473,14 +35794,14 @@
       </p:sp>
       <p:sp>
         <p:nvSpPr>
-          <p:cNvPr id="46" name="Text 44"/>
-          <p:cNvSpPr/>
-          <p:nvPr/>
-        </p:nvSpPr>
-        <p:spPr>
-          <a:xfrm>
-            <a:off x="2546188" y="4169664"/>
-            <a:ext cx="543652" cy="384048"/>
+          <p:cNvPr id="50" name="Text 48"/>
+          <p:cNvSpPr/>
+          <p:nvPr/>
+        </p:nvSpPr>
+        <p:spPr>
+          <a:xfrm>
+            <a:off x="2605209" y="4169664"/>
+            <a:ext cx="603504" cy="384048"/>
           </a:xfrm>
           <a:prstGeom prst="rect">
             <a:avLst/>
@@ -35512,14 +35833,14 @@
       </p:sp>
       <p:sp>
         <p:nvSpPr>
-          <p:cNvPr id="47" name="Shape 45"/>
-          <p:cNvSpPr/>
-          <p:nvPr/>
-        </p:nvSpPr>
-        <p:spPr>
-          <a:xfrm>
-            <a:off x="3140133" y="4169664"/>
-            <a:ext cx="543652" cy="384048"/>
+          <p:cNvPr id="51" name="Shape 49"/>
+          <p:cNvSpPr/>
+          <p:nvPr/>
+        </p:nvSpPr>
+        <p:spPr>
+          <a:xfrm>
+            <a:off x="3258589" y="4169664"/>
+            <a:ext cx="603504" cy="384048"/>
           </a:xfrm>
           <a:prstGeom prst="rect">
             <a:avLst>
@@ -35539,14 +35860,14 @@
       </p:sp>
       <p:sp>
         <p:nvSpPr>
-          <p:cNvPr id="48" name="Text 46"/>
-          <p:cNvSpPr/>
-          <p:nvPr/>
-        </p:nvSpPr>
-        <p:spPr>
-          <a:xfrm>
-            <a:off x="3140133" y="4169664"/>
-            <a:ext cx="543652" cy="384048"/>
+          <p:cNvPr id="52" name="Text 50"/>
+          <p:cNvSpPr/>
+          <p:nvPr/>
+        </p:nvSpPr>
+        <p:spPr>
+          <a:xfrm>
+            <a:off x="3258589" y="4169664"/>
+            <a:ext cx="603504" cy="384048"/>
           </a:xfrm>
           <a:prstGeom prst="rect">
             <a:avLst/>
@@ -35578,14 +35899,410 @@
       </p:sp>
       <p:sp>
         <p:nvSpPr>
-          <p:cNvPr id="49" name="Text 47"/>
-          <p:cNvSpPr/>
-          <p:nvPr/>
-        </p:nvSpPr>
-        <p:spPr>
-          <a:xfrm>
-            <a:off x="3140133" y="4572000"/>
-            <a:ext cx="543652" cy="219456"/>
+          <p:cNvPr id="53" name="Shape 51"/>
+          <p:cNvSpPr/>
+          <p:nvPr/>
+        </p:nvSpPr>
+        <p:spPr>
+          <a:xfrm>
+            <a:off x="3911969" y="4169664"/>
+            <a:ext cx="603504" cy="384048"/>
+          </a:xfrm>
+          <a:prstGeom prst="rect">
+            <a:avLst>
+              <a:gd name="adj" fmla="val 9524"/>
+            </a:avLst>
+          </a:prstGeom>
+          <a:solidFill>
+            <a:srgbClr val="FFFFFF"/>
+          </a:solidFill>
+          <a:ln w="12700">
+            <a:solidFill>
+              <a:srgbClr val="DB2777"/>
+            </a:solidFill>
+            <a:prstDash val="solid"/>
+          </a:ln>
+        </p:spPr>
+      </p:sp>
+      <p:sp>
+        <p:nvSpPr>
+          <p:cNvPr id="54" name="Text 52"/>
+          <p:cNvSpPr/>
+          <p:nvPr/>
+        </p:nvSpPr>
+        <p:spPr>
+          <a:xfrm>
+            <a:off x="3911969" y="4169664"/>
+            <a:ext cx="603504" cy="384048"/>
+          </a:xfrm>
+          <a:prstGeom prst="rect">
+            <a:avLst/>
+          </a:prstGeom>
+          <a:noFill/>
+          <a:ln/>
+        </p:spPr>
+        <p:txBody>
+          <a:bodyPr wrap="square" lIns="0" tIns="0" rIns="0" bIns="0" rtlCol="0" anchor="ctr"/>
+          <a:lstStyle/>
+          <a:p>
+            <a:pPr algn="ctr" indent="0" marL="0">
+              <a:buNone/>
+            </a:pPr>
+            <a:r>
+              <a:rPr lang="en-US" sz="900" b="1" dirty="0">
+                <a:solidFill>
+                  <a:srgbClr val="9D174D"/>
+                </a:solidFill>
+                <a:latin typeface="Trebuchet MS" pitchFamily="34" charset="0"/>
+                <a:ea typeface="Trebuchet MS" pitchFamily="34" charset="-122"/>
+                <a:cs typeface="Trebuchet MS" pitchFamily="34" charset="-120"/>
+              </a:rPr>
+              <a:t>um</a:t>
+            </a:r>
+            <a:endParaRPr lang="en-US" sz="900" dirty="0"/>
+          </a:p>
+        </p:txBody>
+      </p:sp>
+      <p:sp>
+        <p:nvSpPr>
+          <p:cNvPr id="55" name="Shape 53"/>
+          <p:cNvSpPr/>
+          <p:nvPr/>
+        </p:nvSpPr>
+        <p:spPr>
+          <a:xfrm>
+            <a:off x="4565350" y="4169664"/>
+            <a:ext cx="603504" cy="384048"/>
+          </a:xfrm>
+          <a:prstGeom prst="rect">
+            <a:avLst>
+              <a:gd name="adj" fmla="val 9524"/>
+            </a:avLst>
+          </a:prstGeom>
+          <a:solidFill>
+            <a:srgbClr val="FFFFFF"/>
+          </a:solidFill>
+          <a:ln w="12700">
+            <a:solidFill>
+              <a:srgbClr val="DB2777"/>
+            </a:solidFill>
+            <a:prstDash val="solid"/>
+          </a:ln>
+        </p:spPr>
+      </p:sp>
+      <p:sp>
+        <p:nvSpPr>
+          <p:cNvPr id="56" name="Text 54"/>
+          <p:cNvSpPr/>
+          <p:nvPr/>
+        </p:nvSpPr>
+        <p:spPr>
+          <a:xfrm>
+            <a:off x="4565350" y="4169664"/>
+            <a:ext cx="603504" cy="384048"/>
+          </a:xfrm>
+          <a:prstGeom prst="rect">
+            <a:avLst/>
+          </a:prstGeom>
+          <a:noFill/>
+          <a:ln/>
+        </p:spPr>
+        <p:txBody>
+          <a:bodyPr wrap="square" lIns="0" tIns="0" rIns="0" bIns="0" rtlCol="0" anchor="ctr"/>
+          <a:lstStyle/>
+          <a:p>
+            <a:pPr algn="ctr" indent="0" marL="0">
+              <a:buNone/>
+            </a:pPr>
+            <a:r>
+              <a:rPr lang="en-US" sz="900" b="1" dirty="0">
+                <a:solidFill>
+                  <a:srgbClr val="9D174D"/>
+                </a:solidFill>
+                <a:latin typeface="Trebuchet MS" pitchFamily="34" charset="0"/>
+                <a:ea typeface="Trebuchet MS" pitchFamily="34" charset="-122"/>
+                <a:cs typeface="Trebuchet MS" pitchFamily="34" charset="-120"/>
+              </a:rPr>
+              <a:t>l</a:t>
+            </a:r>
+            <a:endParaRPr lang="en-US" sz="900" dirty="0"/>
+          </a:p>
+        </p:txBody>
+      </p:sp>
+      <p:sp>
+        <p:nvSpPr>
+          <p:cNvPr id="57" name="Shape 55"/>
+          <p:cNvSpPr/>
+          <p:nvPr/>
+        </p:nvSpPr>
+        <p:spPr>
+          <a:xfrm>
+            <a:off x="5218730" y="4169664"/>
+            <a:ext cx="603504" cy="384048"/>
+          </a:xfrm>
+          <a:prstGeom prst="rect">
+            <a:avLst>
+              <a:gd name="adj" fmla="val 9524"/>
+            </a:avLst>
+          </a:prstGeom>
+          <a:solidFill>
+            <a:srgbClr val="FFFFFF"/>
+          </a:solidFill>
+          <a:ln w="12700">
+            <a:solidFill>
+              <a:srgbClr val="DB2777"/>
+            </a:solidFill>
+            <a:prstDash val="solid"/>
+          </a:ln>
+        </p:spPr>
+      </p:sp>
+      <p:sp>
+        <p:nvSpPr>
+          <p:cNvPr id="58" name="Text 56"/>
+          <p:cNvSpPr/>
+          <p:nvPr/>
+        </p:nvSpPr>
+        <p:spPr>
+          <a:xfrm>
+            <a:off x="5218730" y="4169664"/>
+            <a:ext cx="603504" cy="384048"/>
+          </a:xfrm>
+          <a:prstGeom prst="rect">
+            <a:avLst/>
+          </a:prstGeom>
+          <a:noFill/>
+          <a:ln/>
+        </p:spPr>
+        <p:txBody>
+          <a:bodyPr wrap="square" lIns="0" tIns="0" rIns="0" bIns="0" rtlCol="0" anchor="ctr"/>
+          <a:lstStyle/>
+          <a:p>
+            <a:pPr algn="ctr" indent="0" marL="0">
+              <a:buNone/>
+            </a:pPr>
+            <a:r>
+              <a:rPr lang="en-US" sz="900" b="1" dirty="0">
+                <a:solidFill>
+                  <a:srgbClr val="9D174D"/>
+                </a:solidFill>
+                <a:latin typeface="Trebuchet MS" pitchFamily="34" charset="0"/>
+                <a:ea typeface="Trebuchet MS" pitchFamily="34" charset="-122"/>
+                <a:cs typeface="Trebuchet MS" pitchFamily="34" charset="-120"/>
+              </a:rPr>
+              <a:t>o</a:t>
+            </a:r>
+            <a:endParaRPr lang="en-US" sz="900" dirty="0"/>
+          </a:p>
+        </p:txBody>
+      </p:sp>
+      <p:sp>
+        <p:nvSpPr>
+          <p:cNvPr id="59" name="Shape 57"/>
+          <p:cNvSpPr/>
+          <p:nvPr/>
+        </p:nvSpPr>
+        <p:spPr>
+          <a:xfrm>
+            <a:off x="5872111" y="4169664"/>
+            <a:ext cx="603504" cy="384048"/>
+          </a:xfrm>
+          <a:prstGeom prst="rect">
+            <a:avLst>
+              <a:gd name="adj" fmla="val 9524"/>
+            </a:avLst>
+          </a:prstGeom>
+          <a:solidFill>
+            <a:srgbClr val="FFFFFF"/>
+          </a:solidFill>
+          <a:ln w="12700">
+            <a:solidFill>
+              <a:srgbClr val="DB2777"/>
+            </a:solidFill>
+            <a:prstDash val="solid"/>
+          </a:ln>
+        </p:spPr>
+      </p:sp>
+      <p:sp>
+        <p:nvSpPr>
+          <p:cNvPr id="60" name="Text 58"/>
+          <p:cNvSpPr/>
+          <p:nvPr/>
+        </p:nvSpPr>
+        <p:spPr>
+          <a:xfrm>
+            <a:off x="5872111" y="4169664"/>
+            <a:ext cx="603504" cy="384048"/>
+          </a:xfrm>
+          <a:prstGeom prst="rect">
+            <a:avLst/>
+          </a:prstGeom>
+          <a:noFill/>
+          <a:ln/>
+        </p:spPr>
+        <p:txBody>
+          <a:bodyPr wrap="square" lIns="0" tIns="0" rIns="0" bIns="0" rtlCol="0" anchor="ctr"/>
+          <a:lstStyle/>
+          <a:p>
+            <a:pPr algn="ctr" indent="0" marL="0">
+              <a:buNone/>
+            </a:pPr>
+            <a:r>
+              <a:rPr lang="en-US" sz="900" b="1" dirty="0">
+                <a:solidFill>
+                  <a:srgbClr val="9D174D"/>
+                </a:solidFill>
+                <a:latin typeface="Trebuchet MS" pitchFamily="34" charset="0"/>
+                <a:ea typeface="Trebuchet MS" pitchFamily="34" charset="-122"/>
+                <a:cs typeface="Trebuchet MS" pitchFamily="34" charset="-120"/>
+              </a:rPr>
+              <a:t>c</a:t>
+            </a:r>
+            <a:endParaRPr lang="en-US" sz="900" dirty="0"/>
+          </a:p>
+        </p:txBody>
+      </p:sp>
+      <p:sp>
+        <p:nvSpPr>
+          <p:cNvPr id="61" name="Shape 59"/>
+          <p:cNvSpPr/>
+          <p:nvPr/>
+        </p:nvSpPr>
+        <p:spPr>
+          <a:xfrm>
+            <a:off x="6525491" y="4169664"/>
+            <a:ext cx="603504" cy="384048"/>
+          </a:xfrm>
+          <a:prstGeom prst="rect">
+            <a:avLst>
+              <a:gd name="adj" fmla="val 9524"/>
+            </a:avLst>
+          </a:prstGeom>
+          <a:solidFill>
+            <a:srgbClr val="FFFFFF"/>
+          </a:solidFill>
+          <a:ln w="12700">
+            <a:solidFill>
+              <a:srgbClr val="DB2777"/>
+            </a:solidFill>
+            <a:prstDash val="solid"/>
+          </a:ln>
+        </p:spPr>
+      </p:sp>
+      <p:sp>
+        <p:nvSpPr>
+          <p:cNvPr id="62" name="Text 60"/>
+          <p:cNvSpPr/>
+          <p:nvPr/>
+        </p:nvSpPr>
+        <p:spPr>
+          <a:xfrm>
+            <a:off x="6525491" y="4169664"/>
+            <a:ext cx="603504" cy="384048"/>
+          </a:xfrm>
+          <a:prstGeom prst="rect">
+            <a:avLst/>
+          </a:prstGeom>
+          <a:noFill/>
+          <a:ln/>
+        </p:spPr>
+        <p:txBody>
+          <a:bodyPr wrap="square" lIns="0" tIns="0" rIns="0" bIns="0" rtlCol="0" anchor="ctr"/>
+          <a:lstStyle/>
+          <a:p>
+            <a:pPr algn="ctr" indent="0" marL="0">
+              <a:buNone/>
+            </a:pPr>
+            <a:r>
+              <a:rPr lang="en-US" sz="900" b="1" dirty="0">
+                <a:solidFill>
+                  <a:srgbClr val="9D174D"/>
+                </a:solidFill>
+                <a:latin typeface="Trebuchet MS" pitchFamily="34" charset="0"/>
+                <a:ea typeface="Trebuchet MS" pitchFamily="34" charset="-122"/>
+                <a:cs typeface="Trebuchet MS" pitchFamily="34" charset="-120"/>
+              </a:rPr>
+              <a:t>u</a:t>
+            </a:r>
+            <a:endParaRPr lang="en-US" sz="900" dirty="0"/>
+          </a:p>
+        </p:txBody>
+      </p:sp>
+      <p:sp>
+        <p:nvSpPr>
+          <p:cNvPr id="63" name="Shape 61"/>
+          <p:cNvSpPr/>
+          <p:nvPr/>
+        </p:nvSpPr>
+        <p:spPr>
+          <a:xfrm>
+            <a:off x="7178871" y="4169664"/>
+            <a:ext cx="603504" cy="384048"/>
+          </a:xfrm>
+          <a:prstGeom prst="rect">
+            <a:avLst>
+              <a:gd name="adj" fmla="val 9524"/>
+            </a:avLst>
+          </a:prstGeom>
+          <a:solidFill>
+            <a:srgbClr val="FFFFFF"/>
+          </a:solidFill>
+          <a:ln w="12700">
+            <a:solidFill>
+              <a:srgbClr val="DB2777"/>
+            </a:solidFill>
+            <a:prstDash val="solid"/>
+          </a:ln>
+        </p:spPr>
+      </p:sp>
+      <p:sp>
+        <p:nvSpPr>
+          <p:cNvPr id="64" name="Text 62"/>
+          <p:cNvSpPr/>
+          <p:nvPr/>
+        </p:nvSpPr>
+        <p:spPr>
+          <a:xfrm>
+            <a:off x="7178871" y="4169664"/>
+            <a:ext cx="603504" cy="384048"/>
+          </a:xfrm>
+          <a:prstGeom prst="rect">
+            <a:avLst/>
+          </a:prstGeom>
+          <a:noFill/>
+          <a:ln/>
+        </p:spPr>
+        <p:txBody>
+          <a:bodyPr wrap="square" lIns="0" tIns="0" rIns="0" bIns="0" rtlCol="0" anchor="ctr"/>
+          <a:lstStyle/>
+          <a:p>
+            <a:pPr algn="ctr" indent="0" marL="0">
+              <a:buNone/>
+            </a:pPr>
+            <a:r>
+              <a:rPr lang="en-US" sz="900" b="1" dirty="0">
+                <a:solidFill>
+                  <a:srgbClr val="9D174D"/>
+                </a:solidFill>
+                <a:latin typeface="Trebuchet MS" pitchFamily="34" charset="0"/>
+                <a:ea typeface="Trebuchet MS" pitchFamily="34" charset="-122"/>
+                <a:cs typeface="Trebuchet MS" pitchFamily="34" charset="-120"/>
+              </a:rPr>
+              <a:t>ti</a:t>
+            </a:r>
+            <a:endParaRPr lang="en-US" sz="900" dirty="0"/>
+          </a:p>
+        </p:txBody>
+      </p:sp>
+      <p:sp>
+        <p:nvSpPr>
+          <p:cNvPr id="65" name="Text 63"/>
+          <p:cNvSpPr/>
+          <p:nvPr/>
+        </p:nvSpPr>
+        <p:spPr>
+          <a:xfrm>
+            <a:off x="7178871" y="4572000"/>
+            <a:ext cx="603504" cy="219456"/>
           </a:xfrm>
           <a:prstGeom prst="rect">
             <a:avLst/>
@@ -35609,7 +36326,7 @@
                 <a:ea typeface="Calibri" pitchFamily="34" charset="-122"/>
                 <a:cs typeface="Calibri" pitchFamily="34" charset="-120"/>
               </a:rPr>
-              <a:t>/k/</a:t>
+              <a:t>/sh/</a:t>
             </a:r>
             <a:endParaRPr lang="en-US" sz="750" dirty="0"/>
           </a:p>
@@ -35617,14 +36334,14 @@
       </p:sp>
       <p:sp>
         <p:nvSpPr>
-          <p:cNvPr id="50" name="Shape 48"/>
-          <p:cNvSpPr/>
-          <p:nvPr/>
-        </p:nvSpPr>
-        <p:spPr>
-          <a:xfrm>
-            <a:off x="3734077" y="4169664"/>
-            <a:ext cx="543652" cy="384048"/>
+          <p:cNvPr id="66" name="Shape 64"/>
+          <p:cNvSpPr/>
+          <p:nvPr/>
+        </p:nvSpPr>
+        <p:spPr>
+          <a:xfrm>
+            <a:off x="7832252" y="4169664"/>
+            <a:ext cx="603504" cy="384048"/>
           </a:xfrm>
           <a:prstGeom prst="rect">
             <a:avLst>
@@ -35644,14 +36361,14 @@
       </p:sp>
       <p:sp>
         <p:nvSpPr>
-          <p:cNvPr id="51" name="Text 49"/>
-          <p:cNvSpPr/>
-          <p:nvPr/>
-        </p:nvSpPr>
-        <p:spPr>
-          <a:xfrm>
-            <a:off x="3734077" y="4169664"/>
-            <a:ext cx="543652" cy="384048"/>
+          <p:cNvPr id="67" name="Text 65"/>
+          <p:cNvSpPr/>
+          <p:nvPr/>
+        </p:nvSpPr>
+        <p:spPr>
+          <a:xfrm>
+            <a:off x="7832252" y="4169664"/>
+            <a:ext cx="603504" cy="384048"/>
           </a:xfrm>
           <a:prstGeom prst="rect">
             <a:avLst/>
@@ -35675,508 +36392,7 @@
                 <a:ea typeface="Trebuchet MS" pitchFamily="34" charset="-122"/>
                 <a:cs typeface="Trebuchet MS" pitchFamily="34" charset="-120"/>
               </a:rPr>
-              <a:t>u</a:t>
-            </a:r>
-            <a:endParaRPr lang="en-US" sz="900" dirty="0"/>
-          </a:p>
-        </p:txBody>
-      </p:sp>
-      <p:sp>
-        <p:nvSpPr>
-          <p:cNvPr id="52" name="Shape 50"/>
-          <p:cNvSpPr/>
-          <p:nvPr/>
-        </p:nvSpPr>
-        <p:spPr>
-          <a:xfrm>
-            <a:off x="4328021" y="4169664"/>
-            <a:ext cx="543652" cy="384048"/>
-          </a:xfrm>
-          <a:prstGeom prst="rect">
-            <a:avLst>
-              <a:gd name="adj" fmla="val 9524"/>
-            </a:avLst>
-          </a:prstGeom>
-          <a:solidFill>
-            <a:srgbClr val="FFFFFF"/>
-          </a:solidFill>
-          <a:ln w="12700">
-            <a:solidFill>
-              <a:srgbClr val="DB2777"/>
-            </a:solidFill>
-            <a:prstDash val="solid"/>
-          </a:ln>
-        </p:spPr>
-      </p:sp>
-      <p:sp>
-        <p:nvSpPr>
-          <p:cNvPr id="53" name="Text 51"/>
-          <p:cNvSpPr/>
-          <p:nvPr/>
-        </p:nvSpPr>
-        <p:spPr>
-          <a:xfrm>
-            <a:off x="4328021" y="4169664"/>
-            <a:ext cx="543652" cy="384048"/>
-          </a:xfrm>
-          <a:prstGeom prst="rect">
-            <a:avLst/>
-          </a:prstGeom>
-          <a:noFill/>
-          <a:ln/>
-        </p:spPr>
-        <p:txBody>
-          <a:bodyPr wrap="square" lIns="0" tIns="0" rIns="0" bIns="0" rtlCol="0" anchor="ctr"/>
-          <a:lstStyle/>
-          <a:p>
-            <a:pPr algn="ctr" indent="0" marL="0">
-              <a:buNone/>
-            </a:pPr>
-            <a:r>
-              <a:rPr lang="en-US" sz="900" b="1" dirty="0">
-                <a:solidFill>
-                  <a:srgbClr val="9D174D"/>
-                </a:solidFill>
-                <a:latin typeface="Trebuchet MS" pitchFamily="34" charset="0"/>
-                <a:ea typeface="Trebuchet MS" pitchFamily="34" charset="-122"/>
-                <a:cs typeface="Trebuchet MS" pitchFamily="34" charset="-120"/>
-              </a:rPr>
-              <a:t>m</a:t>
-            </a:r>
-            <a:endParaRPr lang="en-US" sz="900" dirty="0"/>
-          </a:p>
-        </p:txBody>
-      </p:sp>
-      <p:sp>
-        <p:nvSpPr>
-          <p:cNvPr id="54" name="Shape 52"/>
-          <p:cNvSpPr/>
-          <p:nvPr/>
-        </p:nvSpPr>
-        <p:spPr>
-          <a:xfrm>
-            <a:off x="4921966" y="4169664"/>
-            <a:ext cx="543652" cy="384048"/>
-          </a:xfrm>
-          <a:prstGeom prst="rect">
-            <a:avLst>
-              <a:gd name="adj" fmla="val 9524"/>
-            </a:avLst>
-          </a:prstGeom>
-          <a:solidFill>
-            <a:srgbClr val="FFFFFF"/>
-          </a:solidFill>
-          <a:ln w="12700">
-            <a:solidFill>
-              <a:srgbClr val="DB2777"/>
-            </a:solidFill>
-            <a:prstDash val="solid"/>
-          </a:ln>
-        </p:spPr>
-      </p:sp>
-      <p:sp>
-        <p:nvSpPr>
-          <p:cNvPr id="55" name="Text 53"/>
-          <p:cNvSpPr/>
-          <p:nvPr/>
-        </p:nvSpPr>
-        <p:spPr>
-          <a:xfrm>
-            <a:off x="4921966" y="4169664"/>
-            <a:ext cx="543652" cy="384048"/>
-          </a:xfrm>
-          <a:prstGeom prst="rect">
-            <a:avLst/>
-          </a:prstGeom>
-          <a:noFill/>
-          <a:ln/>
-        </p:spPr>
-        <p:txBody>
-          <a:bodyPr wrap="square" lIns="0" tIns="0" rIns="0" bIns="0" rtlCol="0" anchor="ctr"/>
-          <a:lstStyle/>
-          <a:p>
-            <a:pPr algn="ctr" indent="0" marL="0">
-              <a:buNone/>
-            </a:pPr>
-            <a:r>
-              <a:rPr lang="en-US" sz="900" b="1" dirty="0">
-                <a:solidFill>
-                  <a:srgbClr val="9D174D"/>
-                </a:solidFill>
-                <a:latin typeface="Trebuchet MS" pitchFamily="34" charset="0"/>
-                <a:ea typeface="Trebuchet MS" pitchFamily="34" charset="-122"/>
-                <a:cs typeface="Trebuchet MS" pitchFamily="34" charset="-120"/>
-              </a:rPr>
-              <a:t>s</a:t>
-            </a:r>
-            <a:endParaRPr lang="en-US" sz="900" dirty="0"/>
-          </a:p>
-        </p:txBody>
-      </p:sp>
-      <p:sp>
-        <p:nvSpPr>
-          <p:cNvPr id="56" name="Shape 54"/>
-          <p:cNvSpPr/>
-          <p:nvPr/>
-        </p:nvSpPr>
-        <p:spPr>
-          <a:xfrm>
-            <a:off x="5515910" y="4169664"/>
-            <a:ext cx="543652" cy="384048"/>
-          </a:xfrm>
-          <a:prstGeom prst="rect">
-            <a:avLst>
-              <a:gd name="adj" fmla="val 9524"/>
-            </a:avLst>
-          </a:prstGeom>
-          <a:solidFill>
-            <a:srgbClr val="FFFFFF"/>
-          </a:solidFill>
-          <a:ln w="12700">
-            <a:solidFill>
-              <a:srgbClr val="DB2777"/>
-            </a:solidFill>
-            <a:prstDash val="solid"/>
-          </a:ln>
-        </p:spPr>
-      </p:sp>
-      <p:sp>
-        <p:nvSpPr>
-          <p:cNvPr id="57" name="Text 55"/>
-          <p:cNvSpPr/>
-          <p:nvPr/>
-        </p:nvSpPr>
-        <p:spPr>
-          <a:xfrm>
-            <a:off x="5515910" y="4169664"/>
-            <a:ext cx="543652" cy="384048"/>
-          </a:xfrm>
-          <a:prstGeom prst="rect">
-            <a:avLst/>
-          </a:prstGeom>
-          <a:noFill/>
-          <a:ln/>
-        </p:spPr>
-        <p:txBody>
-          <a:bodyPr wrap="square" lIns="0" tIns="0" rIns="0" bIns="0" rtlCol="0" anchor="ctr"/>
-          <a:lstStyle/>
-          <a:p>
-            <a:pPr algn="ctr" indent="0" marL="0">
-              <a:buNone/>
-            </a:pPr>
-            <a:r>
-              <a:rPr lang="en-US" sz="900" b="1" dirty="0">
-                <a:solidFill>
-                  <a:srgbClr val="9D174D"/>
-                </a:solidFill>
-                <a:latin typeface="Trebuchet MS" pitchFamily="34" charset="0"/>
-                <a:ea typeface="Trebuchet MS" pitchFamily="34" charset="-122"/>
-                <a:cs typeface="Trebuchet MS" pitchFamily="34" charset="-120"/>
-              </a:rPr>
-              <a:t>t</a:t>
-            </a:r>
-            <a:endParaRPr lang="en-US" sz="900" dirty="0"/>
-          </a:p>
-        </p:txBody>
-      </p:sp>
-      <p:sp>
-        <p:nvSpPr>
-          <p:cNvPr id="58" name="Shape 56"/>
-          <p:cNvSpPr/>
-          <p:nvPr/>
-        </p:nvSpPr>
-        <p:spPr>
-          <a:xfrm>
-            <a:off x="6109855" y="4169664"/>
-            <a:ext cx="543652" cy="384048"/>
-          </a:xfrm>
-          <a:prstGeom prst="rect">
-            <a:avLst>
-              <a:gd name="adj" fmla="val 9524"/>
-            </a:avLst>
-          </a:prstGeom>
-          <a:solidFill>
-            <a:srgbClr val="FFFFFF"/>
-          </a:solidFill>
-          <a:ln w="12700">
-            <a:solidFill>
-              <a:srgbClr val="DB2777"/>
-            </a:solidFill>
-            <a:prstDash val="solid"/>
-          </a:ln>
-        </p:spPr>
-      </p:sp>
-      <p:sp>
-        <p:nvSpPr>
-          <p:cNvPr id="59" name="Text 57"/>
-          <p:cNvSpPr/>
-          <p:nvPr/>
-        </p:nvSpPr>
-        <p:spPr>
-          <a:xfrm>
-            <a:off x="6109855" y="4169664"/>
-            <a:ext cx="543652" cy="384048"/>
-          </a:xfrm>
-          <a:prstGeom prst="rect">
-            <a:avLst/>
-          </a:prstGeom>
-          <a:noFill/>
-          <a:ln/>
-        </p:spPr>
-        <p:txBody>
-          <a:bodyPr wrap="square" lIns="0" tIns="0" rIns="0" bIns="0" rtlCol="0" anchor="ctr"/>
-          <a:lstStyle/>
-          <a:p>
-            <a:pPr algn="ctr" indent="0" marL="0">
-              <a:buNone/>
-            </a:pPr>
-            <a:r>
-              <a:rPr lang="en-US" sz="900" b="1" dirty="0">
-                <a:solidFill>
-                  <a:srgbClr val="9D174D"/>
-                </a:solidFill>
-                <a:latin typeface="Trebuchet MS" pitchFamily="34" charset="0"/>
-                <a:ea typeface="Trebuchet MS" pitchFamily="34" charset="-122"/>
-                <a:cs typeface="Trebuchet MS" pitchFamily="34" charset="-120"/>
-              </a:rPr>
-              <a:t>a</a:t>
-            </a:r>
-            <a:endParaRPr lang="en-US" sz="900" dirty="0"/>
-          </a:p>
-        </p:txBody>
-      </p:sp>
-      <p:sp>
-        <p:nvSpPr>
-          <p:cNvPr id="60" name="Shape 58"/>
-          <p:cNvSpPr/>
-          <p:nvPr/>
-        </p:nvSpPr>
-        <p:spPr>
-          <a:xfrm>
-            <a:off x="6703799" y="4169664"/>
-            <a:ext cx="543652" cy="384048"/>
-          </a:xfrm>
-          <a:prstGeom prst="rect">
-            <a:avLst>
-              <a:gd name="adj" fmla="val 9524"/>
-            </a:avLst>
-          </a:prstGeom>
-          <a:solidFill>
-            <a:srgbClr val="FFFFFF"/>
-          </a:solidFill>
-          <a:ln w="12700">
-            <a:solidFill>
-              <a:srgbClr val="DB2777"/>
-            </a:solidFill>
-            <a:prstDash val="solid"/>
-          </a:ln>
-        </p:spPr>
-      </p:sp>
-      <p:sp>
-        <p:nvSpPr>
-          <p:cNvPr id="61" name="Text 59"/>
-          <p:cNvSpPr/>
-          <p:nvPr/>
-        </p:nvSpPr>
-        <p:spPr>
-          <a:xfrm>
-            <a:off x="6703799" y="4169664"/>
-            <a:ext cx="543652" cy="384048"/>
-          </a:xfrm>
-          <a:prstGeom prst="rect">
-            <a:avLst/>
-          </a:prstGeom>
-          <a:noFill/>
-          <a:ln/>
-        </p:spPr>
-        <p:txBody>
-          <a:bodyPr wrap="square" lIns="0" tIns="0" rIns="0" bIns="0" rtlCol="0" anchor="ctr"/>
-          <a:lstStyle/>
-          <a:p>
-            <a:pPr algn="ctr" indent="0" marL="0">
-              <a:buNone/>
-            </a:pPr>
-            <a:r>
-              <a:rPr lang="en-US" sz="900" b="1" dirty="0">
-                <a:solidFill>
-                  <a:srgbClr val="9D174D"/>
-                </a:solidFill>
-                <a:latin typeface="Trebuchet MS" pitchFamily="34" charset="0"/>
-                <a:ea typeface="Trebuchet MS" pitchFamily="34" charset="-122"/>
-                <a:cs typeface="Trebuchet MS" pitchFamily="34" charset="-120"/>
-              </a:rPr>
-              <a:t>n</a:t>
-            </a:r>
-            <a:endParaRPr lang="en-US" sz="900" dirty="0"/>
-          </a:p>
-        </p:txBody>
-      </p:sp>
-      <p:sp>
-        <p:nvSpPr>
-          <p:cNvPr id="62" name="Shape 60"/>
-          <p:cNvSpPr/>
-          <p:nvPr/>
-        </p:nvSpPr>
-        <p:spPr>
-          <a:xfrm>
-            <a:off x="7297743" y="4169664"/>
-            <a:ext cx="543652" cy="384048"/>
-          </a:xfrm>
-          <a:prstGeom prst="rect">
-            <a:avLst>
-              <a:gd name="adj" fmla="val 9524"/>
-            </a:avLst>
-          </a:prstGeom>
-          <a:solidFill>
-            <a:srgbClr val="FFFFFF"/>
-          </a:solidFill>
-          <a:ln w="12700">
-            <a:solidFill>
-              <a:srgbClr val="DB2777"/>
-            </a:solidFill>
-            <a:prstDash val="solid"/>
-          </a:ln>
-        </p:spPr>
-      </p:sp>
-      <p:sp>
-        <p:nvSpPr>
-          <p:cNvPr id="63" name="Text 61"/>
-          <p:cNvSpPr/>
-          <p:nvPr/>
-        </p:nvSpPr>
-        <p:spPr>
-          <a:xfrm>
-            <a:off x="7297743" y="4169664"/>
-            <a:ext cx="543652" cy="384048"/>
-          </a:xfrm>
-          <a:prstGeom prst="rect">
-            <a:avLst/>
-          </a:prstGeom>
-          <a:noFill/>
-          <a:ln/>
-        </p:spPr>
-        <p:txBody>
-          <a:bodyPr wrap="square" lIns="0" tIns="0" rIns="0" bIns="0" rtlCol="0" anchor="ctr"/>
-          <a:lstStyle/>
-          <a:p>
-            <a:pPr algn="ctr" indent="0" marL="0">
-              <a:buNone/>
-            </a:pPr>
-            <a:r>
-              <a:rPr lang="en-US" sz="900" b="1" dirty="0">
-                <a:solidFill>
-                  <a:srgbClr val="9D174D"/>
-                </a:solidFill>
-                <a:latin typeface="Trebuchet MS" pitchFamily="34" charset="0"/>
-                <a:ea typeface="Trebuchet MS" pitchFamily="34" charset="-122"/>
-                <a:cs typeface="Trebuchet MS" pitchFamily="34" charset="-120"/>
-              </a:rPr>
-              <a:t>ce</a:t>
-            </a:r>
-            <a:endParaRPr lang="en-US" sz="900" dirty="0"/>
-          </a:p>
-        </p:txBody>
-      </p:sp>
-      <p:sp>
-        <p:nvSpPr>
-          <p:cNvPr id="64" name="Text 62"/>
-          <p:cNvSpPr/>
-          <p:nvPr/>
-        </p:nvSpPr>
-        <p:spPr>
-          <a:xfrm>
-            <a:off x="7297743" y="4572000"/>
-            <a:ext cx="543652" cy="219456"/>
-          </a:xfrm>
-          <a:prstGeom prst="rect">
-            <a:avLst/>
-          </a:prstGeom>
-          <a:noFill/>
-          <a:ln/>
-        </p:spPr>
-        <p:txBody>
-          <a:bodyPr wrap="square" lIns="0" tIns="0" rIns="0" bIns="0" rtlCol="0" anchor="t"/>
-          <a:lstStyle/>
-          <a:p>
-            <a:pPr algn="ctr" indent="0" marL="0">
-              <a:buNone/>
-            </a:pPr>
-            <a:r>
-              <a:rPr lang="en-US" sz="750" i="1" dirty="0">
-                <a:solidFill>
-                  <a:srgbClr val="94A3B8"/>
-                </a:solidFill>
-                <a:latin typeface="Calibri" pitchFamily="34" charset="0"/>
-                <a:ea typeface="Calibri" pitchFamily="34" charset="-122"/>
-                <a:cs typeface="Calibri" pitchFamily="34" charset="-120"/>
-              </a:rPr>
-              <a:t>/s/</a:t>
-            </a:r>
-            <a:endParaRPr lang="en-US" sz="750" dirty="0"/>
-          </a:p>
-        </p:txBody>
-      </p:sp>
-      <p:sp>
-        <p:nvSpPr>
-          <p:cNvPr id="65" name="Shape 63"/>
-          <p:cNvSpPr/>
-          <p:nvPr/>
-        </p:nvSpPr>
-        <p:spPr>
-          <a:xfrm>
-            <a:off x="7891688" y="4169664"/>
-            <a:ext cx="543652" cy="384048"/>
-          </a:xfrm>
-          <a:prstGeom prst="rect">
-            <a:avLst>
-              <a:gd name="adj" fmla="val 9524"/>
-            </a:avLst>
-          </a:prstGeom>
-          <a:solidFill>
-            <a:srgbClr val="FFFFFF"/>
-          </a:solidFill>
-          <a:ln w="12700">
-            <a:solidFill>
-              <a:srgbClr val="DB2777"/>
-            </a:solidFill>
-            <a:prstDash val="solid"/>
-          </a:ln>
-        </p:spPr>
-      </p:sp>
-      <p:sp>
-        <p:nvSpPr>
-          <p:cNvPr id="66" name="Text 64"/>
-          <p:cNvSpPr/>
-          <p:nvPr/>
-        </p:nvSpPr>
-        <p:spPr>
-          <a:xfrm>
-            <a:off x="7891688" y="4169664"/>
-            <a:ext cx="543652" cy="384048"/>
-          </a:xfrm>
-          <a:prstGeom prst="rect">
-            <a:avLst/>
-          </a:prstGeom>
-          <a:noFill/>
-          <a:ln/>
-        </p:spPr>
-        <p:txBody>
-          <a:bodyPr wrap="square" lIns="0" tIns="0" rIns="0" bIns="0" rtlCol="0" anchor="ctr"/>
-          <a:lstStyle/>
-          <a:p>
-            <a:pPr algn="ctr" indent="0" marL="0">
-              <a:buNone/>
-            </a:pPr>
-            <a:r>
-              <a:rPr lang="en-US" sz="900" b="1" dirty="0">
-                <a:solidFill>
-                  <a:srgbClr val="9D174D"/>
-                </a:solidFill>
-                <a:latin typeface="Trebuchet MS" pitchFamily="34" charset="0"/>
-                <a:ea typeface="Trebuchet MS" pitchFamily="34" charset="-122"/>
-                <a:cs typeface="Trebuchet MS" pitchFamily="34" charset="-120"/>
-              </a:rPr>
-              <a:t>s</a:t>
+              <a:t>on</a:t>
             </a:r>
             <a:endParaRPr lang="en-US" sz="900" dirty="0"/>
           </a:p>
@@ -38614,7 +38830,7 @@
                 <a:ea typeface="Trebuchet MS" pitchFamily="34" charset="-122"/>
                 <a:cs typeface="Trebuchet MS" pitchFamily="34" charset="-120"/>
               </a:rPr>
-              <a:t>spect</a:t>
+              <a:t>stance</a:t>
             </a:r>
             <a:endParaRPr lang="en-US" sz="1300" dirty="0"/>
           </a:p>
@@ -38783,7 +38999,7 @@
                 <a:ea typeface="Trebuchet MS" pitchFamily="34" charset="-122"/>
                 <a:cs typeface="Trebuchet MS" pitchFamily="34" charset="-120"/>
               </a:rPr>
-              <a:t>circumnavigate</a:t>
+              <a:t>circumference</a:t>
             </a:r>
             <a:endParaRPr lang="en-US" sz="1200" dirty="0"/>
           </a:p>
@@ -38849,7 +39065,7 @@
                 <a:ea typeface="Trebuchet MS" pitchFamily="34" charset="-122"/>
                 <a:cs typeface="Trebuchet MS" pitchFamily="34" charset="-120"/>
               </a:rPr>
-              <a:t>circumference</a:t>
+              <a:t>circumnavigate</a:t>
             </a:r>
             <a:endParaRPr lang="en-US" sz="1200" dirty="0"/>
           </a:p>
@@ -38915,7 +39131,7 @@
                 <a:ea typeface="Trebuchet MS" pitchFamily="34" charset="-122"/>
                 <a:cs typeface="Trebuchet MS" pitchFamily="34" charset="-120"/>
               </a:rPr>
-              <a:t>circumscribe</a:t>
+              <a:t>circumvent</a:t>
             </a:r>
             <a:endParaRPr lang="en-US" sz="1200" dirty="0"/>
           </a:p>
@@ -38981,7 +39197,7 @@
                 <a:ea typeface="Trebuchet MS" pitchFamily="34" charset="-122"/>
                 <a:cs typeface="Trebuchet MS" pitchFamily="34" charset="-120"/>
               </a:rPr>
-              <a:t>circumvent</a:t>
+              <a:t>circumstance</a:t>
             </a:r>
             <a:endParaRPr lang="en-US" sz="1200" dirty="0"/>
           </a:p>
@@ -39047,7 +39263,7 @@
                 <a:ea typeface="Trebuchet MS" pitchFamily="34" charset="-122"/>
                 <a:cs typeface="Trebuchet MS" pitchFamily="34" charset="-120"/>
               </a:rPr>
-              <a:t>circumspect</a:t>
+              <a:t>circumscribe</a:t>
             </a:r>
             <a:endParaRPr lang="en-US" sz="1200" dirty="0"/>
           </a:p>
@@ -39113,7 +39329,7 @@
                 <a:ea typeface="Trebuchet MS" pitchFamily="34" charset="-122"/>
                 <a:cs typeface="Trebuchet MS" pitchFamily="34" charset="-120"/>
               </a:rPr>
-              <a:t>circumstance</a:t>
+              <a:t>circumspect</a:t>
             </a:r>
             <a:endParaRPr lang="en-US" sz="1200" dirty="0"/>
           </a:p>
@@ -39865,7 +40081,7 @@
                 <a:ea typeface="Calibri" pitchFamily="34" charset="-122"/>
                 <a:cs typeface="Calibri" pitchFamily="34" charset="-120"/>
               </a:rPr>
-              <a:t>The core part of a word carrying its basic meaning. In 'circumnavigate', the root is the part after the prefix 'circum-'.</a:t>
+              <a:t>The core part of a word carrying its basic meaning. In 'circumference', the root is the part after the prefix 'circum-'.</a:t>
             </a:r>
             <a:endParaRPr lang="en-US" sz="1350" dirty="0"/>
           </a:p>
@@ -40433,7 +40649,7 @@
                 <a:ea typeface="Calibri" pitchFamily="34" charset="-122"/>
                 <a:cs typeface="Calibri" pitchFamily="34" charset="-120"/>
               </a:rPr>
-              <a:t>1.  The prefix 'circum-' comes from Latin and means around or on all sides.</a:t>
+              <a:t>1.  'Circum-' comes from the Latin language.</a:t>
             </a:r>
             <a:endParaRPr lang="en-US" sz="1300" dirty="0"/>
           </a:p>
@@ -40572,7 +40788,7 @@
                 <a:ea typeface="Calibri" pitchFamily="34" charset="-122"/>
                 <a:cs typeface="Calibri" pitchFamily="34" charset="-120"/>
               </a:rPr>
-              <a:t>2.  The word 'circumference' means the distance straight through the middle of a circle.</a:t>
+              <a:t>2.  To circumnavigate the globe means to travel all the way around it.</a:t>
             </a:r>
             <a:endParaRPr lang="en-US" sz="1300" dirty="0"/>
           </a:p>
@@ -40595,11 +40811,11 @@
             </a:avLst>
           </a:prstGeom>
           <a:solidFill>
-            <a:srgbClr val="FEE2E2"/>
-          </a:solidFill>
-          <a:ln w="12700">
-            <a:solidFill>
-              <a:srgbClr val="DC2626"/>
+            <a:srgbClr val="DCFCE7"/>
+          </a:solidFill>
+          <a:ln w="12700">
+            <a:solidFill>
+              <a:srgbClr val="16A34A"/>
             </a:solidFill>
             <a:prstDash val="solid"/>
           </a:ln>
@@ -40632,13 +40848,13 @@
             <a:r>
               <a:rPr lang="en-US" sz="1100" b="1" dirty="0">
                 <a:solidFill>
-                  <a:srgbClr val="DC2626"/>
+                  <a:srgbClr val="16A34A"/>
                 </a:solidFill>
                 <a:latin typeface="Trebuchet MS" pitchFamily="34" charset="0"/>
                 <a:ea typeface="Trebuchet MS" pitchFamily="34" charset="-122"/>
                 <a:cs typeface="Trebuchet MS" pitchFamily="34" charset="-120"/>
               </a:rPr>
-              <a:t>FALSE</a:t>
+              <a:t>TRUE</a:t>
             </a:r>
             <a:endParaRPr lang="en-US" sz="1100" dirty="0"/>
           </a:p>
@@ -40711,7 +40927,7 @@
                 <a:ea typeface="Calibri" pitchFamily="34" charset="-122"/>
                 <a:cs typeface="Calibri" pitchFamily="34" charset="-120"/>
               </a:rPr>
-              <a:t>3.  To circumnavigate the globe means to travel all the way around it.</a:t>
+              <a:t>3.  The word 'circumference' refers to the area inside a circle.</a:t>
             </a:r>
             <a:endParaRPr lang="en-US" sz="1300" dirty="0"/>
           </a:p>
@@ -40734,11 +40950,11 @@
             </a:avLst>
           </a:prstGeom>
           <a:solidFill>
-            <a:srgbClr val="DCFCE7"/>
-          </a:solidFill>
-          <a:ln w="12700">
-            <a:solidFill>
-              <a:srgbClr val="16A34A"/>
+            <a:srgbClr val="FEE2E2"/>
+          </a:solidFill>
+          <a:ln w="12700">
+            <a:solidFill>
+              <a:srgbClr val="DC2626"/>
             </a:solidFill>
             <a:prstDash val="solid"/>
           </a:ln>
@@ -40771,13 +40987,13 @@
             <a:r>
               <a:rPr lang="en-US" sz="1100" b="1" dirty="0">
                 <a:solidFill>
-                  <a:srgbClr val="16A34A"/>
+                  <a:srgbClr val="DC2626"/>
                 </a:solidFill>
                 <a:latin typeface="Trebuchet MS" pitchFamily="34" charset="0"/>
                 <a:ea typeface="Trebuchet MS" pitchFamily="34" charset="-122"/>
                 <a:cs typeface="Trebuchet MS" pitchFamily="34" charset="-120"/>
               </a:rPr>
-              <a:t>TRUE</a:t>
+              <a:t>FALSE</a:t>
             </a:r>
             <a:endParaRPr lang="en-US" sz="1100" dirty="0"/>
           </a:p>
@@ -40850,7 +41066,7 @@
                 <a:ea typeface="Calibri" pitchFamily="34" charset="-122"/>
                 <a:cs typeface="Calibri" pitchFamily="34" charset="-120"/>
               </a:rPr>
-              <a:t>4.  A circumspect person thinks carefully about all sides of a situation.</a:t>
+              <a:t>4.  The prefix 'circum-' means half or partial.</a:t>
             </a:r>
             <a:endParaRPr lang="en-US" sz="1300" dirty="0"/>
           </a:p>
@@ -40873,11 +41089,11 @@
             </a:avLst>
           </a:prstGeom>
           <a:solidFill>
-            <a:srgbClr val="DCFCE7"/>
-          </a:solidFill>
-          <a:ln w="12700">
-            <a:solidFill>
-              <a:srgbClr val="16A34A"/>
+            <a:srgbClr val="FEE2E2"/>
+          </a:solidFill>
+          <a:ln w="12700">
+            <a:solidFill>
+              <a:srgbClr val="DC2626"/>
             </a:solidFill>
             <a:prstDash val="solid"/>
           </a:ln>
@@ -40910,13 +41126,13 @@
             <a:r>
               <a:rPr lang="en-US" sz="1100" b="1" dirty="0">
                 <a:solidFill>
-                  <a:srgbClr val="16A34A"/>
+                  <a:srgbClr val="DC2626"/>
                 </a:solidFill>
                 <a:latin typeface="Trebuchet MS" pitchFamily="34" charset="0"/>
                 <a:ea typeface="Trebuchet MS" pitchFamily="34" charset="-122"/>
                 <a:cs typeface="Trebuchet MS" pitchFamily="34" charset="-120"/>
               </a:rPr>
-              <a:t>TRUE</a:t>
+              <a:t>FALSE</a:t>
             </a:r>
             <a:endParaRPr lang="en-US" sz="1100" dirty="0"/>
           </a:p>
@@ -40989,7 +41205,7 @@
                 <a:ea typeface="Calibri" pitchFamily="34" charset="-122"/>
                 <a:cs typeface="Calibri" pitchFamily="34" charset="-120"/>
               </a:rPr>
-              <a:t>5.  The prefix 'circum-' means to go forward in a straight line.</a:t>
+              <a:t>5.  The prefix 'circum-' means around or on all sides.</a:t>
             </a:r>
             <a:endParaRPr lang="en-US" sz="1300" dirty="0"/>
           </a:p>
@@ -41012,11 +41228,11 @@
             </a:avLst>
           </a:prstGeom>
           <a:solidFill>
-            <a:srgbClr val="FEE2E2"/>
-          </a:solidFill>
-          <a:ln w="12700">
-            <a:solidFill>
-              <a:srgbClr val="DC2626"/>
+            <a:srgbClr val="DCFCE7"/>
+          </a:solidFill>
+          <a:ln w="12700">
+            <a:solidFill>
+              <a:srgbClr val="16A34A"/>
             </a:solidFill>
             <a:prstDash val="solid"/>
           </a:ln>
@@ -41049,13 +41265,13 @@
             <a:r>
               <a:rPr lang="en-US" sz="1100" b="1" dirty="0">
                 <a:solidFill>
-                  <a:srgbClr val="DC2626"/>
+                  <a:srgbClr val="16A34A"/>
                 </a:solidFill>
                 <a:latin typeface="Trebuchet MS" pitchFamily="34" charset="0"/>
                 <a:ea typeface="Trebuchet MS" pitchFamily="34" charset="-122"/>
                 <a:cs typeface="Trebuchet MS" pitchFamily="34" charset="-120"/>
               </a:rPr>
-              <a:t>FALSE</a:t>
+              <a:t>TRUE</a:t>
             </a:r>
             <a:endParaRPr lang="en-US" sz="1100" dirty="0"/>
           </a:p>
@@ -41628,7 +41844,7 @@
                 <a:ea typeface="Trebuchet MS" pitchFamily="34" charset="-122"/>
                 <a:cs typeface="Trebuchet MS" pitchFamily="34" charset="-120"/>
               </a:rPr>
-              <a:t>circumnavigate</a:t>
+              <a:t>circumference</a:t>
             </a:r>
             <a:endParaRPr lang="en-US" sz="1300" dirty="0"/>
           </a:p>
@@ -41694,7 +41910,7 @@
                 <a:ea typeface="Trebuchet MS" pitchFamily="34" charset="-122"/>
                 <a:cs typeface="Trebuchet MS" pitchFamily="34" charset="-120"/>
               </a:rPr>
-              <a:t>circumference</a:t>
+              <a:t>circumnavigate</a:t>
             </a:r>
             <a:endParaRPr lang="en-US" sz="1300" dirty="0"/>
           </a:p>
@@ -41760,7 +41976,7 @@
                 <a:ea typeface="Trebuchet MS" pitchFamily="34" charset="-122"/>
                 <a:cs typeface="Trebuchet MS" pitchFamily="34" charset="-120"/>
               </a:rPr>
-              <a:t>circumscribe</a:t>
+              <a:t>circumvent</a:t>
             </a:r>
             <a:endParaRPr lang="en-US" sz="1300" dirty="0"/>
           </a:p>
@@ -41826,7 +42042,7 @@
                 <a:ea typeface="Trebuchet MS" pitchFamily="34" charset="-122"/>
                 <a:cs typeface="Trebuchet MS" pitchFamily="34" charset="-120"/>
               </a:rPr>
-              <a:t>circumvent</a:t>
+              <a:t>circumstance</a:t>
             </a:r>
             <a:endParaRPr lang="en-US" sz="1300" dirty="0"/>
           </a:p>
@@ -41892,7 +42108,7 @@
                 <a:ea typeface="Trebuchet MS" pitchFamily="34" charset="-122"/>
                 <a:cs typeface="Trebuchet MS" pitchFamily="34" charset="-120"/>
               </a:rPr>
-              <a:t>circumspect</a:t>
+              <a:t>circumscribe</a:t>
             </a:r>
             <a:endParaRPr lang="en-US" sz="1300" dirty="0"/>
           </a:p>
@@ -41958,7 +42174,7 @@
                 <a:ea typeface="Trebuchet MS" pitchFamily="34" charset="-122"/>
                 <a:cs typeface="Trebuchet MS" pitchFamily="34" charset="-120"/>
               </a:rPr>
-              <a:t>circumstance</a:t>
+              <a:t>circumspect</a:t>
             </a:r>
             <a:endParaRPr lang="en-US" sz="1300" dirty="0"/>
           </a:p>
@@ -43293,7 +43509,7 @@
                 <a:ea typeface="Trebuchet MS" pitchFamily="34" charset="-122"/>
                 <a:cs typeface="Trebuchet MS" pitchFamily="34" charset="-120"/>
               </a:rPr>
-              <a:t>spect</a:t>
+              <a:t>stance</a:t>
             </a:r>
             <a:endParaRPr lang="en-US" sz="1300" dirty="0"/>
           </a:p>
@@ -43798,7 +44014,7 @@
                 <a:ea typeface="Trebuchet MS" pitchFamily="34" charset="-122"/>
                 <a:cs typeface="Trebuchet MS" pitchFamily="34" charset="-120"/>
               </a:rPr>
-              <a:t>circumnavigate</a:t>
+              <a:t>circumference</a:t>
             </a:r>
             <a:endParaRPr lang="en-US" sz="1400" dirty="0"/>
           </a:p>
@@ -44202,7 +44418,7 @@
                 <a:ea typeface="Trebuchet MS" pitchFamily="34" charset="-122"/>
                 <a:cs typeface="Trebuchet MS" pitchFamily="34" charset="-120"/>
               </a:rPr>
-              <a:t>circumnavigate</a:t>
+              <a:t>circumference</a:t>
             </a:r>
             <a:endParaRPr lang="en-US" sz="1200" dirty="0"/>
           </a:p>
@@ -44268,7 +44484,7 @@
                 <a:ea typeface="Calibri" pitchFamily="34" charset="-122"/>
                 <a:cs typeface="Calibri" pitchFamily="34" charset="-120"/>
               </a:rPr>
-              <a:t>A curved accent mark (^) placed over a letter in some languages.</a:t>
+              <a:t>A curved accent mark (^) placed over a vowel in some languages.</a:t>
             </a:r>
             <a:endParaRPr lang="en-US" sz="1200" dirty="0"/>
           </a:p>
@@ -44341,7 +44557,7 @@
                 <a:ea typeface="Trebuchet MS" pitchFamily="34" charset="-122"/>
                 <a:cs typeface="Trebuchet MS" pitchFamily="34" charset="-120"/>
               </a:rPr>
-              <a:t>circumference</a:t>
+              <a:t>circumnavigate</a:t>
             </a:r>
             <a:endParaRPr lang="en-US" sz="1200" dirty="0"/>
           </a:p>
@@ -44407,7 +44623,7 @@
                 <a:ea typeface="Calibri" pitchFamily="34" charset="-122"/>
                 <a:cs typeface="Calibri" pitchFamily="34" charset="-120"/>
               </a:rPr>
-              <a:t>To find a clever way around a rule or obstacle.</a:t>
+              <a:t>The conditions or facts that surround a situation or event.</a:t>
             </a:r>
             <a:endParaRPr lang="en-US" sz="1200" dirty="0"/>
           </a:p>
@@ -44480,7 +44696,7 @@
                 <a:ea typeface="Trebuchet MS" pitchFamily="34" charset="-122"/>
                 <a:cs typeface="Trebuchet MS" pitchFamily="34" charset="-120"/>
               </a:rPr>
-              <a:t>circumscribe</a:t>
+              <a:t>circumvent</a:t>
             </a:r>
             <a:endParaRPr lang="en-US" sz="1200" dirty="0"/>
           </a:p>
@@ -44546,7 +44762,7 @@
                 <a:ea typeface="Calibri" pitchFamily="34" charset="-122"/>
                 <a:cs typeface="Calibri" pitchFamily="34" charset="-120"/>
               </a:rPr>
-              <a:t>The conditions or facts that surround a particular event or situation.</a:t>
+              <a:t>Being very careful and thinking about all sides before acting.</a:t>
             </a:r>
             <a:endParaRPr lang="en-US" sz="1200" dirty="0"/>
           </a:p>
@@ -44619,7 +44835,7 @@
                 <a:ea typeface="Trebuchet MS" pitchFamily="34" charset="-122"/>
                 <a:cs typeface="Trebuchet MS" pitchFamily="34" charset="-120"/>
               </a:rPr>
-              <a:t>circumvent</a:t>
+              <a:t>circumstance</a:t>
             </a:r>
             <a:endParaRPr lang="en-US" sz="1200" dirty="0"/>
           </a:p>
@@ -44685,7 +44901,7 @@
                 <a:ea typeface="Calibri" pitchFamily="34" charset="-122"/>
                 <a:cs typeface="Calibri" pitchFamily="34" charset="-120"/>
               </a:rPr>
-              <a:t>Being very careful to think about all sides of a situation before acting.</a:t>
+              <a:t>To draw a line around something, or to limit what someone can do.</a:t>
             </a:r>
             <a:endParaRPr lang="en-US" sz="1200" dirty="0"/>
           </a:p>
@@ -44758,7 +44974,7 @@
                 <a:ea typeface="Trebuchet MS" pitchFamily="34" charset="-122"/>
                 <a:cs typeface="Trebuchet MS" pitchFamily="34" charset="-120"/>
               </a:rPr>
-              <a:t>circumspect</a:t>
+              <a:t>circumscribe</a:t>
             </a:r>
             <a:endParaRPr lang="en-US" sz="1200" dirty="0"/>
           </a:p>
@@ -44824,7 +45040,7 @@
                 <a:ea typeface="Calibri" pitchFamily="34" charset="-122"/>
                 <a:cs typeface="Calibri" pitchFamily="34" charset="-120"/>
               </a:rPr>
-              <a:t>To travel all the way around something, like sailing around the whole world.</a:t>
+              <a:t>The distance all the way around the outside of a circle.</a:t>
             </a:r>
             <a:endParaRPr lang="en-US" sz="1200" dirty="0"/>
           </a:p>
@@ -44897,7 +45113,7 @@
                 <a:ea typeface="Trebuchet MS" pitchFamily="34" charset="-122"/>
                 <a:cs typeface="Trebuchet MS" pitchFamily="34" charset="-120"/>
               </a:rPr>
-              <a:t>circumstance</a:t>
+              <a:t>circumspect</a:t>
             </a:r>
             <a:endParaRPr lang="en-US" sz="1200" dirty="0"/>
           </a:p>
@@ -44963,7 +45179,7 @@
                 <a:ea typeface="Calibri" pitchFamily="34" charset="-122"/>
                 <a:cs typeface="Calibri" pitchFamily="34" charset="-120"/>
               </a:rPr>
-              <a:t>To draw a line around something, or to limit what someone is allowed to do.</a:t>
+              <a:t>To find a clever way around a rule or obstacle.</a:t>
             </a:r>
             <a:endParaRPr lang="en-US" sz="1200" dirty="0"/>
           </a:p>
@@ -45102,7 +45318,7 @@
                 <a:ea typeface="Calibri" pitchFamily="34" charset="-122"/>
                 <a:cs typeface="Calibri" pitchFamily="34" charset="-120"/>
               </a:rPr>
-              <a:t>The distance around the outside of a circle or round object.</a:t>
+              <a:t>To travel completely around something, like sailing around the whole world.</a:t>
             </a:r>
             <a:endParaRPr lang="en-US" sz="1200" dirty="0"/>
           </a:p>
@@ -45597,7 +45813,7 @@
                 <a:ea typeface="Calibri" pitchFamily="34" charset="-122"/>
                 <a:cs typeface="Calibri" pitchFamily="34" charset="-120"/>
               </a:rPr>
-              <a:t>The brave sailors set out to circumnavigate the entire continent of Australia.</a:t>
+              <a:t>The students used a piece of string to measure the circumference of the basketball.</a:t>
             </a:r>
             <a:endParaRPr lang="en-US" sz="1500" dirty="0"/>
           </a:p>
@@ -45761,7 +45977,7 @@
                 <a:ea typeface="Calibri" pitchFamily="34" charset="-122"/>
                 <a:cs typeface="Calibri" pitchFamily="34" charset="-120"/>
               </a:rPr>
-              <a:t>To find the circumference of the circle, you multiply the diameter by pi.</a:t>
+              <a:t>Ferdinand Magellan's crew were the first people to circumnavigate the entire globe.</a:t>
             </a:r>
             <a:endParaRPr lang="en-US" sz="1500" dirty="0"/>
           </a:p>
@@ -45925,7 +46141,7 @@
                 <a:ea typeface="Calibri" pitchFamily="34" charset="-122"/>
                 <a:cs typeface="Calibri" pitchFamily="34" charset="-120"/>
               </a:rPr>
-              <a:t>She was circumspect about her decision, making sure she had thought of everything before answering.</a:t>
+              <a:t>Under the circumstances, the teacher decided to give the class extra time to finish the test.</a:t>
             </a:r>
             <a:endParaRPr lang="en-US" sz="1500" dirty="0"/>
           </a:p>
